--- a/exports/pptx/lessons/middle-module-15-project-implementation/day-05-critique.pptx
+++ b/exports/pptx/lessons/middle-module-15-project-implementation/day-05-critique.pptx
@@ -17,9 +17,15 @@
     <p:sldId id="265" r:id="rId11"/>
     <p:sldId id="266" r:id="rId12"/>
     <p:sldId id="267" r:id="rId13"/>
+    <p:sldId id="268" r:id="rId14"/>
+    <p:sldId id="269" r:id="rId15"/>
+    <p:sldId id="270" r:id="rId16"/>
+    <p:sldId id="271" r:id="rId17"/>
+    <p:sldId id="272" r:id="rId18"/>
+    <p:sldId id="273" r:id="rId19"/>
   </p:sldIdLst>
   <p:notesMasterIdLst>
-    <p:notesMasterId r:id="rId14"/>
+    <p:notesMasterId r:id="rId20"/>
   </p:notesMasterIdLst>
   <p:sldSz cx="9144000" cy="5143500"/>
   <p:notesSz cx="5143500" cy="9144000"/>
@@ -801,6 +807,534 @@
             <a:fld id="{F7021451-1387-4CA6-816F-3879F97B5CBC}" type="slidenum">
               <a:rPr lang="en-US"/>
               <a:t>12</a:t>
+            </a:fld>
+            <a:endParaRPr lang="en-US"/>
+          </a:p>
+        </p:txBody>
+      </p:sp>
+    </p:spTree>
+    <p:extLst>
+      <p:ext uri="{BB962C8B-B14F-4D97-AF65-F5344CB8AC3E}">
+        <p14:creationId xmlns:p14="http://schemas.microsoft.com/office/powerpoint/2010/main" val="1024086991"/>
+      </p:ext>
+    </p:extLst>
+  </p:cSld>
+  <p:clrMapOvr>
+    <a:masterClrMapping/>
+  </p:clrMapOvr>
+</p:notes>
+</file>
+
+<file path=ppt/notesSlides/notesSlide13.xml><?xml version="1.0" encoding="utf-8"?>
+<p:notes xmlns:a="http://schemas.openxmlformats.org/drawingml/2006/main" xmlns:r="http://schemas.openxmlformats.org/officeDocument/2006/relationships" xmlns:p="http://schemas.openxmlformats.org/presentationml/2006/main">
+  <p:cSld>
+    <p:spTree>
+      <p:nvGrpSpPr>
+        <p:cNvPr id="1" name=""/>
+        <p:cNvGrpSpPr/>
+        <p:nvPr/>
+      </p:nvGrpSpPr>
+      <p:grpSpPr>
+        <a:xfrm>
+          <a:off x="0" y="0"/>
+          <a:ext cx="0" cy="0"/>
+          <a:chOff x="0" y="0"/>
+          <a:chExt cx="0" cy="0"/>
+        </a:xfrm>
+      </p:grpSpPr>
+      <p:sp>
+        <p:nvSpPr>
+          <p:cNvPr id="2" name="Slide Image Placeholder 1"/>
+          <p:cNvSpPr>
+            <a:spLocks noGrp="1" noRot="1" noChangeAspect="1"/>
+          </p:cNvSpPr>
+          <p:nvPr>
+            <p:ph type="sldImg"/>
+          </p:nvPr>
+        </p:nvSpPr>
+        <p:spPr/>
+      </p:sp>
+      <p:sp>
+        <p:nvSpPr>
+          <p:cNvPr id="3" name="Notes Placeholder 2"/>
+          <p:cNvSpPr>
+            <a:spLocks noGrp="1"/>
+          </p:cNvSpPr>
+          <p:nvPr>
+            <p:ph type="body" idx="1"/>
+          </p:nvPr>
+        </p:nvSpPr>
+        <p:spPr/>
+        <p:txBody>
+          <a:bodyPr/>
+          <a:lstStyle/>
+          <a:p>
+            <a:r>
+              <a:rPr lang="en-US" dirty="0"/>
+              <a:t/>
+            </a:r>
+            <a:endParaRPr lang="en-US" dirty="0"/>
+          </a:p>
+        </p:txBody>
+      </p:sp>
+      <p:sp>
+        <p:nvSpPr>
+          <p:cNvPr id="4" name="Slide Number Placeholder 3"/>
+          <p:cNvSpPr>
+            <a:spLocks noGrp="1"/>
+          </p:cNvSpPr>
+          <p:nvPr>
+            <p:ph type="sldNum" sz="quarter" idx="10"/>
+          </p:nvPr>
+        </p:nvSpPr>
+        <p:spPr/>
+        <p:txBody>
+          <a:bodyPr/>
+          <a:lstStyle/>
+          <a:p>
+            <a:fld id="{F7021451-1387-4CA6-816F-3879F97B5CBC}" type="slidenum">
+              <a:rPr lang="en-US"/>
+              <a:t>13</a:t>
+            </a:fld>
+            <a:endParaRPr lang="en-US"/>
+          </a:p>
+        </p:txBody>
+      </p:sp>
+    </p:spTree>
+    <p:extLst>
+      <p:ext uri="{BB962C8B-B14F-4D97-AF65-F5344CB8AC3E}">
+        <p14:creationId xmlns:p14="http://schemas.microsoft.com/office/powerpoint/2010/main" val="1024086991"/>
+      </p:ext>
+    </p:extLst>
+  </p:cSld>
+  <p:clrMapOvr>
+    <a:masterClrMapping/>
+  </p:clrMapOvr>
+</p:notes>
+</file>
+
+<file path=ppt/notesSlides/notesSlide14.xml><?xml version="1.0" encoding="utf-8"?>
+<p:notes xmlns:a="http://schemas.openxmlformats.org/drawingml/2006/main" xmlns:r="http://schemas.openxmlformats.org/officeDocument/2006/relationships" xmlns:p="http://schemas.openxmlformats.org/presentationml/2006/main">
+  <p:cSld>
+    <p:spTree>
+      <p:nvGrpSpPr>
+        <p:cNvPr id="1" name=""/>
+        <p:cNvGrpSpPr/>
+        <p:nvPr/>
+      </p:nvGrpSpPr>
+      <p:grpSpPr>
+        <a:xfrm>
+          <a:off x="0" y="0"/>
+          <a:ext cx="0" cy="0"/>
+          <a:chOff x="0" y="0"/>
+          <a:chExt cx="0" cy="0"/>
+        </a:xfrm>
+      </p:grpSpPr>
+      <p:sp>
+        <p:nvSpPr>
+          <p:cNvPr id="2" name="Slide Image Placeholder 1"/>
+          <p:cNvSpPr>
+            <a:spLocks noGrp="1" noRot="1" noChangeAspect="1"/>
+          </p:cNvSpPr>
+          <p:nvPr>
+            <p:ph type="sldImg"/>
+          </p:nvPr>
+        </p:nvSpPr>
+        <p:spPr/>
+      </p:sp>
+      <p:sp>
+        <p:nvSpPr>
+          <p:cNvPr id="3" name="Notes Placeholder 2"/>
+          <p:cNvSpPr>
+            <a:spLocks noGrp="1"/>
+          </p:cNvSpPr>
+          <p:nvPr>
+            <p:ph type="body" idx="1"/>
+          </p:nvPr>
+        </p:nvSpPr>
+        <p:spPr/>
+        <p:txBody>
+          <a:bodyPr/>
+          <a:lstStyle/>
+          <a:p>
+            <a:r>
+              <a:rPr lang="en-US" dirty="0"/>
+              <a:t/>
+            </a:r>
+            <a:endParaRPr lang="en-US" dirty="0"/>
+          </a:p>
+        </p:txBody>
+      </p:sp>
+      <p:sp>
+        <p:nvSpPr>
+          <p:cNvPr id="4" name="Slide Number Placeholder 3"/>
+          <p:cNvSpPr>
+            <a:spLocks noGrp="1"/>
+          </p:cNvSpPr>
+          <p:nvPr>
+            <p:ph type="sldNum" sz="quarter" idx="10"/>
+          </p:nvPr>
+        </p:nvSpPr>
+        <p:spPr/>
+        <p:txBody>
+          <a:bodyPr/>
+          <a:lstStyle/>
+          <a:p>
+            <a:fld id="{F7021451-1387-4CA6-816F-3879F97B5CBC}" type="slidenum">
+              <a:rPr lang="en-US"/>
+              <a:t>14</a:t>
+            </a:fld>
+            <a:endParaRPr lang="en-US"/>
+          </a:p>
+        </p:txBody>
+      </p:sp>
+    </p:spTree>
+    <p:extLst>
+      <p:ext uri="{BB962C8B-B14F-4D97-AF65-F5344CB8AC3E}">
+        <p14:creationId xmlns:p14="http://schemas.microsoft.com/office/powerpoint/2010/main" val="1024086991"/>
+      </p:ext>
+    </p:extLst>
+  </p:cSld>
+  <p:clrMapOvr>
+    <a:masterClrMapping/>
+  </p:clrMapOvr>
+</p:notes>
+</file>
+
+<file path=ppt/notesSlides/notesSlide15.xml><?xml version="1.0" encoding="utf-8"?>
+<p:notes xmlns:a="http://schemas.openxmlformats.org/drawingml/2006/main" xmlns:r="http://schemas.openxmlformats.org/officeDocument/2006/relationships" xmlns:p="http://schemas.openxmlformats.org/presentationml/2006/main">
+  <p:cSld>
+    <p:spTree>
+      <p:nvGrpSpPr>
+        <p:cNvPr id="1" name=""/>
+        <p:cNvGrpSpPr/>
+        <p:nvPr/>
+      </p:nvGrpSpPr>
+      <p:grpSpPr>
+        <a:xfrm>
+          <a:off x="0" y="0"/>
+          <a:ext cx="0" cy="0"/>
+          <a:chOff x="0" y="0"/>
+          <a:chExt cx="0" cy="0"/>
+        </a:xfrm>
+      </p:grpSpPr>
+      <p:sp>
+        <p:nvSpPr>
+          <p:cNvPr id="2" name="Slide Image Placeholder 1"/>
+          <p:cNvSpPr>
+            <a:spLocks noGrp="1" noRot="1" noChangeAspect="1"/>
+          </p:cNvSpPr>
+          <p:nvPr>
+            <p:ph type="sldImg"/>
+          </p:nvPr>
+        </p:nvSpPr>
+        <p:spPr/>
+      </p:sp>
+      <p:sp>
+        <p:nvSpPr>
+          <p:cNvPr id="3" name="Notes Placeholder 2"/>
+          <p:cNvSpPr>
+            <a:spLocks noGrp="1"/>
+          </p:cNvSpPr>
+          <p:nvPr>
+            <p:ph type="body" idx="1"/>
+          </p:nvPr>
+        </p:nvSpPr>
+        <p:spPr/>
+        <p:txBody>
+          <a:bodyPr/>
+          <a:lstStyle/>
+          <a:p>
+            <a:r>
+              <a:rPr lang="en-US" dirty="0"/>
+              <a:t/>
+            </a:r>
+            <a:endParaRPr lang="en-US" dirty="0"/>
+          </a:p>
+        </p:txBody>
+      </p:sp>
+      <p:sp>
+        <p:nvSpPr>
+          <p:cNvPr id="4" name="Slide Number Placeholder 3"/>
+          <p:cNvSpPr>
+            <a:spLocks noGrp="1"/>
+          </p:cNvSpPr>
+          <p:nvPr>
+            <p:ph type="sldNum" sz="quarter" idx="10"/>
+          </p:nvPr>
+        </p:nvSpPr>
+        <p:spPr/>
+        <p:txBody>
+          <a:bodyPr/>
+          <a:lstStyle/>
+          <a:p>
+            <a:fld id="{F7021451-1387-4CA6-816F-3879F97B5CBC}" type="slidenum">
+              <a:rPr lang="en-US"/>
+              <a:t>15</a:t>
+            </a:fld>
+            <a:endParaRPr lang="en-US"/>
+          </a:p>
+        </p:txBody>
+      </p:sp>
+    </p:spTree>
+    <p:extLst>
+      <p:ext uri="{BB962C8B-B14F-4D97-AF65-F5344CB8AC3E}">
+        <p14:creationId xmlns:p14="http://schemas.microsoft.com/office/powerpoint/2010/main" val="1024086991"/>
+      </p:ext>
+    </p:extLst>
+  </p:cSld>
+  <p:clrMapOvr>
+    <a:masterClrMapping/>
+  </p:clrMapOvr>
+</p:notes>
+</file>
+
+<file path=ppt/notesSlides/notesSlide16.xml><?xml version="1.0" encoding="utf-8"?>
+<p:notes xmlns:a="http://schemas.openxmlformats.org/drawingml/2006/main" xmlns:r="http://schemas.openxmlformats.org/officeDocument/2006/relationships" xmlns:p="http://schemas.openxmlformats.org/presentationml/2006/main">
+  <p:cSld>
+    <p:spTree>
+      <p:nvGrpSpPr>
+        <p:cNvPr id="1" name=""/>
+        <p:cNvGrpSpPr/>
+        <p:nvPr/>
+      </p:nvGrpSpPr>
+      <p:grpSpPr>
+        <a:xfrm>
+          <a:off x="0" y="0"/>
+          <a:ext cx="0" cy="0"/>
+          <a:chOff x="0" y="0"/>
+          <a:chExt cx="0" cy="0"/>
+        </a:xfrm>
+      </p:grpSpPr>
+      <p:sp>
+        <p:nvSpPr>
+          <p:cNvPr id="2" name="Slide Image Placeholder 1"/>
+          <p:cNvSpPr>
+            <a:spLocks noGrp="1" noRot="1" noChangeAspect="1"/>
+          </p:cNvSpPr>
+          <p:nvPr>
+            <p:ph type="sldImg"/>
+          </p:nvPr>
+        </p:nvSpPr>
+        <p:spPr/>
+      </p:sp>
+      <p:sp>
+        <p:nvSpPr>
+          <p:cNvPr id="3" name="Notes Placeholder 2"/>
+          <p:cNvSpPr>
+            <a:spLocks noGrp="1"/>
+          </p:cNvSpPr>
+          <p:nvPr>
+            <p:ph type="body" idx="1"/>
+          </p:nvPr>
+        </p:nvSpPr>
+        <p:spPr/>
+        <p:txBody>
+          <a:bodyPr/>
+          <a:lstStyle/>
+          <a:p>
+            <a:r>
+              <a:rPr lang="en-US" dirty="0"/>
+              <a:t/>
+            </a:r>
+            <a:endParaRPr lang="en-US" dirty="0"/>
+          </a:p>
+        </p:txBody>
+      </p:sp>
+      <p:sp>
+        <p:nvSpPr>
+          <p:cNvPr id="4" name="Slide Number Placeholder 3"/>
+          <p:cNvSpPr>
+            <a:spLocks noGrp="1"/>
+          </p:cNvSpPr>
+          <p:nvPr>
+            <p:ph type="sldNum" sz="quarter" idx="10"/>
+          </p:nvPr>
+        </p:nvSpPr>
+        <p:spPr/>
+        <p:txBody>
+          <a:bodyPr/>
+          <a:lstStyle/>
+          <a:p>
+            <a:fld id="{F7021451-1387-4CA6-816F-3879F97B5CBC}" type="slidenum">
+              <a:rPr lang="en-US"/>
+              <a:t>16</a:t>
+            </a:fld>
+            <a:endParaRPr lang="en-US"/>
+          </a:p>
+        </p:txBody>
+      </p:sp>
+    </p:spTree>
+    <p:extLst>
+      <p:ext uri="{BB962C8B-B14F-4D97-AF65-F5344CB8AC3E}">
+        <p14:creationId xmlns:p14="http://schemas.microsoft.com/office/powerpoint/2010/main" val="1024086991"/>
+      </p:ext>
+    </p:extLst>
+  </p:cSld>
+  <p:clrMapOvr>
+    <a:masterClrMapping/>
+  </p:clrMapOvr>
+</p:notes>
+</file>
+
+<file path=ppt/notesSlides/notesSlide17.xml><?xml version="1.0" encoding="utf-8"?>
+<p:notes xmlns:a="http://schemas.openxmlformats.org/drawingml/2006/main" xmlns:r="http://schemas.openxmlformats.org/officeDocument/2006/relationships" xmlns:p="http://schemas.openxmlformats.org/presentationml/2006/main">
+  <p:cSld>
+    <p:spTree>
+      <p:nvGrpSpPr>
+        <p:cNvPr id="1" name=""/>
+        <p:cNvGrpSpPr/>
+        <p:nvPr/>
+      </p:nvGrpSpPr>
+      <p:grpSpPr>
+        <a:xfrm>
+          <a:off x="0" y="0"/>
+          <a:ext cx="0" cy="0"/>
+          <a:chOff x="0" y="0"/>
+          <a:chExt cx="0" cy="0"/>
+        </a:xfrm>
+      </p:grpSpPr>
+      <p:sp>
+        <p:nvSpPr>
+          <p:cNvPr id="2" name="Slide Image Placeholder 1"/>
+          <p:cNvSpPr>
+            <a:spLocks noGrp="1" noRot="1" noChangeAspect="1"/>
+          </p:cNvSpPr>
+          <p:nvPr>
+            <p:ph type="sldImg"/>
+          </p:nvPr>
+        </p:nvSpPr>
+        <p:spPr/>
+      </p:sp>
+      <p:sp>
+        <p:nvSpPr>
+          <p:cNvPr id="3" name="Notes Placeholder 2"/>
+          <p:cNvSpPr>
+            <a:spLocks noGrp="1"/>
+          </p:cNvSpPr>
+          <p:nvPr>
+            <p:ph type="body" idx="1"/>
+          </p:nvPr>
+        </p:nvSpPr>
+        <p:spPr/>
+        <p:txBody>
+          <a:bodyPr/>
+          <a:lstStyle/>
+          <a:p>
+            <a:r>
+              <a:rPr lang="en-US" dirty="0"/>
+              <a:t/>
+            </a:r>
+            <a:endParaRPr lang="en-US" dirty="0"/>
+          </a:p>
+        </p:txBody>
+      </p:sp>
+      <p:sp>
+        <p:nvSpPr>
+          <p:cNvPr id="4" name="Slide Number Placeholder 3"/>
+          <p:cNvSpPr>
+            <a:spLocks noGrp="1"/>
+          </p:cNvSpPr>
+          <p:nvPr>
+            <p:ph type="sldNum" sz="quarter" idx="10"/>
+          </p:nvPr>
+        </p:nvSpPr>
+        <p:spPr/>
+        <p:txBody>
+          <a:bodyPr/>
+          <a:lstStyle/>
+          <a:p>
+            <a:fld id="{F7021451-1387-4CA6-816F-3879F97B5CBC}" type="slidenum">
+              <a:rPr lang="en-US"/>
+              <a:t>17</a:t>
+            </a:fld>
+            <a:endParaRPr lang="en-US"/>
+          </a:p>
+        </p:txBody>
+      </p:sp>
+    </p:spTree>
+    <p:extLst>
+      <p:ext uri="{BB962C8B-B14F-4D97-AF65-F5344CB8AC3E}">
+        <p14:creationId xmlns:p14="http://schemas.microsoft.com/office/powerpoint/2010/main" val="1024086991"/>
+      </p:ext>
+    </p:extLst>
+  </p:cSld>
+  <p:clrMapOvr>
+    <a:masterClrMapping/>
+  </p:clrMapOvr>
+</p:notes>
+</file>
+
+<file path=ppt/notesSlides/notesSlide18.xml><?xml version="1.0" encoding="utf-8"?>
+<p:notes xmlns:a="http://schemas.openxmlformats.org/drawingml/2006/main" xmlns:r="http://schemas.openxmlformats.org/officeDocument/2006/relationships" xmlns:p="http://schemas.openxmlformats.org/presentationml/2006/main">
+  <p:cSld>
+    <p:spTree>
+      <p:nvGrpSpPr>
+        <p:cNvPr id="1" name=""/>
+        <p:cNvGrpSpPr/>
+        <p:nvPr/>
+      </p:nvGrpSpPr>
+      <p:grpSpPr>
+        <a:xfrm>
+          <a:off x="0" y="0"/>
+          <a:ext cx="0" cy="0"/>
+          <a:chOff x="0" y="0"/>
+          <a:chExt cx="0" cy="0"/>
+        </a:xfrm>
+      </p:grpSpPr>
+      <p:sp>
+        <p:nvSpPr>
+          <p:cNvPr id="2" name="Slide Image Placeholder 1"/>
+          <p:cNvSpPr>
+            <a:spLocks noGrp="1" noRot="1" noChangeAspect="1"/>
+          </p:cNvSpPr>
+          <p:nvPr>
+            <p:ph type="sldImg"/>
+          </p:nvPr>
+        </p:nvSpPr>
+        <p:spPr/>
+      </p:sp>
+      <p:sp>
+        <p:nvSpPr>
+          <p:cNvPr id="3" name="Notes Placeholder 2"/>
+          <p:cNvSpPr>
+            <a:spLocks noGrp="1"/>
+          </p:cNvSpPr>
+          <p:nvPr>
+            <p:ph type="body" idx="1"/>
+          </p:nvPr>
+        </p:nvSpPr>
+        <p:spPr/>
+        <p:txBody>
+          <a:bodyPr/>
+          <a:lstStyle/>
+          <a:p>
+            <a:r>
+              <a:rPr lang="en-US" dirty="0"/>
+              <a:t/>
+            </a:r>
+            <a:endParaRPr lang="en-US" dirty="0"/>
+          </a:p>
+        </p:txBody>
+      </p:sp>
+      <p:sp>
+        <p:nvSpPr>
+          <p:cNvPr id="4" name="Slide Number Placeholder 3"/>
+          <p:cNvSpPr>
+            <a:spLocks noGrp="1"/>
+          </p:cNvSpPr>
+          <p:nvPr>
+            <p:ph type="sldNum" sz="quarter" idx="10"/>
+          </p:nvPr>
+        </p:nvSpPr>
+        <p:spPr/>
+        <p:txBody>
+          <a:bodyPr/>
+          <a:lstStyle/>
+          <a:p>
+            <a:fld id="{F7021451-1387-4CA6-816F-3879F97B5CBC}" type="slidenum">
+              <a:rPr lang="en-US"/>
+              <a:t>18</a:t>
             </a:fld>
             <a:endParaRPr lang="en-US"/>
           </a:p>
@@ -2100,102 +2634,6 @@
         </p:nvSpPr>
         <p:spPr>
           <a:xfrm>
-            <a:off x="406301" y="1223963"/>
-            <a:ext cx="8498026" cy="274290"/>
-          </a:xfrm>
-          <a:prstGeom prst="rect">
-            <a:avLst/>
-          </a:prstGeom>
-          <a:noFill/>
-          <a:ln/>
-        </p:spPr>
-        <p:txBody>
-          <a:bodyPr wrap="square" lIns="0" tIns="0" rIns="0" bIns="0" rtlCol="0" anchor="t"/>
-          <a:lstStyle/>
-          <a:p>
-            <a:pPr algn="l" indent="0" marL="0">
-              <a:lnSpc>
-                <a:spcPts val="2160"/>
-              </a:lnSpc>
-              <a:spcBef>
-                <a:spcPts val="600"/>
-              </a:spcBef>
-              <a:spcAft>
-                <a:spcPts val="800"/>
-              </a:spcAft>
-              <a:buNone/>
-            </a:pPr>
-            <a:r>
-              <a:rPr lang="en-US" sz="1800" b="1" dirty="0">
-                <a:solidFill>
-                  <a:srgbClr val="FE4447"/>
-                </a:solidFill>
-                <a:latin typeface="Georgia" pitchFamily="34" charset="0"/>
-                <a:ea typeface="Georgia" pitchFamily="34" charset="-122"/>
-                <a:cs typeface="Georgia" pitchFamily="34" charset="-120"/>
-              </a:rPr>
-              <a:t>Learning objective</a:t>
-            </a:r>
-            <a:endParaRPr lang="en-US" sz="1800" dirty="0"/>
-          </a:p>
-        </p:txBody>
-      </p:sp>
-      <p:sp>
-        <p:nvSpPr>
-          <p:cNvPr id="6" name="Text 4"/>
-          <p:cNvSpPr/>
-          <p:nvPr/>
-        </p:nvSpPr>
-        <p:spPr>
-          <a:xfrm>
-            <a:off x="406301" y="1637854"/>
-            <a:ext cx="8498026" cy="426541"/>
-          </a:xfrm>
-          <a:prstGeom prst="rect">
-            <a:avLst/>
-          </a:prstGeom>
-          <a:noFill/>
-          <a:ln/>
-        </p:spPr>
-        <p:txBody>
-          <a:bodyPr wrap="square" lIns="0" tIns="0" rIns="0" bIns="0" rtlCol="0" anchor="t"/>
-          <a:lstStyle/>
-          <a:p>
-            <a:pPr algn="l" indent="0" marL="0">
-              <a:lnSpc>
-                <a:spcPts val="1680"/>
-              </a:lnSpc>
-              <a:spcBef>
-                <a:spcPts val="300"/>
-              </a:spcBef>
-              <a:spcAft>
-                <a:spcPts val="300"/>
-              </a:spcAft>
-              <a:buNone/>
-            </a:pPr>
-            <a:r>
-              <a:rPr lang="en-US" sz="1200" dirty="0">
-                <a:solidFill>
-                  <a:srgbClr val="1C2833"/>
-                </a:solidFill>
-                <a:latin typeface="Arial" pitchFamily="34" charset="0"/>
-                <a:ea typeface="Arial" pitchFamily="34" charset="-122"/>
-                <a:cs typeface="Arial" pitchFamily="34" charset="-120"/>
-              </a:rPr>
-              <a:t>By the end of this lesson, students will have given and received structured peer feedback on their project plan, sources, and first sketch — and will leave with a written list of at least three changes they'll make over Days 6–7.</a:t>
-            </a:r>
-            <a:endParaRPr lang="en-US" sz="1200" dirty="0"/>
-          </a:p>
-        </p:txBody>
-      </p:sp>
-      <p:sp>
-        <p:nvSpPr>
-          <p:cNvPr id="7" name="Text 5"/>
-          <p:cNvSpPr/>
-          <p:nvPr/>
-        </p:nvSpPr>
-        <p:spPr>
-          <a:xfrm>
             <a:off x="406301" y="4434929"/>
             <a:ext cx="8498026" cy="213271"/>
           </a:xfrm>
@@ -2340,7 +2778,7 @@
                 <a:ea typeface="Georgia" pitchFamily="34" charset="-122"/>
                 <a:cs typeface="Georgia" pitchFamily="34" charset="-120"/>
               </a:rPr>
-              <a:t>Differentiation</a:t>
+              <a:t>Activity (25 min) — Run the protocol</a:t>
             </a:r>
             <a:endParaRPr lang="en-US" sz="1800" dirty="0"/>
           </a:p>
@@ -2354,8 +2792,8 @@
         </p:nvSpPr>
         <p:spPr>
           <a:xfrm>
-            <a:off x="634901" y="883593"/>
-            <a:ext cx="8102798" cy="937022"/>
+            <a:off x="406301" y="870942"/>
+            <a:ext cx="8498026" cy="649337"/>
           </a:xfrm>
           <a:prstGeom prst="rect">
             <a:avLst/>
@@ -2367,18 +2805,20 @@
           <a:bodyPr wrap="square" lIns="0" tIns="0" rIns="0" bIns="0" rtlCol="0" anchor="t"/>
           <a:lstStyle/>
           <a:p>
-            <a:pPr algn="l" marL="342900" indent="-342900">
-              <a:lnSpc>
-                <a:spcPts val="1620"/>
-              </a:lnSpc>
-              <a:spcAft>
-                <a:spcPts val="300"/>
-              </a:spcAft>
-              <a:buSzPct val="100000"/>
-              <a:buChar char="•"/>
-            </a:pPr>
-            <a:r>
-              <a:rPr lang="en-US" sz="1200" b="1" dirty="0">
+            <a:pPr algn="l" indent="0" marL="0">
+              <a:lnSpc>
+                <a:spcPts val="1680"/>
+              </a:lnSpc>
+              <a:spcBef>
+                <a:spcPts val="300"/>
+              </a:spcBef>
+              <a:spcAft>
+                <a:spcPts val="300"/>
+              </a:spcAft>
+              <a:buNone/>
+            </a:pPr>
+            <a:r>
+              <a:rPr lang="en-US" sz="1200" dirty="0">
                 <a:solidFill>
                   <a:srgbClr val="1C2833"/>
                 </a:solidFill>
@@ -2386,12 +2826,15 @@
                 <a:ea typeface="Arial" pitchFamily="34" charset="-122"/>
                 <a:cs typeface="Arial" pitchFamily="34" charset="-120"/>
               </a:rPr>
-              <a:t>One tier up:</a:t>
-            </a:r>
-            <a:pPr algn="l" indent="0" marL="0">
-              <a:lnSpc>
-                <a:spcPts val="1620"/>
-              </a:lnSpc>
+              <a:t>See </a:t>
+            </a:r>
+            <a:pPr algn="l" indent="0" marL="0">
+              <a:lnSpc>
+                <a:spcPts val="1680"/>
+              </a:lnSpc>
+              <a:spcBef>
+                <a:spcPts val="300"/>
+              </a:spcBef>
               <a:spcAft>
                 <a:spcPts val="300"/>
               </a:spcAft>
@@ -2406,19 +2849,22 @@
                 <a:ea typeface="Arial" pitchFamily="34" charset="-122"/>
                 <a:cs typeface="Arial" pitchFamily="34" charset="-120"/>
               </a:rPr>
-              <a:t> After the protocol, write a 50-word paragraph in your journal about what changed in your </a:t>
-            </a:r>
-            <a:pPr algn="l" indent="0" marL="0">
-              <a:lnSpc>
-                <a:spcPts val="1620"/>
-              </a:lnSpc>
-              <a:spcAft>
-                <a:spcPts val="300"/>
-              </a:spcAft>
-              <a:buNone/>
-            </a:pPr>
-            <a:r>
-              <a:rPr lang="en-US" sz="1200" i="1" dirty="0">
+              <a:t>activities/activity-02-paired-critique.md</a:t>
+            </a:r>
+            <a:pPr algn="l" indent="0" marL="0">
+              <a:lnSpc>
+                <a:spcPts val="1680"/>
+              </a:lnSpc>
+              <a:spcBef>
+                <a:spcPts val="300"/>
+              </a:spcBef>
+              <a:spcAft>
+                <a:spcPts val="300"/>
+              </a:spcAft>
+              <a:buNone/>
+            </a:pPr>
+            <a:r>
+              <a:rPr lang="en-US" sz="1200" dirty="0">
                 <a:solidFill>
                   <a:srgbClr val="1C2833"/>
                 </a:solidFill>
@@ -2426,12 +2872,40 @@
                 <a:ea typeface="Arial" pitchFamily="34" charset="-122"/>
                 <a:cs typeface="Arial" pitchFamily="34" charset="-120"/>
               </a:rPr>
-              <a:t>thinking</a:t>
-            </a:r>
-            <a:pPr algn="l" indent="0" marL="0">
-              <a:lnSpc>
-                <a:spcPts val="1620"/>
-              </a:lnSpc>
+              <a:t> for the full activity and forms. Pairs are pre-assigned (teacher decides last night based on project-type variety — pair a herb-deck student with a sustainability-audit student, not two herb-deck students).</a:t>
+            </a:r>
+            <a:endParaRPr lang="en-US" sz="1200" dirty="0"/>
+          </a:p>
+        </p:txBody>
+      </p:sp>
+      <p:sp>
+        <p:nvSpPr>
+          <p:cNvPr id="5" name="Text 3"/>
+          <p:cNvSpPr/>
+          <p:nvPr/>
+        </p:nvSpPr>
+        <p:spPr>
+          <a:xfrm>
+            <a:off x="406301" y="1596479"/>
+            <a:ext cx="8498026" cy="426541"/>
+          </a:xfrm>
+          <a:prstGeom prst="rect">
+            <a:avLst/>
+          </a:prstGeom>
+          <a:noFill/>
+          <a:ln/>
+        </p:spPr>
+        <p:txBody>
+          <a:bodyPr wrap="square" lIns="0" tIns="0" rIns="0" bIns="0" rtlCol="0" anchor="t"/>
+          <a:lstStyle/>
+          <a:p>
+            <a:pPr algn="l" indent="0" marL="0">
+              <a:lnSpc>
+                <a:spcPts val="1680"/>
+              </a:lnSpc>
+              <a:spcBef>
+                <a:spcPts val="300"/>
+              </a:spcBef>
               <a:spcAft>
                 <a:spcPts val="300"/>
               </a:spcAft>
@@ -2446,23 +2920,22 @@
                 <a:ea typeface="Arial" pitchFamily="34" charset="-122"/>
                 <a:cs typeface="Arial" pitchFamily="34" charset="-120"/>
               </a:rPr>
-              <a:t>, not just your plan. Did the critique surface an assumption you didn't know you had?</a:t>
-            </a:r>
-            <a:endParaRPr lang="en-US" sz="1200" dirty="0"/>
-          </a:p>
-          <a:p>
-            <a:pPr algn="l" marL="342900" indent="-342900">
-              <a:lnSpc>
-                <a:spcPts val="1620"/>
-              </a:lnSpc>
-              <a:spcAft>
-                <a:spcPts val="300"/>
-              </a:spcAft>
-              <a:buSzPct val="100000"/>
-              <a:buChar char="•"/>
-            </a:pPr>
-            <a:r>
-              <a:rPr lang="en-US" sz="1200" b="1" dirty="0">
+              <a:t>After both directions, the pair takes 3 minutes for a quick joint reflection: </a:t>
+            </a:r>
+            <a:pPr algn="l" indent="0" marL="0">
+              <a:lnSpc>
+                <a:spcPts val="1680"/>
+              </a:lnSpc>
+              <a:spcBef>
+                <a:spcPts val="300"/>
+              </a:spcBef>
+              <a:spcAft>
+                <a:spcPts val="300"/>
+              </a:spcAft>
+              <a:buNone/>
+            </a:pPr>
+            <a:r>
+              <a:rPr lang="en-US" sz="1200" i="1" dirty="0">
                 <a:solidFill>
                   <a:srgbClr val="1C2833"/>
                 </a:solidFill>
@@ -2470,27 +2943,7 @@
                 <a:ea typeface="Arial" pitchFamily="34" charset="-122"/>
                 <a:cs typeface="Arial" pitchFamily="34" charset="-120"/>
               </a:rPr>
-              <a:t>One tier down:</a:t>
-            </a:r>
-            <a:pPr algn="l" indent="0" marL="0">
-              <a:lnSpc>
-                <a:spcPts val="1620"/>
-              </a:lnSpc>
-              <a:spcAft>
-                <a:spcPts val="300"/>
-              </a:spcAft>
-              <a:buNone/>
-            </a:pPr>
-            <a:r>
-              <a:rPr lang="en-US" sz="1200" dirty="0">
-                <a:solidFill>
-                  <a:srgbClr val="1C2833"/>
-                </a:solidFill>
-                <a:latin typeface="Arial" pitchFamily="34" charset="0"/>
-                <a:ea typeface="Arial" pitchFamily="34" charset="-122"/>
-                <a:cs typeface="Arial" pitchFamily="34" charset="-120"/>
-              </a:rPr>
-              <a:t> If giving "three notices and three wonders" feels like too much, give two of each. Quality of one specific observation beats quantity.</a:t>
+              <a:t>"What's one thing both our projects could use more of?"</a:t>
             </a:r>
             <a:endParaRPr lang="en-US" sz="1200" dirty="0"/>
           </a:p>
@@ -2498,7 +2951,7 @@
       </p:sp>
       <p:sp>
         <p:nvSpPr>
-          <p:cNvPr id="5" name="Text 3"/>
+          <p:cNvPr id="6" name="Text 4"/>
           <p:cNvSpPr/>
           <p:nvPr/>
         </p:nvSpPr>
@@ -2648,7 +3101,7 @@
                 <a:ea typeface="Georgia" pitchFamily="34" charset="-122"/>
                 <a:cs typeface="Georgia" pitchFamily="34" charset="-120"/>
               </a:rPr>
-              <a:t>Teacher notes</a:t>
+              <a:t>Wrap-up (5 min)</a:t>
             </a:r>
             <a:endParaRPr lang="en-US" sz="1800" dirty="0"/>
           </a:p>
@@ -2662,8 +3115,8 @@
         </p:nvSpPr>
         <p:spPr>
           <a:xfrm>
-            <a:off x="406301" y="870942"/>
-            <a:ext cx="8498026" cy="1289149"/>
+            <a:off x="634901" y="883593"/>
+            <a:ext cx="8102798" cy="525661"/>
           </a:xfrm>
           <a:prstGeom prst="rect">
             <a:avLst/>
@@ -2675,20 +3128,18 @@
           <a:bodyPr wrap="square" lIns="0" tIns="0" rIns="0" bIns="0" rtlCol="0" anchor="t"/>
           <a:lstStyle/>
           <a:p>
-            <a:pPr algn="l" indent="0" marL="0">
-              <a:lnSpc>
-                <a:spcPts val="1680"/>
-              </a:lnSpc>
-              <a:spcBef>
-                <a:spcPts val="300"/>
-              </a:spcBef>
-              <a:spcAft>
-                <a:spcPts val="300"/>
-              </a:spcAft>
-              <a:buNone/>
-            </a:pPr>
-            <a:r>
-              <a:rPr lang="en-US" sz="1200" dirty="0">
+            <a:pPr algn="l" marL="342900" indent="-342900">
+              <a:lnSpc>
+                <a:spcPts val="1620"/>
+              </a:lnSpc>
+              <a:spcAft>
+                <a:spcPts val="300"/>
+              </a:spcAft>
+              <a:buSzPct val="100000"/>
+              <a:buChar char="•"/>
+            </a:pPr>
+            <a:r>
+              <a:rPr lang="en-US" sz="1200" b="1" dirty="0">
                 <a:solidFill>
                   <a:srgbClr val="1C2833"/>
                 </a:solidFill>
@@ -2696,15 +3147,12 @@
                 <a:ea typeface="Arial" pitchFamily="34" charset="-122"/>
                 <a:cs typeface="Arial" pitchFamily="34" charset="-120"/>
               </a:rPr>
-              <a:t>– This is a formative checkpoint disguised as an activity. By the end of today every student should be visibly ready to build. If not, that student gets a 10-minute one-on-one tomorrow before class. – Listen at the doorway — you'll hear which pairs are doing the work and which are skating. Drop in on the skaters silently and ask one clarifying question. – A critique that descends into mutual gushing is worthless. If you hear "your sketch is really nice" three times in a row, intervene and re-direct to specifics. – After today, mark every student's plan + sources + sketch on the Day 5 formative quiz checklist (</a:t>
-            </a:r>
-            <a:pPr algn="l" indent="0" marL="0">
-              <a:lnSpc>
-                <a:spcPts val="1680"/>
-              </a:lnSpc>
-              <a:spcBef>
-                <a:spcPts val="300"/>
-              </a:spcBef>
+              <a:t>Pin the critique sheet</a:t>
+            </a:r>
+            <a:pPr algn="l" indent="0" marL="0">
+              <a:lnSpc>
+                <a:spcPts val="1620"/>
+              </a:lnSpc>
               <a:spcAft>
                 <a:spcPts val="300"/>
               </a:spcAft>
@@ -2719,19 +3167,20 @@
                 <a:ea typeface="Arial" pitchFamily="34" charset="-122"/>
                 <a:cs typeface="Arial" pitchFamily="34" charset="-120"/>
               </a:rPr>
-              <a:t>quizzes/formative.md</a:t>
-            </a:r>
-            <a:pPr algn="l" indent="0" marL="0">
-              <a:lnSpc>
-                <a:spcPts val="1680"/>
-              </a:lnSpc>
-              <a:spcBef>
-                <a:spcPts val="300"/>
-              </a:spcBef>
-              <a:spcAft>
-                <a:spcPts val="300"/>
-              </a:spcAft>
-              <a:buNone/>
+              <a:t> into the project journal — it's part of the documentation evidence.</a:t>
+            </a:r>
+            <a:endParaRPr lang="en-US" sz="1200" dirty="0"/>
+          </a:p>
+          <a:p>
+            <a:pPr algn="l" marL="342900" indent="-342900">
+              <a:lnSpc>
+                <a:spcPts val="1620"/>
+              </a:lnSpc>
+              <a:spcAft>
+                <a:spcPts val="300"/>
+              </a:spcAft>
+              <a:buSzPct val="100000"/>
+              <a:buChar char="•"/>
             </a:pPr>
             <a:r>
               <a:rPr lang="en-US" sz="1200" dirty="0">
@@ -2742,7 +3191,47 @@
                 <a:ea typeface="Arial" pitchFamily="34" charset="-122"/>
                 <a:cs typeface="Arial" pitchFamily="34" charset="-120"/>
               </a:rPr>
-              <a:t> Part A). This is your gate to allowing them into the build phase.</a:t>
+              <a:t>Each student writes a three-item </a:t>
+            </a:r>
+            <a:pPr algn="l" indent="0" marL="0">
+              <a:lnSpc>
+                <a:spcPts val="1620"/>
+              </a:lnSpc>
+              <a:spcAft>
+                <a:spcPts val="300"/>
+              </a:spcAft>
+              <a:buNone/>
+            </a:pPr>
+            <a:r>
+              <a:rPr lang="en-US" sz="1200" b="1" dirty="0">
+                <a:solidFill>
+                  <a:srgbClr val="1C2833"/>
+                </a:solidFill>
+                <a:latin typeface="Arial" pitchFamily="34" charset="0"/>
+                <a:ea typeface="Arial" pitchFamily="34" charset="-122"/>
+                <a:cs typeface="Arial" pitchFamily="34" charset="-120"/>
+              </a:rPr>
+              <a:t>change list</a:t>
+            </a:r>
+            <a:pPr algn="l" indent="0" marL="0">
+              <a:lnSpc>
+                <a:spcPts val="1620"/>
+              </a:lnSpc>
+              <a:spcAft>
+                <a:spcPts val="300"/>
+              </a:spcAft>
+              <a:buNone/>
+            </a:pPr>
+            <a:r>
+              <a:rPr lang="en-US" sz="1200" dirty="0">
+                <a:solidFill>
+                  <a:srgbClr val="1C2833"/>
+                </a:solidFill>
+                <a:latin typeface="Arial" pitchFamily="34" charset="0"/>
+                <a:ea typeface="Arial" pitchFamily="34" charset="-122"/>
+                <a:cs typeface="Arial" pitchFamily="34" charset="-120"/>
+              </a:rPr>
+              <a:t> in the journal:</a:t>
             </a:r>
             <a:endParaRPr lang="en-US" sz="1200" dirty="0"/>
           </a:p>
@@ -2751,6 +3240,317 @@
       <p:sp>
         <p:nvSpPr>
           <p:cNvPr id="5" name="Text 3"/>
+          <p:cNvSpPr/>
+          <p:nvPr/>
+        </p:nvSpPr>
+        <p:spPr>
+          <a:xfrm>
+            <a:off x="406301" y="1510754"/>
+            <a:ext cx="8331398" cy="1419225"/>
+          </a:xfrm>
+          <a:prstGeom prst="rect">
+            <a:avLst/>
+          </a:prstGeom>
+          <a:solidFill>
+            <a:srgbClr val="F4F8F9"/>
+          </a:solidFill>
+          <a:ln/>
+        </p:spPr>
+        <p:txBody>
+          <a:bodyPr wrap="square" rtlCol="0" anchor="ctr"/>
+          <a:lstStyle/>
+          <a:p>
+            <a:pPr indent="0" marL="0">
+              <a:buNone/>
+            </a:pPr>
+            <a:endParaRPr lang="en-US" dirty="0"/>
+          </a:p>
+        </p:txBody>
+      </p:sp>
+      <p:sp>
+        <p:nvSpPr>
+          <p:cNvPr id="6" name="Shape 4"/>
+          <p:cNvSpPr/>
+          <p:nvPr/>
+        </p:nvSpPr>
+        <p:spPr>
+          <a:xfrm>
+            <a:off x="434876" y="1510754"/>
+            <a:ext cx="0" cy="1419225"/>
+          </a:xfrm>
+          <a:prstGeom prst="line">
+            <a:avLst/>
+          </a:prstGeom>
+          <a:noFill/>
+          <a:ln w="57150">
+            <a:solidFill>
+              <a:srgbClr val="FE4447"/>
+            </a:solidFill>
+            <a:prstDash val="solid"/>
+          </a:ln>
+        </p:spPr>
+      </p:sp>
+      <p:sp>
+        <p:nvSpPr>
+          <p:cNvPr id="7" name="Text 5"/>
+          <p:cNvSpPr/>
+          <p:nvPr/>
+        </p:nvSpPr>
+        <p:spPr>
+          <a:xfrm>
+            <a:off x="692051" y="1701254"/>
+            <a:ext cx="7973389" cy="230981"/>
+          </a:xfrm>
+          <a:prstGeom prst="rect">
+            <a:avLst/>
+          </a:prstGeom>
+          <a:noFill/>
+          <a:ln/>
+        </p:spPr>
+        <p:txBody>
+          <a:bodyPr wrap="square" lIns="0" tIns="0" rIns="0" bIns="0" rtlCol="0" anchor="t"/>
+          <a:lstStyle/>
+          <a:p>
+            <a:pPr algn="l" indent="0" marL="0">
+              <a:lnSpc>
+                <a:spcPts val="1820"/>
+              </a:lnSpc>
+              <a:spcBef>
+                <a:spcPts val="300"/>
+              </a:spcBef>
+              <a:spcAft>
+                <a:spcPts val="300"/>
+              </a:spcAft>
+              <a:buNone/>
+            </a:pPr>
+            <a:r>
+              <a:rPr lang="en-US" sz="1300" i="1" dirty="0">
+                <a:solidFill>
+                  <a:srgbClr val="1C2833"/>
+                </a:solidFill>
+                <a:latin typeface="Georgia" pitchFamily="34" charset="0"/>
+                <a:ea typeface="Georgia" pitchFamily="34" charset="-122"/>
+                <a:cs typeface="Georgia" pitchFamily="34" charset="-120"/>
+              </a:rPr>
+              <a:t>"Based on today's critique I will:</a:t>
+            </a:r>
+            <a:endParaRPr lang="en-US" sz="1300" dirty="0"/>
+          </a:p>
+        </p:txBody>
+      </p:sp>
+      <p:sp>
+        <p:nvSpPr>
+          <p:cNvPr id="8" name="Text 6"/>
+          <p:cNvSpPr/>
+          <p:nvPr/>
+        </p:nvSpPr>
+        <p:spPr>
+          <a:xfrm>
+            <a:off x="692051" y="1970336"/>
+            <a:ext cx="7973389" cy="230981"/>
+          </a:xfrm>
+          <a:prstGeom prst="rect">
+            <a:avLst/>
+          </a:prstGeom>
+          <a:noFill/>
+          <a:ln/>
+        </p:spPr>
+        <p:txBody>
+          <a:bodyPr wrap="square" lIns="0" tIns="0" rIns="0" bIns="0" rtlCol="0" anchor="t"/>
+          <a:lstStyle/>
+          <a:p>
+            <a:pPr algn="l" indent="0" marL="0">
+              <a:lnSpc>
+                <a:spcPts val="1820"/>
+              </a:lnSpc>
+              <a:spcBef>
+                <a:spcPts val="300"/>
+              </a:spcBef>
+              <a:spcAft>
+                <a:spcPts val="300"/>
+              </a:spcAft>
+              <a:buNone/>
+            </a:pPr>
+            <a:r>
+              <a:rPr lang="en-US" sz="1300" i="1" dirty="0">
+                <a:solidFill>
+                  <a:srgbClr val="1C2833"/>
+                </a:solidFill>
+                <a:latin typeface="Georgia" pitchFamily="34" charset="0"/>
+                <a:ea typeface="Georgia" pitchFamily="34" charset="-122"/>
+                <a:cs typeface="Georgia" pitchFamily="34" charset="-120"/>
+              </a:rPr>
+              <a:t>___</a:t>
+            </a:r>
+            <a:endParaRPr lang="en-US" sz="1300" dirty="0"/>
+          </a:p>
+        </p:txBody>
+      </p:sp>
+      <p:sp>
+        <p:nvSpPr>
+          <p:cNvPr id="9" name="Text 7"/>
+          <p:cNvSpPr/>
+          <p:nvPr/>
+        </p:nvSpPr>
+        <p:spPr>
+          <a:xfrm>
+            <a:off x="692051" y="2239417"/>
+            <a:ext cx="7973389" cy="230981"/>
+          </a:xfrm>
+          <a:prstGeom prst="rect">
+            <a:avLst/>
+          </a:prstGeom>
+          <a:noFill/>
+          <a:ln/>
+        </p:spPr>
+        <p:txBody>
+          <a:bodyPr wrap="square" lIns="0" tIns="0" rIns="0" bIns="0" rtlCol="0" anchor="t"/>
+          <a:lstStyle/>
+          <a:p>
+            <a:pPr algn="l" indent="0" marL="0">
+              <a:lnSpc>
+                <a:spcPts val="1820"/>
+              </a:lnSpc>
+              <a:spcBef>
+                <a:spcPts val="300"/>
+              </a:spcBef>
+              <a:spcAft>
+                <a:spcPts val="300"/>
+              </a:spcAft>
+              <a:buNone/>
+            </a:pPr>
+            <a:r>
+              <a:rPr lang="en-US" sz="1300" i="1" dirty="0">
+                <a:solidFill>
+                  <a:srgbClr val="1C2833"/>
+                </a:solidFill>
+                <a:latin typeface="Georgia" pitchFamily="34" charset="0"/>
+                <a:ea typeface="Georgia" pitchFamily="34" charset="-122"/>
+                <a:cs typeface="Georgia" pitchFamily="34" charset="-120"/>
+              </a:rPr>
+              <a:t>___</a:t>
+            </a:r>
+            <a:endParaRPr lang="en-US" sz="1300" dirty="0"/>
+          </a:p>
+        </p:txBody>
+      </p:sp>
+      <p:sp>
+        <p:nvSpPr>
+          <p:cNvPr id="10" name="Text 8"/>
+          <p:cNvSpPr/>
+          <p:nvPr/>
+        </p:nvSpPr>
+        <p:spPr>
+          <a:xfrm>
+            <a:off x="692051" y="2508498"/>
+            <a:ext cx="7973389" cy="230981"/>
+          </a:xfrm>
+          <a:prstGeom prst="rect">
+            <a:avLst/>
+          </a:prstGeom>
+          <a:noFill/>
+          <a:ln/>
+        </p:spPr>
+        <p:txBody>
+          <a:bodyPr wrap="square" lIns="0" tIns="0" rIns="0" bIns="0" rtlCol="0" anchor="t"/>
+          <a:lstStyle/>
+          <a:p>
+            <a:pPr algn="l" indent="0" marL="0">
+              <a:lnSpc>
+                <a:spcPts val="1820"/>
+              </a:lnSpc>
+              <a:spcBef>
+                <a:spcPts val="300"/>
+              </a:spcBef>
+              <a:spcAft>
+                <a:spcPts val="300"/>
+              </a:spcAft>
+              <a:buNone/>
+            </a:pPr>
+            <a:r>
+              <a:rPr lang="en-US" sz="1300" i="1" dirty="0">
+                <a:solidFill>
+                  <a:srgbClr val="1C2833"/>
+                </a:solidFill>
+                <a:latin typeface="Georgia" pitchFamily="34" charset="0"/>
+                <a:ea typeface="Georgia" pitchFamily="34" charset="-122"/>
+                <a:cs typeface="Georgia" pitchFamily="34" charset="-120"/>
+              </a:rPr>
+              <a:t>___"</a:t>
+            </a:r>
+            <a:endParaRPr lang="en-US" sz="1300" dirty="0"/>
+          </a:p>
+        </p:txBody>
+      </p:sp>
+      <p:sp>
+        <p:nvSpPr>
+          <p:cNvPr id="11" name="Text 9"/>
+          <p:cNvSpPr/>
+          <p:nvPr/>
+        </p:nvSpPr>
+        <p:spPr>
+          <a:xfrm>
+            <a:off x="634901" y="3031480"/>
+            <a:ext cx="8102798" cy="487561"/>
+          </a:xfrm>
+          <a:prstGeom prst="rect">
+            <a:avLst/>
+          </a:prstGeom>
+          <a:noFill/>
+          <a:ln/>
+        </p:spPr>
+        <p:txBody>
+          <a:bodyPr wrap="square" lIns="0" tIns="0" rIns="0" bIns="0" rtlCol="0" anchor="t"/>
+          <a:lstStyle/>
+          <a:p>
+            <a:pPr algn="l" marL="342900" indent="-342900">
+              <a:lnSpc>
+                <a:spcPts val="1620"/>
+              </a:lnSpc>
+              <a:spcAft>
+                <a:spcPts val="300"/>
+              </a:spcAft>
+              <a:buSzPct val="100000"/>
+              <a:buChar char="•"/>
+            </a:pPr>
+            <a:r>
+              <a:rPr lang="en-US" sz="1200" dirty="0">
+                <a:solidFill>
+                  <a:srgbClr val="1C2833"/>
+                </a:solidFill>
+                <a:latin typeface="Arial" pitchFamily="34" charset="0"/>
+                <a:ea typeface="Arial" pitchFamily="34" charset="-122"/>
+                <a:cs typeface="Arial" pitchFamily="34" charset="-120"/>
+              </a:rPr>
+              <a:t>Preview: </a:t>
+            </a:r>
+            <a:pPr algn="l" indent="0" marL="0">
+              <a:lnSpc>
+                <a:spcPts val="1620"/>
+              </a:lnSpc>
+              <a:spcAft>
+                <a:spcPts val="300"/>
+              </a:spcAft>
+              <a:buNone/>
+            </a:pPr>
+            <a:r>
+              <a:rPr lang="en-US" sz="1200" i="1" dirty="0">
+                <a:solidFill>
+                  <a:srgbClr val="1C2833"/>
+                </a:solidFill>
+                <a:latin typeface="Arial" pitchFamily="34" charset="0"/>
+                <a:ea typeface="Arial" pitchFamily="34" charset="-122"/>
+                <a:cs typeface="Arial" pitchFamily="34" charset="-120"/>
+              </a:rPr>
+              <a:t>"Days 6 and 7 are quiet build sessions. I'll be walking the room, not teaching. Bring all your materials tomorrow."</a:t>
+            </a:r>
+            <a:endParaRPr lang="en-US" sz="1200" dirty="0"/>
+          </a:p>
+        </p:txBody>
+      </p:sp>
+      <p:sp>
+        <p:nvSpPr>
+          <p:cNvPr id="12" name="Text 10"/>
           <p:cNvSpPr/>
           <p:nvPr/>
         </p:nvSpPr>
@@ -2900,7 +3700,7 @@
                 <a:ea typeface="Georgia" pitchFamily="34" charset="-122"/>
                 <a:cs typeface="Georgia" pitchFamily="34" charset="-120"/>
               </a:rPr>
-              <a:t>Citation(s) used in this lesson</a:t>
+              <a:t>Student-facing content</a:t>
             </a:r>
             <a:endParaRPr lang="en-US" sz="1800" dirty="0"/>
           </a:p>
@@ -2914,8 +3714,658 @@
         </p:nvSpPr>
         <p:spPr>
           <a:xfrm>
-            <a:off x="406301" y="870942"/>
-            <a:ext cx="8498026" cy="426541"/>
+            <a:off x="406301" y="883593"/>
+            <a:ext cx="8331398" cy="3302794"/>
+          </a:xfrm>
+          <a:prstGeom prst="rect">
+            <a:avLst/>
+          </a:prstGeom>
+          <a:solidFill>
+            <a:srgbClr val="F4F8F9"/>
+          </a:solidFill>
+          <a:ln/>
+        </p:spPr>
+        <p:txBody>
+          <a:bodyPr wrap="square" rtlCol="0" anchor="ctr"/>
+          <a:lstStyle/>
+          <a:p>
+            <a:pPr indent="0" marL="0">
+              <a:buNone/>
+            </a:pPr>
+            <a:endParaRPr lang="en-US" dirty="0"/>
+          </a:p>
+        </p:txBody>
+      </p:sp>
+      <p:sp>
+        <p:nvSpPr>
+          <p:cNvPr id="5" name="Shape 3"/>
+          <p:cNvSpPr/>
+          <p:nvPr/>
+        </p:nvSpPr>
+        <p:spPr>
+          <a:xfrm>
+            <a:off x="434876" y="883593"/>
+            <a:ext cx="0" cy="3302794"/>
+          </a:xfrm>
+          <a:prstGeom prst="line">
+            <a:avLst/>
+          </a:prstGeom>
+          <a:noFill/>
+          <a:ln w="57150">
+            <a:solidFill>
+              <a:srgbClr val="FE4447"/>
+            </a:solidFill>
+            <a:prstDash val="solid"/>
+          </a:ln>
+        </p:spPr>
+      </p:sp>
+      <p:sp>
+        <p:nvSpPr>
+          <p:cNvPr id="6" name="Text 4"/>
+          <p:cNvSpPr/>
+          <p:nvPr/>
+        </p:nvSpPr>
+        <p:spPr>
+          <a:xfrm>
+            <a:off x="692051" y="1074093"/>
+            <a:ext cx="7973389" cy="230981"/>
+          </a:xfrm>
+          <a:prstGeom prst="rect">
+            <a:avLst/>
+          </a:prstGeom>
+          <a:noFill/>
+          <a:ln/>
+        </p:spPr>
+        <p:txBody>
+          <a:bodyPr wrap="square" lIns="0" tIns="0" rIns="0" bIns="0" rtlCol="0" anchor="t"/>
+          <a:lstStyle/>
+          <a:p>
+            <a:pPr algn="l" indent="0" marL="0">
+              <a:lnSpc>
+                <a:spcPts val="1820"/>
+              </a:lnSpc>
+              <a:spcBef>
+                <a:spcPts val="300"/>
+              </a:spcBef>
+              <a:spcAft>
+                <a:spcPts val="300"/>
+              </a:spcAft>
+              <a:buNone/>
+            </a:pPr>
+            <a:r>
+              <a:rPr lang="en-US" sz="1300" b="1" i="1" dirty="0">
+                <a:solidFill>
+                  <a:srgbClr val="1C2833"/>
+                </a:solidFill>
+                <a:latin typeface="Georgia" pitchFamily="34" charset="0"/>
+                <a:ea typeface="Georgia" pitchFamily="34" charset="-122"/>
+                <a:cs typeface="Georgia" pitchFamily="34" charset="-120"/>
+              </a:rPr>
+              <a:t>Critique is a gift, not an attack.</a:t>
+            </a:r>
+            <a:endParaRPr lang="en-US" sz="1300" dirty="0"/>
+          </a:p>
+        </p:txBody>
+      </p:sp>
+      <p:sp>
+        <p:nvSpPr>
+          <p:cNvPr id="7" name="Text 5"/>
+          <p:cNvSpPr/>
+          <p:nvPr/>
+        </p:nvSpPr>
+        <p:spPr>
+          <a:xfrm>
+            <a:off x="692051" y="1343174"/>
+            <a:ext cx="7973389" cy="230981"/>
+          </a:xfrm>
+          <a:prstGeom prst="rect">
+            <a:avLst/>
+          </a:prstGeom>
+          <a:noFill/>
+          <a:ln/>
+        </p:spPr>
+        <p:txBody>
+          <a:bodyPr wrap="square" lIns="0" tIns="0" rIns="0" bIns="0" rtlCol="0" anchor="t"/>
+          <a:lstStyle/>
+          <a:p>
+            <a:pPr algn="l" indent="0" marL="0">
+              <a:lnSpc>
+                <a:spcPts val="1820"/>
+              </a:lnSpc>
+              <a:spcBef>
+                <a:spcPts val="300"/>
+              </a:spcBef>
+              <a:spcAft>
+                <a:spcPts val="300"/>
+              </a:spcAft>
+              <a:buNone/>
+            </a:pPr>
+            <a:r>
+              <a:rPr lang="en-US" sz="1300" i="1" dirty="0">
+                <a:solidFill>
+                  <a:srgbClr val="1C2833"/>
+                </a:solidFill>
+                <a:latin typeface="Georgia" pitchFamily="34" charset="0"/>
+                <a:ea typeface="Georgia" pitchFamily="34" charset="-122"/>
+                <a:cs typeface="Georgia" pitchFamily="34" charset="-120"/>
+              </a:rPr>
+              <a:t>Three rules:</a:t>
+            </a:r>
+            <a:endParaRPr lang="en-US" sz="1300" dirty="0"/>
+          </a:p>
+        </p:txBody>
+      </p:sp>
+      <p:sp>
+        <p:nvSpPr>
+          <p:cNvPr id="8" name="Text 6"/>
+          <p:cNvSpPr/>
+          <p:nvPr/>
+        </p:nvSpPr>
+        <p:spPr>
+          <a:xfrm>
+            <a:off x="692051" y="1612255"/>
+            <a:ext cx="7973389" cy="230981"/>
+          </a:xfrm>
+          <a:prstGeom prst="rect">
+            <a:avLst/>
+          </a:prstGeom>
+          <a:noFill/>
+          <a:ln/>
+        </p:spPr>
+        <p:txBody>
+          <a:bodyPr wrap="square" lIns="0" tIns="0" rIns="0" bIns="0" rtlCol="0" anchor="t"/>
+          <a:lstStyle/>
+          <a:p>
+            <a:pPr algn="l" indent="0" marL="0">
+              <a:lnSpc>
+                <a:spcPts val="1820"/>
+              </a:lnSpc>
+              <a:spcBef>
+                <a:spcPts val="300"/>
+              </a:spcBef>
+              <a:spcAft>
+                <a:spcPts val="300"/>
+              </a:spcAft>
+              <a:buNone/>
+            </a:pPr>
+            <a:r>
+              <a:rPr lang="en-US" sz="1300" b="1" i="1" dirty="0">
+                <a:solidFill>
+                  <a:srgbClr val="1C2833"/>
+                </a:solidFill>
+                <a:latin typeface="Georgia" pitchFamily="34" charset="0"/>
+                <a:ea typeface="Georgia" pitchFamily="34" charset="-122"/>
+                <a:cs typeface="Georgia" pitchFamily="34" charset="-120"/>
+              </a:rPr>
+              <a:t>Be kind.</a:t>
+            </a:r>
+            <a:pPr algn="l" indent="0" marL="0">
+              <a:lnSpc>
+                <a:spcPts val="1820"/>
+              </a:lnSpc>
+              <a:spcBef>
+                <a:spcPts val="300"/>
+              </a:spcBef>
+              <a:spcAft>
+                <a:spcPts val="300"/>
+              </a:spcAft>
+              <a:buNone/>
+            </a:pPr>
+            <a:r>
+              <a:rPr lang="en-US" sz="1300" dirty="0">
+                <a:solidFill>
+                  <a:srgbClr val="1C2833"/>
+                </a:solidFill>
+                <a:latin typeface="Georgia" pitchFamily="34" charset="0"/>
+                <a:ea typeface="Georgia" pitchFamily="34" charset="-122"/>
+                <a:cs typeface="Georgia" pitchFamily="34" charset="-120"/>
+              </a:rPr>
+              <a:t> Open with what you noticed and admired.</a:t>
+            </a:r>
+            <a:endParaRPr lang="en-US" sz="1300" dirty="0"/>
+          </a:p>
+        </p:txBody>
+      </p:sp>
+      <p:sp>
+        <p:nvSpPr>
+          <p:cNvPr id="9" name="Text 7"/>
+          <p:cNvSpPr/>
+          <p:nvPr/>
+        </p:nvSpPr>
+        <p:spPr>
+          <a:xfrm>
+            <a:off x="692051" y="1881336"/>
+            <a:ext cx="7973389" cy="230981"/>
+          </a:xfrm>
+          <a:prstGeom prst="rect">
+            <a:avLst/>
+          </a:prstGeom>
+          <a:noFill/>
+          <a:ln/>
+        </p:spPr>
+        <p:txBody>
+          <a:bodyPr wrap="square" lIns="0" tIns="0" rIns="0" bIns="0" rtlCol="0" anchor="t"/>
+          <a:lstStyle/>
+          <a:p>
+            <a:pPr algn="l" indent="0" marL="0">
+              <a:lnSpc>
+                <a:spcPts val="1820"/>
+              </a:lnSpc>
+              <a:spcBef>
+                <a:spcPts val="300"/>
+              </a:spcBef>
+              <a:spcAft>
+                <a:spcPts val="300"/>
+              </a:spcAft>
+              <a:buNone/>
+            </a:pPr>
+            <a:r>
+              <a:rPr lang="en-US" sz="1300" b="1" i="1" dirty="0">
+                <a:solidFill>
+                  <a:srgbClr val="1C2833"/>
+                </a:solidFill>
+                <a:latin typeface="Georgia" pitchFamily="34" charset="0"/>
+                <a:ea typeface="Georgia" pitchFamily="34" charset="-122"/>
+                <a:cs typeface="Georgia" pitchFamily="34" charset="-120"/>
+              </a:rPr>
+              <a:t>Be specific.</a:t>
+            </a:r>
+            <a:pPr algn="l" indent="0" marL="0">
+              <a:lnSpc>
+                <a:spcPts val="1820"/>
+              </a:lnSpc>
+              <a:spcBef>
+                <a:spcPts val="300"/>
+              </a:spcBef>
+              <a:spcAft>
+                <a:spcPts val="300"/>
+              </a:spcAft>
+              <a:buNone/>
+            </a:pPr>
+            <a:r>
+              <a:rPr lang="en-US" sz="1300" dirty="0">
+                <a:solidFill>
+                  <a:srgbClr val="1C2833"/>
+                </a:solidFill>
+                <a:latin typeface="Georgia" pitchFamily="34" charset="0"/>
+                <a:ea typeface="Georgia" pitchFamily="34" charset="-122"/>
+                <a:cs typeface="Georgia" pitchFamily="34" charset="-120"/>
+              </a:rPr>
+              <a:t> "I like it" is useless. "The colour key helps me see the elements without reading text" is useful.</a:t>
+            </a:r>
+            <a:endParaRPr lang="en-US" sz="1300" dirty="0"/>
+          </a:p>
+        </p:txBody>
+      </p:sp>
+      <p:sp>
+        <p:nvSpPr>
+          <p:cNvPr id="10" name="Text 8"/>
+          <p:cNvSpPr/>
+          <p:nvPr/>
+        </p:nvSpPr>
+        <p:spPr>
+          <a:xfrm>
+            <a:off x="692051" y="2150418"/>
+            <a:ext cx="7973389" cy="230981"/>
+          </a:xfrm>
+          <a:prstGeom prst="rect">
+            <a:avLst/>
+          </a:prstGeom>
+          <a:noFill/>
+          <a:ln/>
+        </p:spPr>
+        <p:txBody>
+          <a:bodyPr wrap="square" lIns="0" tIns="0" rIns="0" bIns="0" rtlCol="0" anchor="t"/>
+          <a:lstStyle/>
+          <a:p>
+            <a:pPr algn="l" indent="0" marL="0">
+              <a:lnSpc>
+                <a:spcPts val="1820"/>
+              </a:lnSpc>
+              <a:spcBef>
+                <a:spcPts val="300"/>
+              </a:spcBef>
+              <a:spcAft>
+                <a:spcPts val="300"/>
+              </a:spcAft>
+              <a:buNone/>
+            </a:pPr>
+            <a:r>
+              <a:rPr lang="en-US" sz="1300" b="1" i="1" dirty="0">
+                <a:solidFill>
+                  <a:srgbClr val="1C2833"/>
+                </a:solidFill>
+                <a:latin typeface="Georgia" pitchFamily="34" charset="0"/>
+                <a:ea typeface="Georgia" pitchFamily="34" charset="-122"/>
+                <a:cs typeface="Georgia" pitchFamily="34" charset="-120"/>
+              </a:rPr>
+              <a:t>Be helpful.</a:t>
+            </a:r>
+            <a:pPr algn="l" indent="0" marL="0">
+              <a:lnSpc>
+                <a:spcPts val="1820"/>
+              </a:lnSpc>
+              <a:spcBef>
+                <a:spcPts val="300"/>
+              </a:spcBef>
+              <a:spcAft>
+                <a:spcPts val="300"/>
+              </a:spcAft>
+              <a:buNone/>
+            </a:pPr>
+            <a:r>
+              <a:rPr lang="en-US" sz="1300" dirty="0">
+                <a:solidFill>
+                  <a:srgbClr val="1C2833"/>
+                </a:solidFill>
+                <a:latin typeface="Georgia" pitchFamily="34" charset="0"/>
+                <a:ea typeface="Georgia" pitchFamily="34" charset="-122"/>
+                <a:cs typeface="Georgia" pitchFamily="34" charset="-120"/>
+              </a:rPr>
+              <a:t> Propose a fix, not just a problem.</a:t>
+            </a:r>
+            <a:endParaRPr lang="en-US" sz="1300" dirty="0"/>
+          </a:p>
+        </p:txBody>
+      </p:sp>
+      <p:sp>
+        <p:nvSpPr>
+          <p:cNvPr id="11" name="Text 9"/>
+          <p:cNvSpPr/>
+          <p:nvPr/>
+        </p:nvSpPr>
+        <p:spPr>
+          <a:xfrm>
+            <a:off x="692051" y="2419499"/>
+            <a:ext cx="7973389" cy="230981"/>
+          </a:xfrm>
+          <a:prstGeom prst="rect">
+            <a:avLst/>
+          </a:prstGeom>
+          <a:noFill/>
+          <a:ln/>
+        </p:spPr>
+        <p:txBody>
+          <a:bodyPr wrap="square" lIns="0" tIns="0" rIns="0" bIns="0" rtlCol="0" anchor="t"/>
+          <a:lstStyle/>
+          <a:p>
+            <a:pPr algn="l" indent="0" marL="0">
+              <a:lnSpc>
+                <a:spcPts val="1820"/>
+              </a:lnSpc>
+              <a:spcBef>
+                <a:spcPts val="300"/>
+              </a:spcBef>
+              <a:spcAft>
+                <a:spcPts val="300"/>
+              </a:spcAft>
+              <a:buNone/>
+            </a:pPr>
+            <a:r>
+              <a:rPr lang="en-US" sz="1300" i="1" dirty="0">
+                <a:solidFill>
+                  <a:srgbClr val="1C2833"/>
+                </a:solidFill>
+                <a:latin typeface="Georgia" pitchFamily="34" charset="0"/>
+                <a:ea typeface="Georgia" pitchFamily="34" charset="-122"/>
+                <a:cs typeface="Georgia" pitchFamily="34" charset="-120"/>
+              </a:rPr>
+              <a:t>The protocol:</a:t>
+            </a:r>
+            <a:endParaRPr lang="en-US" sz="1300" dirty="0"/>
+          </a:p>
+        </p:txBody>
+      </p:sp>
+      <p:sp>
+        <p:nvSpPr>
+          <p:cNvPr id="12" name="Text 10"/>
+          <p:cNvSpPr/>
+          <p:nvPr/>
+        </p:nvSpPr>
+        <p:spPr>
+          <a:xfrm>
+            <a:off x="692051" y="2688580"/>
+            <a:ext cx="7973389" cy="230981"/>
+          </a:xfrm>
+          <a:prstGeom prst="rect">
+            <a:avLst/>
+          </a:prstGeom>
+          <a:noFill/>
+          <a:ln/>
+        </p:spPr>
+        <p:txBody>
+          <a:bodyPr wrap="square" lIns="0" tIns="0" rIns="0" bIns="0" rtlCol="0" anchor="t"/>
+          <a:lstStyle/>
+          <a:p>
+            <a:pPr algn="l" indent="0" marL="0">
+              <a:lnSpc>
+                <a:spcPts val="1820"/>
+              </a:lnSpc>
+              <a:spcBef>
+                <a:spcPts val="300"/>
+              </a:spcBef>
+              <a:spcAft>
+                <a:spcPts val="300"/>
+              </a:spcAft>
+              <a:buNone/>
+            </a:pPr>
+            <a:r>
+              <a:rPr lang="en-US" sz="1300" i="1" dirty="0">
+                <a:solidFill>
+                  <a:srgbClr val="1C2833"/>
+                </a:solidFill>
+                <a:latin typeface="Georgia" pitchFamily="34" charset="0"/>
+                <a:ea typeface="Georgia" pitchFamily="34" charset="-122"/>
+                <a:cs typeface="Georgia" pitchFamily="34" charset="-120"/>
+              </a:rPr>
+              <a:t>Presenter shares (3 min).</a:t>
+            </a:r>
+            <a:endParaRPr lang="en-US" sz="1300" dirty="0"/>
+          </a:p>
+        </p:txBody>
+      </p:sp>
+      <p:sp>
+        <p:nvSpPr>
+          <p:cNvPr id="13" name="Text 11"/>
+          <p:cNvSpPr/>
+          <p:nvPr/>
+        </p:nvSpPr>
+        <p:spPr>
+          <a:xfrm>
+            <a:off x="692051" y="2957661"/>
+            <a:ext cx="7973389" cy="230981"/>
+          </a:xfrm>
+          <a:prstGeom prst="rect">
+            <a:avLst/>
+          </a:prstGeom>
+          <a:noFill/>
+          <a:ln/>
+        </p:spPr>
+        <p:txBody>
+          <a:bodyPr wrap="square" lIns="0" tIns="0" rIns="0" bIns="0" rtlCol="0" anchor="t"/>
+          <a:lstStyle/>
+          <a:p>
+            <a:pPr algn="l" indent="0" marL="0">
+              <a:lnSpc>
+                <a:spcPts val="1820"/>
+              </a:lnSpc>
+              <a:spcBef>
+                <a:spcPts val="300"/>
+              </a:spcBef>
+              <a:spcAft>
+                <a:spcPts val="300"/>
+              </a:spcAft>
+              <a:buNone/>
+            </a:pPr>
+            <a:r>
+              <a:rPr lang="en-US" sz="1300" i="1" dirty="0">
+                <a:solidFill>
+                  <a:srgbClr val="1C2833"/>
+                </a:solidFill>
+                <a:latin typeface="Georgia" pitchFamily="34" charset="0"/>
+                <a:ea typeface="Georgia" pitchFamily="34" charset="-122"/>
+                <a:cs typeface="Georgia" pitchFamily="34" charset="-120"/>
+              </a:rPr>
+              <a:t>Critic asks clarifying questions (2 min).</a:t>
+            </a:r>
+            <a:endParaRPr lang="en-US" sz="1300" dirty="0"/>
+          </a:p>
+        </p:txBody>
+      </p:sp>
+      <p:sp>
+        <p:nvSpPr>
+          <p:cNvPr id="14" name="Text 12"/>
+          <p:cNvSpPr/>
+          <p:nvPr/>
+        </p:nvSpPr>
+        <p:spPr>
+          <a:xfrm>
+            <a:off x="692051" y="3226743"/>
+            <a:ext cx="7973389" cy="230981"/>
+          </a:xfrm>
+          <a:prstGeom prst="rect">
+            <a:avLst/>
+          </a:prstGeom>
+          <a:noFill/>
+          <a:ln/>
+        </p:spPr>
+        <p:txBody>
+          <a:bodyPr wrap="square" lIns="0" tIns="0" rIns="0" bIns="0" rtlCol="0" anchor="t"/>
+          <a:lstStyle/>
+          <a:p>
+            <a:pPr algn="l" indent="0" marL="0">
+              <a:lnSpc>
+                <a:spcPts val="1820"/>
+              </a:lnSpc>
+              <a:spcBef>
+                <a:spcPts val="300"/>
+              </a:spcBef>
+              <a:spcAft>
+                <a:spcPts val="300"/>
+              </a:spcAft>
+              <a:buNone/>
+            </a:pPr>
+            <a:r>
+              <a:rPr lang="en-US" sz="1300" i="1" dirty="0">
+                <a:solidFill>
+                  <a:srgbClr val="1C2833"/>
+                </a:solidFill>
+                <a:latin typeface="Georgia" pitchFamily="34" charset="0"/>
+                <a:ea typeface="Georgia" pitchFamily="34" charset="-122"/>
+                <a:cs typeface="Georgia" pitchFamily="34" charset="-120"/>
+              </a:rPr>
+              <a:t>Critic gives "I notice / I wonder" (4 min) — three of each.</a:t>
+            </a:r>
+            <a:endParaRPr lang="en-US" sz="1300" dirty="0"/>
+          </a:p>
+        </p:txBody>
+      </p:sp>
+      <p:sp>
+        <p:nvSpPr>
+          <p:cNvPr id="15" name="Text 13"/>
+          <p:cNvSpPr/>
+          <p:nvPr/>
+        </p:nvSpPr>
+        <p:spPr>
+          <a:xfrm>
+            <a:off x="692051" y="3495824"/>
+            <a:ext cx="7973389" cy="230981"/>
+          </a:xfrm>
+          <a:prstGeom prst="rect">
+            <a:avLst/>
+          </a:prstGeom>
+          <a:noFill/>
+          <a:ln/>
+        </p:spPr>
+        <p:txBody>
+          <a:bodyPr wrap="square" lIns="0" tIns="0" rIns="0" bIns="0" rtlCol="0" anchor="t"/>
+          <a:lstStyle/>
+          <a:p>
+            <a:pPr algn="l" indent="0" marL="0">
+              <a:lnSpc>
+                <a:spcPts val="1820"/>
+              </a:lnSpc>
+              <a:spcBef>
+                <a:spcPts val="300"/>
+              </a:spcBef>
+              <a:spcAft>
+                <a:spcPts val="300"/>
+              </a:spcAft>
+              <a:buNone/>
+            </a:pPr>
+            <a:r>
+              <a:rPr lang="en-US" sz="1300" i="1" dirty="0">
+                <a:solidFill>
+                  <a:srgbClr val="1C2833"/>
+                </a:solidFill>
+                <a:latin typeface="Georgia" pitchFamily="34" charset="0"/>
+                <a:ea typeface="Georgia" pitchFamily="34" charset="-122"/>
+                <a:cs typeface="Georgia" pitchFamily="34" charset="-120"/>
+              </a:rPr>
+              <a:t>Presenter responds (3 min) — keep, change, think about.</a:t>
+            </a:r>
+            <a:endParaRPr lang="en-US" sz="1300" dirty="0"/>
+          </a:p>
+        </p:txBody>
+      </p:sp>
+      <p:sp>
+        <p:nvSpPr>
+          <p:cNvPr id="16" name="Text 14"/>
+          <p:cNvSpPr/>
+          <p:nvPr/>
+        </p:nvSpPr>
+        <p:spPr>
+          <a:xfrm>
+            <a:off x="692051" y="3764905"/>
+            <a:ext cx="7973389" cy="230981"/>
+          </a:xfrm>
+          <a:prstGeom prst="rect">
+            <a:avLst/>
+          </a:prstGeom>
+          <a:noFill/>
+          <a:ln/>
+        </p:spPr>
+        <p:txBody>
+          <a:bodyPr wrap="square" lIns="0" tIns="0" rIns="0" bIns="0" rtlCol="0" anchor="t"/>
+          <a:lstStyle/>
+          <a:p>
+            <a:pPr algn="l" indent="0" marL="0">
+              <a:lnSpc>
+                <a:spcPts val="1820"/>
+              </a:lnSpc>
+              <a:spcBef>
+                <a:spcPts val="300"/>
+              </a:spcBef>
+              <a:spcAft>
+                <a:spcPts val="300"/>
+              </a:spcAft>
+              <a:buNone/>
+            </a:pPr>
+            <a:r>
+              <a:rPr lang="en-US" sz="1300" i="1" dirty="0">
+                <a:solidFill>
+                  <a:srgbClr val="1C2833"/>
+                </a:solidFill>
+                <a:latin typeface="Georgia" pitchFamily="34" charset="0"/>
+                <a:ea typeface="Georgia" pitchFamily="34" charset="-122"/>
+                <a:cs typeface="Georgia" pitchFamily="34" charset="-120"/>
+              </a:rPr>
+              <a:t>Then switch.</a:t>
+            </a:r>
+            <a:endParaRPr lang="en-US" sz="1300" dirty="0"/>
+          </a:p>
+        </p:txBody>
+      </p:sp>
+      <p:sp>
+        <p:nvSpPr>
+          <p:cNvPr id="17" name="Text 15"/>
+          <p:cNvSpPr/>
+          <p:nvPr/>
+        </p:nvSpPr>
+        <p:spPr>
+          <a:xfrm>
+            <a:off x="406301" y="4434929"/>
+            <a:ext cx="8498026" cy="213271"/>
           </a:xfrm>
           <a:prstGeom prst="rect">
             <a:avLst/>
@@ -2948,8 +4398,952 @@
                 <a:ea typeface="Arial" pitchFamily="34" charset="-122"/>
                 <a:cs typeface="Arial" pitchFamily="34" charset="-120"/>
               </a:rPr>
-              <a:t>– No new scripture citation today; the term </a:t>
-            </a:r>
+              <a:t>Middle ·  · IKS Curriculum</a:t>
+            </a:r>
+            <a:endParaRPr lang="en-US" sz="1200" dirty="0"/>
+          </a:p>
+        </p:txBody>
+      </p:sp>
+    </p:spTree>
+  </p:cSld>
+  <p:clrMapOvr>
+    <a:masterClrMapping/>
+  </p:clrMapOvr>
+</p:sld>
+</file>
+
+<file path=ppt/slides/slide13.xml><?xml version="1.0" encoding="utf-8"?>
+<p:sld xmlns:a="http://schemas.openxmlformats.org/drawingml/2006/main" xmlns:r="http://schemas.openxmlformats.org/officeDocument/2006/relationships" xmlns:p="http://schemas.openxmlformats.org/presentationml/2006/main">
+  <p:cSld name="Slide 13">
+    <p:bg>
+      <p:bgPr>
+        <a:solidFill>
+          <a:srgbClr val="FFFFFF"/>
+        </a:solidFill>
+      </p:bgPr>
+    </p:bg>
+    <p:spTree>
+      <p:nvGrpSpPr>
+        <p:cNvPr id="1" name=""/>
+        <p:cNvGrpSpPr/>
+        <p:nvPr/>
+      </p:nvGrpSpPr>
+      <p:grpSpPr>
+        <a:xfrm>
+          <a:off x="0" y="0"/>
+          <a:ext cx="0" cy="0"/>
+          <a:chOff x="0" y="0"/>
+          <a:chExt cx="0" cy="0"/>
+        </a:xfrm>
+      </p:grpSpPr>
+      <p:sp>
+        <p:nvSpPr>
+          <p:cNvPr id="2" name="Text 0"/>
+          <p:cNvSpPr/>
+          <p:nvPr/>
+        </p:nvSpPr>
+        <p:spPr>
+          <a:xfrm>
+            <a:off x="0" y="0"/>
+            <a:ext cx="9144000" cy="101501"/>
+          </a:xfrm>
+          <a:prstGeom prst="rect">
+            <a:avLst/>
+          </a:prstGeom>
+          <a:solidFill>
+            <a:srgbClr val="277884"/>
+          </a:solidFill>
+          <a:ln/>
+        </p:spPr>
+        <p:txBody>
+          <a:bodyPr wrap="square" rtlCol="0" anchor="ctr"/>
+          <a:lstStyle/>
+          <a:p>
+            <a:pPr indent="0" marL="0">
+              <a:buNone/>
+            </a:pPr>
+            <a:endParaRPr lang="en-US" dirty="0"/>
+          </a:p>
+        </p:txBody>
+      </p:sp>
+      <p:sp>
+        <p:nvSpPr>
+          <p:cNvPr id="3" name="Text 1"/>
+          <p:cNvSpPr/>
+          <p:nvPr/>
+        </p:nvSpPr>
+        <p:spPr>
+          <a:xfrm>
+            <a:off x="406301" y="457051"/>
+            <a:ext cx="8498026" cy="274290"/>
+          </a:xfrm>
+          <a:prstGeom prst="rect">
+            <a:avLst/>
+          </a:prstGeom>
+          <a:noFill/>
+          <a:ln/>
+        </p:spPr>
+        <p:txBody>
+          <a:bodyPr wrap="square" lIns="0" tIns="0" rIns="0" bIns="0" rtlCol="0" anchor="t"/>
+          <a:lstStyle/>
+          <a:p>
+            <a:pPr algn="l" indent="0" marL="0">
+              <a:lnSpc>
+                <a:spcPts val="2160"/>
+              </a:lnSpc>
+              <a:spcBef>
+                <a:spcPts val="600"/>
+              </a:spcBef>
+              <a:spcAft>
+                <a:spcPts val="800"/>
+              </a:spcAft>
+              <a:buNone/>
+            </a:pPr>
+            <a:r>
+              <a:rPr lang="en-US" sz="1800" b="1" dirty="0">
+                <a:solidFill>
+                  <a:srgbClr val="FE4447"/>
+                </a:solidFill>
+                <a:latin typeface="Georgia" pitchFamily="34" charset="0"/>
+                <a:ea typeface="Georgia" pitchFamily="34" charset="-122"/>
+                <a:cs typeface="Georgia" pitchFamily="34" charset="-120"/>
+              </a:rPr>
+              <a:t>Critique Protocol Sheet (template)</a:t>
+            </a:r>
+            <a:endParaRPr lang="en-US" sz="1800" dirty="0"/>
+          </a:p>
+        </p:txBody>
+      </p:sp>
+      <p:sp>
+        <p:nvSpPr>
+          <p:cNvPr id="4" name="Text 2"/>
+          <p:cNvSpPr/>
+          <p:nvPr/>
+        </p:nvSpPr>
+        <p:spPr>
+          <a:xfrm>
+            <a:off x="406301" y="883593"/>
+            <a:ext cx="8331398" cy="4443710"/>
+          </a:xfrm>
+          <a:prstGeom prst="rect">
+            <a:avLst/>
+          </a:prstGeom>
+          <a:solidFill>
+            <a:srgbClr val="F4F8F9"/>
+          </a:solidFill>
+          <a:ln/>
+        </p:spPr>
+        <p:txBody>
+          <a:bodyPr wrap="square" rtlCol="0" anchor="ctr"/>
+          <a:lstStyle/>
+          <a:p>
+            <a:pPr indent="0" marL="0">
+              <a:buNone/>
+            </a:pPr>
+            <a:endParaRPr lang="en-US" dirty="0"/>
+          </a:p>
+        </p:txBody>
+      </p:sp>
+      <p:sp>
+        <p:nvSpPr>
+          <p:cNvPr id="5" name="Shape 3"/>
+          <p:cNvSpPr/>
+          <p:nvPr/>
+        </p:nvSpPr>
+        <p:spPr>
+          <a:xfrm>
+            <a:off x="430113" y="883593"/>
+            <a:ext cx="0" cy="4443710"/>
+          </a:xfrm>
+          <a:prstGeom prst="line">
+            <a:avLst/>
+          </a:prstGeom>
+          <a:noFill/>
+          <a:ln w="47625">
+            <a:solidFill>
+              <a:srgbClr val="277884"/>
+            </a:solidFill>
+            <a:prstDash val="solid"/>
+          </a:ln>
+        </p:spPr>
+      </p:sp>
+      <p:sp>
+        <p:nvSpPr>
+          <p:cNvPr id="6" name="Text 4"/>
+          <p:cNvSpPr/>
+          <p:nvPr/>
+        </p:nvSpPr>
+        <p:spPr>
+          <a:xfrm>
+            <a:off x="631627" y="1010543"/>
+            <a:ext cx="8086939" cy="174575"/>
+          </a:xfrm>
+          <a:prstGeom prst="rect">
+            <a:avLst/>
+          </a:prstGeom>
+          <a:noFill/>
+          <a:ln/>
+        </p:spPr>
+        <p:txBody>
+          <a:bodyPr wrap="square" lIns="0" tIns="0" rIns="0" bIns="0" rtlCol="0" anchor="t"/>
+          <a:lstStyle/>
+          <a:p>
+            <a:pPr algn="l" indent="0" marL="0">
+              <a:lnSpc>
+                <a:spcPts val="1375"/>
+              </a:lnSpc>
+              <a:buNone/>
+            </a:pPr>
+            <a:r>
+              <a:rPr lang="en-US" sz="1100" dirty="0">
+                <a:solidFill>
+                  <a:srgbClr val="1C2833"/>
+                </a:solidFill>
+                <a:latin typeface="Courier New" pitchFamily="34" charset="0"/>
+                <a:ea typeface="Courier New" pitchFamily="34" charset="-122"/>
+                <a:cs typeface="Courier New" pitchFamily="34" charset="-120"/>
+              </a:rPr>
+              <a:t>PROTOCOL SHEET — Mid-project critique</a:t>
+            </a:r>
+            <a:endParaRPr lang="en-US" sz="1100" dirty="0"/>
+          </a:p>
+        </p:txBody>
+      </p:sp>
+      <p:sp>
+        <p:nvSpPr>
+          <p:cNvPr id="7" name="Text 5"/>
+          <p:cNvSpPr/>
+          <p:nvPr/>
+        </p:nvSpPr>
+        <p:spPr>
+          <a:xfrm>
+            <a:off x="631627" y="1359694"/>
+            <a:ext cx="8086939" cy="174575"/>
+          </a:xfrm>
+          <a:prstGeom prst="rect">
+            <a:avLst/>
+          </a:prstGeom>
+          <a:noFill/>
+          <a:ln/>
+        </p:spPr>
+        <p:txBody>
+          <a:bodyPr wrap="square" lIns="0" tIns="0" rIns="0" bIns="0" rtlCol="0" anchor="t"/>
+          <a:lstStyle/>
+          <a:p>
+            <a:pPr algn="l" indent="0" marL="0">
+              <a:lnSpc>
+                <a:spcPts val="1375"/>
+              </a:lnSpc>
+              <a:buNone/>
+            </a:pPr>
+            <a:r>
+              <a:rPr lang="en-US" sz="1100" dirty="0">
+                <a:solidFill>
+                  <a:srgbClr val="1C2833"/>
+                </a:solidFill>
+                <a:latin typeface="Courier New" pitchFamily="34" charset="0"/>
+                <a:ea typeface="Courier New" pitchFamily="34" charset="-122"/>
+                <a:cs typeface="Courier New" pitchFamily="34" charset="-120"/>
+              </a:rPr>
+              <a:t>Presenter: ___________________  Critic: ___________________</a:t>
+            </a:r>
+            <a:endParaRPr lang="en-US" sz="1100" dirty="0"/>
+          </a:p>
+        </p:txBody>
+      </p:sp>
+      <p:sp>
+        <p:nvSpPr>
+          <p:cNvPr id="8" name="Text 6"/>
+          <p:cNvSpPr/>
+          <p:nvPr/>
+        </p:nvSpPr>
+        <p:spPr>
+          <a:xfrm>
+            <a:off x="631627" y="1708845"/>
+            <a:ext cx="8086939" cy="174575"/>
+          </a:xfrm>
+          <a:prstGeom prst="rect">
+            <a:avLst/>
+          </a:prstGeom>
+          <a:noFill/>
+          <a:ln/>
+        </p:spPr>
+        <p:txBody>
+          <a:bodyPr wrap="square" lIns="0" tIns="0" rIns="0" bIns="0" rtlCol="0" anchor="t"/>
+          <a:lstStyle/>
+          <a:p>
+            <a:pPr algn="l" indent="0" marL="0">
+              <a:lnSpc>
+                <a:spcPts val="1375"/>
+              </a:lnSpc>
+              <a:buNone/>
+            </a:pPr>
+            <a:r>
+              <a:rPr lang="en-US" sz="1100" dirty="0">
+                <a:solidFill>
+                  <a:srgbClr val="1C2833"/>
+                </a:solidFill>
+                <a:latin typeface="Courier New" pitchFamily="34" charset="0"/>
+                <a:ea typeface="Courier New" pitchFamily="34" charset="-122"/>
+                <a:cs typeface="Courier New" pitchFamily="34" charset="-120"/>
+              </a:rPr>
+              <a:t>PROJECT: ____________________________________________</a:t>
+            </a:r>
+            <a:endParaRPr lang="en-US" sz="1100" dirty="0"/>
+          </a:p>
+        </p:txBody>
+      </p:sp>
+      <p:sp>
+        <p:nvSpPr>
+          <p:cNvPr id="9" name="Text 7"/>
+          <p:cNvSpPr/>
+          <p:nvPr/>
+        </p:nvSpPr>
+        <p:spPr>
+          <a:xfrm>
+            <a:off x="631627" y="2057995"/>
+            <a:ext cx="8086939" cy="174575"/>
+          </a:xfrm>
+          <a:prstGeom prst="rect">
+            <a:avLst/>
+          </a:prstGeom>
+          <a:noFill/>
+          <a:ln/>
+        </p:spPr>
+        <p:txBody>
+          <a:bodyPr wrap="square" lIns="0" tIns="0" rIns="0" bIns="0" rtlCol="0" anchor="t"/>
+          <a:lstStyle/>
+          <a:p>
+            <a:pPr algn="l" indent="0" marL="0">
+              <a:lnSpc>
+                <a:spcPts val="1375"/>
+              </a:lnSpc>
+              <a:buNone/>
+            </a:pPr>
+            <a:r>
+              <a:rPr lang="en-US" sz="1100" dirty="0">
+                <a:solidFill>
+                  <a:srgbClr val="1C2833"/>
+                </a:solidFill>
+                <a:latin typeface="Courier New" pitchFamily="34" charset="0"/>
+                <a:ea typeface="Courier New" pitchFamily="34" charset="-122"/>
+                <a:cs typeface="Courier New" pitchFamily="34" charset="-120"/>
+              </a:rPr>
+              <a:t>CLARIFYING QUESTIONS (critic notes here):</a:t>
+            </a:r>
+            <a:endParaRPr lang="en-US" sz="1100" dirty="0"/>
+          </a:p>
+        </p:txBody>
+      </p:sp>
+      <p:sp>
+        <p:nvSpPr>
+          <p:cNvPr id="10" name="Text 8"/>
+          <p:cNvSpPr/>
+          <p:nvPr/>
+        </p:nvSpPr>
+        <p:spPr>
+          <a:xfrm>
+            <a:off x="631627" y="2232571"/>
+            <a:ext cx="8086939" cy="174575"/>
+          </a:xfrm>
+          <a:prstGeom prst="rect">
+            <a:avLst/>
+          </a:prstGeom>
+          <a:noFill/>
+          <a:ln/>
+        </p:spPr>
+        <p:txBody>
+          <a:bodyPr wrap="square" lIns="0" tIns="0" rIns="0" bIns="0" rtlCol="0" anchor="t"/>
+          <a:lstStyle/>
+          <a:p>
+            <a:pPr algn="l" indent="0" marL="0">
+              <a:lnSpc>
+                <a:spcPts val="1375"/>
+              </a:lnSpc>
+              <a:buNone/>
+            </a:pPr>
+            <a:r>
+              <a:rPr lang="en-US" sz="1100" dirty="0">
+                <a:solidFill>
+                  <a:srgbClr val="1C2833"/>
+                </a:solidFill>
+                <a:latin typeface="Courier New" pitchFamily="34" charset="0"/>
+                <a:ea typeface="Courier New" pitchFamily="34" charset="-122"/>
+                <a:cs typeface="Courier New" pitchFamily="34" charset="-120"/>
+              </a:rPr>
+              <a:t>1. ________________________________________________</a:t>
+            </a:r>
+            <a:endParaRPr lang="en-US" sz="1100" dirty="0"/>
+          </a:p>
+        </p:txBody>
+      </p:sp>
+      <p:sp>
+        <p:nvSpPr>
+          <p:cNvPr id="11" name="Text 9"/>
+          <p:cNvSpPr/>
+          <p:nvPr/>
+        </p:nvSpPr>
+        <p:spPr>
+          <a:xfrm>
+            <a:off x="631627" y="2407146"/>
+            <a:ext cx="8086939" cy="174575"/>
+          </a:xfrm>
+          <a:prstGeom prst="rect">
+            <a:avLst/>
+          </a:prstGeom>
+          <a:noFill/>
+          <a:ln/>
+        </p:spPr>
+        <p:txBody>
+          <a:bodyPr wrap="square" lIns="0" tIns="0" rIns="0" bIns="0" rtlCol="0" anchor="t"/>
+          <a:lstStyle/>
+          <a:p>
+            <a:pPr algn="l" indent="0" marL="0">
+              <a:lnSpc>
+                <a:spcPts val="1375"/>
+              </a:lnSpc>
+              <a:buNone/>
+            </a:pPr>
+            <a:r>
+              <a:rPr lang="en-US" sz="1100" dirty="0">
+                <a:solidFill>
+                  <a:srgbClr val="1C2833"/>
+                </a:solidFill>
+                <a:latin typeface="Courier New" pitchFamily="34" charset="0"/>
+                <a:ea typeface="Courier New" pitchFamily="34" charset="-122"/>
+                <a:cs typeface="Courier New" pitchFamily="34" charset="-120"/>
+              </a:rPr>
+              <a:t>2. ________________________________________________</a:t>
+            </a:r>
+            <a:endParaRPr lang="en-US" sz="1100" dirty="0"/>
+          </a:p>
+        </p:txBody>
+      </p:sp>
+      <p:sp>
+        <p:nvSpPr>
+          <p:cNvPr id="12" name="Text 10"/>
+          <p:cNvSpPr/>
+          <p:nvPr/>
+        </p:nvSpPr>
+        <p:spPr>
+          <a:xfrm>
+            <a:off x="631627" y="2756297"/>
+            <a:ext cx="8086939" cy="174575"/>
+          </a:xfrm>
+          <a:prstGeom prst="rect">
+            <a:avLst/>
+          </a:prstGeom>
+          <a:noFill/>
+          <a:ln/>
+        </p:spPr>
+        <p:txBody>
+          <a:bodyPr wrap="square" lIns="0" tIns="0" rIns="0" bIns="0" rtlCol="0" anchor="t"/>
+          <a:lstStyle/>
+          <a:p>
+            <a:pPr algn="l" indent="0" marL="0">
+              <a:lnSpc>
+                <a:spcPts val="1375"/>
+              </a:lnSpc>
+              <a:buNone/>
+            </a:pPr>
+            <a:r>
+              <a:rPr lang="en-US" sz="1100" dirty="0">
+                <a:solidFill>
+                  <a:srgbClr val="1C2833"/>
+                </a:solidFill>
+                <a:latin typeface="Courier New" pitchFamily="34" charset="0"/>
+                <a:ea typeface="Courier New" pitchFamily="34" charset="-122"/>
+                <a:cs typeface="Courier New" pitchFamily="34" charset="-120"/>
+              </a:rPr>
+              <a:t>"I notice…" (3 specific observations):</a:t>
+            </a:r>
+            <a:endParaRPr lang="en-US" sz="1100" dirty="0"/>
+          </a:p>
+        </p:txBody>
+      </p:sp>
+      <p:sp>
+        <p:nvSpPr>
+          <p:cNvPr id="13" name="Text 11"/>
+          <p:cNvSpPr/>
+          <p:nvPr/>
+        </p:nvSpPr>
+        <p:spPr>
+          <a:xfrm>
+            <a:off x="631627" y="2930872"/>
+            <a:ext cx="8086939" cy="174575"/>
+          </a:xfrm>
+          <a:prstGeom prst="rect">
+            <a:avLst/>
+          </a:prstGeom>
+          <a:noFill/>
+          <a:ln/>
+        </p:spPr>
+        <p:txBody>
+          <a:bodyPr wrap="square" lIns="0" tIns="0" rIns="0" bIns="0" rtlCol="0" anchor="t"/>
+          <a:lstStyle/>
+          <a:p>
+            <a:pPr algn="l" indent="0" marL="0">
+              <a:lnSpc>
+                <a:spcPts val="1375"/>
+              </a:lnSpc>
+              <a:buNone/>
+            </a:pPr>
+            <a:r>
+              <a:rPr lang="en-US" sz="1100" dirty="0">
+                <a:solidFill>
+                  <a:srgbClr val="1C2833"/>
+                </a:solidFill>
+                <a:latin typeface="Courier New" pitchFamily="34" charset="0"/>
+                <a:ea typeface="Courier New" pitchFamily="34" charset="-122"/>
+                <a:cs typeface="Courier New" pitchFamily="34" charset="-120"/>
+              </a:rPr>
+              <a:t>1. ________________________________________________</a:t>
+            </a:r>
+            <a:endParaRPr lang="en-US" sz="1100" dirty="0"/>
+          </a:p>
+        </p:txBody>
+      </p:sp>
+      <p:sp>
+        <p:nvSpPr>
+          <p:cNvPr id="14" name="Text 12"/>
+          <p:cNvSpPr/>
+          <p:nvPr/>
+        </p:nvSpPr>
+        <p:spPr>
+          <a:xfrm>
+            <a:off x="631627" y="3105448"/>
+            <a:ext cx="8086939" cy="174575"/>
+          </a:xfrm>
+          <a:prstGeom prst="rect">
+            <a:avLst/>
+          </a:prstGeom>
+          <a:noFill/>
+          <a:ln/>
+        </p:spPr>
+        <p:txBody>
+          <a:bodyPr wrap="square" lIns="0" tIns="0" rIns="0" bIns="0" rtlCol="0" anchor="t"/>
+          <a:lstStyle/>
+          <a:p>
+            <a:pPr algn="l" indent="0" marL="0">
+              <a:lnSpc>
+                <a:spcPts val="1375"/>
+              </a:lnSpc>
+              <a:buNone/>
+            </a:pPr>
+            <a:r>
+              <a:rPr lang="en-US" sz="1100" dirty="0">
+                <a:solidFill>
+                  <a:srgbClr val="1C2833"/>
+                </a:solidFill>
+                <a:latin typeface="Courier New" pitchFamily="34" charset="0"/>
+                <a:ea typeface="Courier New" pitchFamily="34" charset="-122"/>
+                <a:cs typeface="Courier New" pitchFamily="34" charset="-120"/>
+              </a:rPr>
+              <a:t>2. ________________________________________________</a:t>
+            </a:r>
+            <a:endParaRPr lang="en-US" sz="1100" dirty="0"/>
+          </a:p>
+        </p:txBody>
+      </p:sp>
+      <p:sp>
+        <p:nvSpPr>
+          <p:cNvPr id="15" name="Text 13"/>
+          <p:cNvSpPr/>
+          <p:nvPr/>
+        </p:nvSpPr>
+        <p:spPr>
+          <a:xfrm>
+            <a:off x="631627" y="3280023"/>
+            <a:ext cx="8086939" cy="174575"/>
+          </a:xfrm>
+          <a:prstGeom prst="rect">
+            <a:avLst/>
+          </a:prstGeom>
+          <a:noFill/>
+          <a:ln/>
+        </p:spPr>
+        <p:txBody>
+          <a:bodyPr wrap="square" lIns="0" tIns="0" rIns="0" bIns="0" rtlCol="0" anchor="t"/>
+          <a:lstStyle/>
+          <a:p>
+            <a:pPr algn="l" indent="0" marL="0">
+              <a:lnSpc>
+                <a:spcPts val="1375"/>
+              </a:lnSpc>
+              <a:buNone/>
+            </a:pPr>
+            <a:r>
+              <a:rPr lang="en-US" sz="1100" dirty="0">
+                <a:solidFill>
+                  <a:srgbClr val="1C2833"/>
+                </a:solidFill>
+                <a:latin typeface="Courier New" pitchFamily="34" charset="0"/>
+                <a:ea typeface="Courier New" pitchFamily="34" charset="-122"/>
+                <a:cs typeface="Courier New" pitchFamily="34" charset="-120"/>
+              </a:rPr>
+              <a:t>3. ________________________________________________</a:t>
+            </a:r>
+            <a:endParaRPr lang="en-US" sz="1100" dirty="0"/>
+          </a:p>
+        </p:txBody>
+      </p:sp>
+      <p:sp>
+        <p:nvSpPr>
+          <p:cNvPr id="16" name="Text 14"/>
+          <p:cNvSpPr/>
+          <p:nvPr/>
+        </p:nvSpPr>
+        <p:spPr>
+          <a:xfrm>
+            <a:off x="631627" y="3629174"/>
+            <a:ext cx="8086939" cy="174575"/>
+          </a:xfrm>
+          <a:prstGeom prst="rect">
+            <a:avLst/>
+          </a:prstGeom>
+          <a:noFill/>
+          <a:ln/>
+        </p:spPr>
+        <p:txBody>
+          <a:bodyPr wrap="square" lIns="0" tIns="0" rIns="0" bIns="0" rtlCol="0" anchor="t"/>
+          <a:lstStyle/>
+          <a:p>
+            <a:pPr algn="l" indent="0" marL="0">
+              <a:lnSpc>
+                <a:spcPts val="1375"/>
+              </a:lnSpc>
+              <a:buNone/>
+            </a:pPr>
+            <a:r>
+              <a:rPr lang="en-US" sz="1100" dirty="0">
+                <a:solidFill>
+                  <a:srgbClr val="1C2833"/>
+                </a:solidFill>
+                <a:latin typeface="Courier New" pitchFamily="34" charset="0"/>
+                <a:ea typeface="Courier New" pitchFamily="34" charset="-122"/>
+                <a:cs typeface="Courier New" pitchFamily="34" charset="-120"/>
+              </a:rPr>
+              <a:t>"I wonder…" (3 specific suggestions):</a:t>
+            </a:r>
+            <a:endParaRPr lang="en-US" sz="1100" dirty="0"/>
+          </a:p>
+        </p:txBody>
+      </p:sp>
+      <p:sp>
+        <p:nvSpPr>
+          <p:cNvPr id="17" name="Text 15"/>
+          <p:cNvSpPr/>
+          <p:nvPr/>
+        </p:nvSpPr>
+        <p:spPr>
+          <a:xfrm>
+            <a:off x="631627" y="3803749"/>
+            <a:ext cx="8086939" cy="174575"/>
+          </a:xfrm>
+          <a:prstGeom prst="rect">
+            <a:avLst/>
+          </a:prstGeom>
+          <a:noFill/>
+          <a:ln/>
+        </p:spPr>
+        <p:txBody>
+          <a:bodyPr wrap="square" lIns="0" tIns="0" rIns="0" bIns="0" rtlCol="0" anchor="t"/>
+          <a:lstStyle/>
+          <a:p>
+            <a:pPr algn="l" indent="0" marL="0">
+              <a:lnSpc>
+                <a:spcPts val="1375"/>
+              </a:lnSpc>
+              <a:buNone/>
+            </a:pPr>
+            <a:r>
+              <a:rPr lang="en-US" sz="1100" dirty="0">
+                <a:solidFill>
+                  <a:srgbClr val="1C2833"/>
+                </a:solidFill>
+                <a:latin typeface="Courier New" pitchFamily="34" charset="0"/>
+                <a:ea typeface="Courier New" pitchFamily="34" charset="-122"/>
+                <a:cs typeface="Courier New" pitchFamily="34" charset="-120"/>
+              </a:rPr>
+              <a:t>1. ________________________________________________</a:t>
+            </a:r>
+            <a:endParaRPr lang="en-US" sz="1100" dirty="0"/>
+          </a:p>
+        </p:txBody>
+      </p:sp>
+      <p:sp>
+        <p:nvSpPr>
+          <p:cNvPr id="18" name="Text 16"/>
+          <p:cNvSpPr/>
+          <p:nvPr/>
+        </p:nvSpPr>
+        <p:spPr>
+          <a:xfrm>
+            <a:off x="631627" y="3978325"/>
+            <a:ext cx="8086939" cy="174575"/>
+          </a:xfrm>
+          <a:prstGeom prst="rect">
+            <a:avLst/>
+          </a:prstGeom>
+          <a:noFill/>
+          <a:ln/>
+        </p:spPr>
+        <p:txBody>
+          <a:bodyPr wrap="square" lIns="0" tIns="0" rIns="0" bIns="0" rtlCol="0" anchor="t"/>
+          <a:lstStyle/>
+          <a:p>
+            <a:pPr algn="l" indent="0" marL="0">
+              <a:lnSpc>
+                <a:spcPts val="1375"/>
+              </a:lnSpc>
+              <a:buNone/>
+            </a:pPr>
+            <a:r>
+              <a:rPr lang="en-US" sz="1100" dirty="0">
+                <a:solidFill>
+                  <a:srgbClr val="1C2833"/>
+                </a:solidFill>
+                <a:latin typeface="Courier New" pitchFamily="34" charset="0"/>
+                <a:ea typeface="Courier New" pitchFamily="34" charset="-122"/>
+                <a:cs typeface="Courier New" pitchFamily="34" charset="-120"/>
+              </a:rPr>
+              <a:t>2. ________________________________________________</a:t>
+            </a:r>
+            <a:endParaRPr lang="en-US" sz="1100" dirty="0"/>
+          </a:p>
+        </p:txBody>
+      </p:sp>
+      <p:sp>
+        <p:nvSpPr>
+          <p:cNvPr id="19" name="Text 17"/>
+          <p:cNvSpPr/>
+          <p:nvPr/>
+        </p:nvSpPr>
+        <p:spPr>
+          <a:xfrm>
+            <a:off x="631627" y="4152900"/>
+            <a:ext cx="8086939" cy="174575"/>
+          </a:xfrm>
+          <a:prstGeom prst="rect">
+            <a:avLst/>
+          </a:prstGeom>
+          <a:noFill/>
+          <a:ln/>
+        </p:spPr>
+        <p:txBody>
+          <a:bodyPr wrap="square" lIns="0" tIns="0" rIns="0" bIns="0" rtlCol="0" anchor="t"/>
+          <a:lstStyle/>
+          <a:p>
+            <a:pPr algn="l" indent="0" marL="0">
+              <a:lnSpc>
+                <a:spcPts val="1375"/>
+              </a:lnSpc>
+              <a:buNone/>
+            </a:pPr>
+            <a:r>
+              <a:rPr lang="en-US" sz="1100" dirty="0">
+                <a:solidFill>
+                  <a:srgbClr val="1C2833"/>
+                </a:solidFill>
+                <a:latin typeface="Courier New" pitchFamily="34" charset="0"/>
+                <a:ea typeface="Courier New" pitchFamily="34" charset="-122"/>
+                <a:cs typeface="Courier New" pitchFamily="34" charset="-120"/>
+              </a:rPr>
+              <a:t>3. ________________________________________________</a:t>
+            </a:r>
+            <a:endParaRPr lang="en-US" sz="1100" dirty="0"/>
+          </a:p>
+        </p:txBody>
+      </p:sp>
+      <p:sp>
+        <p:nvSpPr>
+          <p:cNvPr id="20" name="Text 18"/>
+          <p:cNvSpPr/>
+          <p:nvPr/>
+        </p:nvSpPr>
+        <p:spPr>
+          <a:xfrm>
+            <a:off x="631627" y="4502051"/>
+            <a:ext cx="8086939" cy="174575"/>
+          </a:xfrm>
+          <a:prstGeom prst="rect">
+            <a:avLst/>
+          </a:prstGeom>
+          <a:noFill/>
+          <a:ln/>
+        </p:spPr>
+        <p:txBody>
+          <a:bodyPr wrap="square" lIns="0" tIns="0" rIns="0" bIns="0" rtlCol="0" anchor="t"/>
+          <a:lstStyle/>
+          <a:p>
+            <a:pPr algn="l" indent="0" marL="0">
+              <a:lnSpc>
+                <a:spcPts val="1375"/>
+              </a:lnSpc>
+              <a:buNone/>
+            </a:pPr>
+            <a:r>
+              <a:rPr lang="en-US" sz="1100" dirty="0">
+                <a:solidFill>
+                  <a:srgbClr val="1C2833"/>
+                </a:solidFill>
+                <a:latin typeface="Courier New" pitchFamily="34" charset="0"/>
+                <a:ea typeface="Courier New" pitchFamily="34" charset="-122"/>
+                <a:cs typeface="Courier New" pitchFamily="34" charset="-120"/>
+              </a:rPr>
+              <a:t>PRESENTER'S RESPONSE:</a:t>
+            </a:r>
+            <a:endParaRPr lang="en-US" sz="1100" dirty="0"/>
+          </a:p>
+        </p:txBody>
+      </p:sp>
+      <p:sp>
+        <p:nvSpPr>
+          <p:cNvPr id="21" name="Text 19"/>
+          <p:cNvSpPr/>
+          <p:nvPr/>
+        </p:nvSpPr>
+        <p:spPr>
+          <a:xfrm>
+            <a:off x="631627" y="4676626"/>
+            <a:ext cx="8086939" cy="174575"/>
+          </a:xfrm>
+          <a:prstGeom prst="rect">
+            <a:avLst/>
+          </a:prstGeom>
+          <a:noFill/>
+          <a:ln/>
+        </p:spPr>
+        <p:txBody>
+          <a:bodyPr wrap="square" lIns="0" tIns="0" rIns="0" bIns="0" rtlCol="0" anchor="t"/>
+          <a:lstStyle/>
+          <a:p>
+            <a:pPr algn="l" indent="0" marL="0">
+              <a:lnSpc>
+                <a:spcPts val="1375"/>
+              </a:lnSpc>
+              <a:buNone/>
+            </a:pPr>
+            <a:r>
+              <a:rPr lang="en-US" sz="1100" dirty="0">
+                <a:solidFill>
+                  <a:srgbClr val="1C2833"/>
+                </a:solidFill>
+                <a:latin typeface="Courier New" pitchFamily="34" charset="0"/>
+                <a:ea typeface="Courier New" pitchFamily="34" charset="-122"/>
+                <a:cs typeface="Courier New" pitchFamily="34" charset="-120"/>
+              </a:rPr>
+              <a:t>– I'll keep: __________________________________________</a:t>
+            </a:r>
+            <a:endParaRPr lang="en-US" sz="1100" dirty="0"/>
+          </a:p>
+        </p:txBody>
+      </p:sp>
+      <p:sp>
+        <p:nvSpPr>
+          <p:cNvPr id="22" name="Text 20"/>
+          <p:cNvSpPr/>
+          <p:nvPr/>
+        </p:nvSpPr>
+        <p:spPr>
+          <a:xfrm>
+            <a:off x="631627" y="4851202"/>
+            <a:ext cx="8086939" cy="174575"/>
+          </a:xfrm>
+          <a:prstGeom prst="rect">
+            <a:avLst/>
+          </a:prstGeom>
+          <a:noFill/>
+          <a:ln/>
+        </p:spPr>
+        <p:txBody>
+          <a:bodyPr wrap="square" lIns="0" tIns="0" rIns="0" bIns="0" rtlCol="0" anchor="t"/>
+          <a:lstStyle/>
+          <a:p>
+            <a:pPr algn="l" indent="0" marL="0">
+              <a:lnSpc>
+                <a:spcPts val="1375"/>
+              </a:lnSpc>
+              <a:buNone/>
+            </a:pPr>
+            <a:r>
+              <a:rPr lang="en-US" sz="1100" dirty="0">
+                <a:solidFill>
+                  <a:srgbClr val="1C2833"/>
+                </a:solidFill>
+                <a:latin typeface="Courier New" pitchFamily="34" charset="0"/>
+                <a:ea typeface="Courier New" pitchFamily="34" charset="-122"/>
+                <a:cs typeface="Courier New" pitchFamily="34" charset="-120"/>
+              </a:rPr>
+              <a:t>– I'll change: ________________________________________</a:t>
+            </a:r>
+            <a:endParaRPr lang="en-US" sz="1100" dirty="0"/>
+          </a:p>
+        </p:txBody>
+      </p:sp>
+      <p:sp>
+        <p:nvSpPr>
+          <p:cNvPr id="23" name="Text 21"/>
+          <p:cNvSpPr/>
+          <p:nvPr/>
+        </p:nvSpPr>
+        <p:spPr>
+          <a:xfrm>
+            <a:off x="631627" y="5025777"/>
+            <a:ext cx="8086939" cy="174575"/>
+          </a:xfrm>
+          <a:prstGeom prst="rect">
+            <a:avLst/>
+          </a:prstGeom>
+          <a:noFill/>
+          <a:ln/>
+        </p:spPr>
+        <p:txBody>
+          <a:bodyPr wrap="square" lIns="0" tIns="0" rIns="0" bIns="0" rtlCol="0" anchor="t"/>
+          <a:lstStyle/>
+          <a:p>
+            <a:pPr algn="l" indent="0" marL="0">
+              <a:lnSpc>
+                <a:spcPts val="1375"/>
+              </a:lnSpc>
+              <a:buNone/>
+            </a:pPr>
+            <a:r>
+              <a:rPr lang="en-US" sz="1100" dirty="0">
+                <a:solidFill>
+                  <a:srgbClr val="1C2833"/>
+                </a:solidFill>
+                <a:latin typeface="Courier New" pitchFamily="34" charset="0"/>
+                <a:ea typeface="Courier New" pitchFamily="34" charset="-122"/>
+                <a:cs typeface="Courier New" pitchFamily="34" charset="-120"/>
+              </a:rPr>
+              <a:t>– I'll think about: ___________________________________</a:t>
+            </a:r>
+            <a:endParaRPr lang="en-US" sz="1100" dirty="0"/>
+          </a:p>
+        </p:txBody>
+      </p:sp>
+      <p:sp>
+        <p:nvSpPr>
+          <p:cNvPr id="24" name="Text 22"/>
+          <p:cNvSpPr/>
+          <p:nvPr/>
+        </p:nvSpPr>
+        <p:spPr>
+          <a:xfrm>
+            <a:off x="406301" y="5492353"/>
+            <a:ext cx="8498026" cy="213271"/>
+          </a:xfrm>
+          <a:prstGeom prst="rect">
+            <a:avLst/>
+          </a:prstGeom>
+          <a:noFill/>
+          <a:ln/>
+        </p:spPr>
+        <p:txBody>
+          <a:bodyPr wrap="square" lIns="0" tIns="0" rIns="0" bIns="0" rtlCol="0" anchor="t"/>
+          <a:lstStyle/>
+          <a:p>
             <a:pPr algn="l" indent="0" marL="0">
               <a:lnSpc>
                 <a:spcPts val="1680"/>
@@ -2963,7 +5357,7 @@
               <a:buNone/>
             </a:pPr>
             <a:r>
-              <a:rPr lang="en-US" sz="1200" i="1" dirty="0">
+              <a:rPr lang="en-US" sz="1200" dirty="0">
                 <a:solidFill>
                   <a:srgbClr val="1C2833"/>
                 </a:solidFill>
@@ -2971,19 +5365,152 @@
                 <a:ea typeface="Arial" pitchFamily="34" charset="-122"/>
                 <a:cs typeface="Arial" pitchFamily="34" charset="-120"/>
               </a:rPr>
-              <a:t>vicāra</a:t>
-            </a:r>
-            <a:pPr algn="l" indent="0" marL="0">
-              <a:lnSpc>
-                <a:spcPts val="1680"/>
+              <a:t>Middle ·  · IKS Curriculum</a:t>
+            </a:r>
+            <a:endParaRPr lang="en-US" sz="1200" dirty="0"/>
+          </a:p>
+        </p:txBody>
+      </p:sp>
+    </p:spTree>
+  </p:cSld>
+  <p:clrMapOvr>
+    <a:masterClrMapping/>
+  </p:clrMapOvr>
+</p:sld>
+</file>
+
+<file path=ppt/slides/slide14.xml><?xml version="1.0" encoding="utf-8"?>
+<p:sld xmlns:a="http://schemas.openxmlformats.org/drawingml/2006/main" xmlns:r="http://schemas.openxmlformats.org/officeDocument/2006/relationships" xmlns:p="http://schemas.openxmlformats.org/presentationml/2006/main">
+  <p:cSld name="Slide 14">
+    <p:bg>
+      <p:bgPr>
+        <a:solidFill>
+          <a:srgbClr val="FFFFFF"/>
+        </a:solidFill>
+      </p:bgPr>
+    </p:bg>
+    <p:spTree>
+      <p:nvGrpSpPr>
+        <p:cNvPr id="1" name=""/>
+        <p:cNvGrpSpPr/>
+        <p:nvPr/>
+      </p:nvGrpSpPr>
+      <p:grpSpPr>
+        <a:xfrm>
+          <a:off x="0" y="0"/>
+          <a:ext cx="0" cy="0"/>
+          <a:chOff x="0" y="0"/>
+          <a:chExt cx="0" cy="0"/>
+        </a:xfrm>
+      </p:grpSpPr>
+      <p:sp>
+        <p:nvSpPr>
+          <p:cNvPr id="2" name="Text 0"/>
+          <p:cNvSpPr/>
+          <p:nvPr/>
+        </p:nvSpPr>
+        <p:spPr>
+          <a:xfrm>
+            <a:off x="0" y="0"/>
+            <a:ext cx="9144000" cy="101501"/>
+          </a:xfrm>
+          <a:prstGeom prst="rect">
+            <a:avLst/>
+          </a:prstGeom>
+          <a:solidFill>
+            <a:srgbClr val="277884"/>
+          </a:solidFill>
+          <a:ln/>
+        </p:spPr>
+        <p:txBody>
+          <a:bodyPr wrap="square" rtlCol="0" anchor="ctr"/>
+          <a:lstStyle/>
+          <a:p>
+            <a:pPr indent="0" marL="0">
+              <a:buNone/>
+            </a:pPr>
+            <a:endParaRPr lang="en-US" dirty="0"/>
+          </a:p>
+        </p:txBody>
+      </p:sp>
+      <p:sp>
+        <p:nvSpPr>
+          <p:cNvPr id="3" name="Text 1"/>
+          <p:cNvSpPr/>
+          <p:nvPr/>
+        </p:nvSpPr>
+        <p:spPr>
+          <a:xfrm>
+            <a:off x="406301" y="457051"/>
+            <a:ext cx="8498026" cy="274290"/>
+          </a:xfrm>
+          <a:prstGeom prst="rect">
+            <a:avLst/>
+          </a:prstGeom>
+          <a:noFill/>
+          <a:ln/>
+        </p:spPr>
+        <p:txBody>
+          <a:bodyPr wrap="square" lIns="0" tIns="0" rIns="0" bIns="0" rtlCol="0" anchor="t"/>
+          <a:lstStyle/>
+          <a:p>
+            <a:pPr algn="l" indent="0" marL="0">
+              <a:lnSpc>
+                <a:spcPts val="2160"/>
               </a:lnSpc>
               <a:spcBef>
-                <a:spcPts val="300"/>
+                <a:spcPts val="600"/>
               </a:spcBef>
               <a:spcAft>
-                <a:spcPts val="300"/>
-              </a:spcAft>
-              <a:buNone/>
+                <a:spcPts val="800"/>
+              </a:spcAft>
+              <a:buNone/>
+            </a:pPr>
+            <a:r>
+              <a:rPr lang="en-US" sz="1800" b="1" dirty="0">
+                <a:solidFill>
+                  <a:srgbClr val="FE4447"/>
+                </a:solidFill>
+                <a:latin typeface="Georgia" pitchFamily="34" charset="0"/>
+                <a:ea typeface="Georgia" pitchFamily="34" charset="-122"/>
+                <a:cs typeface="Georgia" pitchFamily="34" charset="-120"/>
+              </a:rPr>
+              <a:t>Homework</a:t>
+            </a:r>
+            <a:endParaRPr lang="en-US" sz="1800" dirty="0"/>
+          </a:p>
+        </p:txBody>
+      </p:sp>
+      <p:sp>
+        <p:nvSpPr>
+          <p:cNvPr id="4" name="Text 2"/>
+          <p:cNvSpPr/>
+          <p:nvPr/>
+        </p:nvSpPr>
+        <p:spPr>
+          <a:xfrm>
+            <a:off x="634901" y="883593"/>
+            <a:ext cx="8102798" cy="769441"/>
+          </a:xfrm>
+          <a:prstGeom prst="rect">
+            <a:avLst/>
+          </a:prstGeom>
+          <a:noFill/>
+          <a:ln/>
+        </p:spPr>
+        <p:txBody>
+          <a:bodyPr wrap="square" lIns="0" tIns="0" rIns="0" bIns="0" rtlCol="0" anchor="t"/>
+          <a:lstStyle/>
+          <a:p>
+            <a:pPr algn="l" marL="342900" indent="-342900">
+              <a:lnSpc>
+                <a:spcPts val="1620"/>
+              </a:lnSpc>
+              <a:spcAft>
+                <a:spcPts val="300"/>
+              </a:spcAft>
+              <a:buSzPct val="100000"/>
+              <a:buChar char="•"/>
             </a:pPr>
             <a:r>
               <a:rPr lang="en-US" sz="1200" dirty="0">
@@ -2994,22 +5521,23 @@
                 <a:ea typeface="Arial" pitchFamily="34" charset="-122"/>
                 <a:cs typeface="Arial" pitchFamily="34" charset="-120"/>
               </a:rPr>
-              <a:t> (inquiry, reflection) from Day 1 returns implicitly — critique is collective </a:t>
-            </a:r>
-            <a:pPr algn="l" indent="0" marL="0">
-              <a:lnSpc>
-                <a:spcPts val="1680"/>
-              </a:lnSpc>
-              <a:spcBef>
-                <a:spcPts val="300"/>
-              </a:spcBef>
-              <a:spcAft>
-                <a:spcPts val="300"/>
-              </a:spcAft>
-              <a:buNone/>
-            </a:pPr>
-            <a:r>
-              <a:rPr lang="en-US" sz="1200" i="1" dirty="0">
+              <a:t>Re-read your critic's notes overnight.</a:t>
+            </a:r>
+            <a:endParaRPr lang="en-US" sz="1200" dirty="0"/>
+          </a:p>
+          <a:p>
+            <a:pPr algn="l" marL="342900" indent="-342900">
+              <a:lnSpc>
+                <a:spcPts val="1620"/>
+              </a:lnSpc>
+              <a:spcAft>
+                <a:spcPts val="300"/>
+              </a:spcAft>
+              <a:buSzPct val="100000"/>
+              <a:buChar char="•"/>
+            </a:pPr>
+            <a:r>
+              <a:rPr lang="en-US" sz="1200" dirty="0">
                 <a:solidFill>
                   <a:srgbClr val="1C2833"/>
                 </a:solidFill>
@@ -3017,15 +5545,1104 @@
                 <a:ea typeface="Arial" pitchFamily="34" charset="-122"/>
                 <a:cs typeface="Arial" pitchFamily="34" charset="-120"/>
               </a:rPr>
+              <a:t>Decide which three changes you'll make. Write them in your journal.</a:t>
+            </a:r>
+            <a:endParaRPr lang="en-US" sz="1200" dirty="0"/>
+          </a:p>
+          <a:p>
+            <a:pPr algn="l" marL="342900" indent="-342900">
+              <a:lnSpc>
+                <a:spcPts val="1620"/>
+              </a:lnSpc>
+              <a:spcAft>
+                <a:spcPts val="300"/>
+              </a:spcAft>
+              <a:buSzPct val="100000"/>
+              <a:buChar char="•"/>
+            </a:pPr>
+            <a:r>
+              <a:rPr lang="en-US" sz="1200" dirty="0">
+                <a:solidFill>
+                  <a:srgbClr val="1C2833"/>
+                </a:solidFill>
+                <a:latin typeface="Arial" pitchFamily="34" charset="0"/>
+                <a:ea typeface="Arial" pitchFamily="34" charset="-122"/>
+                <a:cs typeface="Arial" pitchFamily="34" charset="-120"/>
+              </a:rPr>
+              <a:t>Bring ALL materials to class tomorrow. Build session starts the moment you sit down.</a:t>
+            </a:r>
+            <a:endParaRPr lang="en-US" sz="1200" dirty="0"/>
+          </a:p>
+        </p:txBody>
+      </p:sp>
+      <p:sp>
+        <p:nvSpPr>
+          <p:cNvPr id="5" name="Text 3"/>
+          <p:cNvSpPr/>
+          <p:nvPr/>
+        </p:nvSpPr>
+        <p:spPr>
+          <a:xfrm>
+            <a:off x="406301" y="4434929"/>
+            <a:ext cx="8498026" cy="213271"/>
+          </a:xfrm>
+          <a:prstGeom prst="rect">
+            <a:avLst/>
+          </a:prstGeom>
+          <a:noFill/>
+          <a:ln/>
+        </p:spPr>
+        <p:txBody>
+          <a:bodyPr wrap="square" lIns="0" tIns="0" rIns="0" bIns="0" rtlCol="0" anchor="t"/>
+          <a:lstStyle/>
+          <a:p>
+            <a:pPr algn="l" indent="0" marL="0">
+              <a:lnSpc>
+                <a:spcPts val="1680"/>
+              </a:lnSpc>
+              <a:spcBef>
+                <a:spcPts val="300"/>
+              </a:spcBef>
+              <a:spcAft>
+                <a:spcPts val="300"/>
+              </a:spcAft>
+              <a:buNone/>
+            </a:pPr>
+            <a:r>
+              <a:rPr lang="en-US" sz="1200" dirty="0">
+                <a:solidFill>
+                  <a:srgbClr val="1C2833"/>
+                </a:solidFill>
+                <a:latin typeface="Arial" pitchFamily="34" charset="0"/>
+                <a:ea typeface="Arial" pitchFamily="34" charset="-122"/>
+                <a:cs typeface="Arial" pitchFamily="34" charset="-120"/>
+              </a:rPr>
+              <a:t>Middle ·  · IKS Curriculum</a:t>
+            </a:r>
+            <a:endParaRPr lang="en-US" sz="1200" dirty="0"/>
+          </a:p>
+        </p:txBody>
+      </p:sp>
+    </p:spTree>
+  </p:cSld>
+  <p:clrMapOvr>
+    <a:masterClrMapping/>
+  </p:clrMapOvr>
+</p:sld>
+</file>
+
+<file path=ppt/slides/slide15.xml><?xml version="1.0" encoding="utf-8"?>
+<p:sld xmlns:a="http://schemas.openxmlformats.org/drawingml/2006/main" xmlns:r="http://schemas.openxmlformats.org/officeDocument/2006/relationships" xmlns:p="http://schemas.openxmlformats.org/presentationml/2006/main">
+  <p:cSld name="Slide 15">
+    <p:bg>
+      <p:bgPr>
+        <a:solidFill>
+          <a:srgbClr val="FFFFFF"/>
+        </a:solidFill>
+      </p:bgPr>
+    </p:bg>
+    <p:spTree>
+      <p:nvGrpSpPr>
+        <p:cNvPr id="1" name=""/>
+        <p:cNvGrpSpPr/>
+        <p:nvPr/>
+      </p:nvGrpSpPr>
+      <p:grpSpPr>
+        <a:xfrm>
+          <a:off x="0" y="0"/>
+          <a:ext cx="0" cy="0"/>
+          <a:chOff x="0" y="0"/>
+          <a:chExt cx="0" cy="0"/>
+        </a:xfrm>
+      </p:grpSpPr>
+      <p:sp>
+        <p:nvSpPr>
+          <p:cNvPr id="2" name="Text 0"/>
+          <p:cNvSpPr/>
+          <p:nvPr/>
+        </p:nvSpPr>
+        <p:spPr>
+          <a:xfrm>
+            <a:off x="0" y="0"/>
+            <a:ext cx="9144000" cy="101501"/>
+          </a:xfrm>
+          <a:prstGeom prst="rect">
+            <a:avLst/>
+          </a:prstGeom>
+          <a:solidFill>
+            <a:srgbClr val="277884"/>
+          </a:solidFill>
+          <a:ln/>
+        </p:spPr>
+        <p:txBody>
+          <a:bodyPr wrap="square" rtlCol="0" anchor="ctr"/>
+          <a:lstStyle/>
+          <a:p>
+            <a:pPr indent="0" marL="0">
+              <a:buNone/>
+            </a:pPr>
+            <a:endParaRPr lang="en-US" dirty="0"/>
+          </a:p>
+        </p:txBody>
+      </p:sp>
+      <p:sp>
+        <p:nvSpPr>
+          <p:cNvPr id="3" name="Text 1"/>
+          <p:cNvSpPr/>
+          <p:nvPr/>
+        </p:nvSpPr>
+        <p:spPr>
+          <a:xfrm>
+            <a:off x="406301" y="457051"/>
+            <a:ext cx="8498026" cy="274290"/>
+          </a:xfrm>
+          <a:prstGeom prst="rect">
+            <a:avLst/>
+          </a:prstGeom>
+          <a:noFill/>
+          <a:ln/>
+        </p:spPr>
+        <p:txBody>
+          <a:bodyPr wrap="square" lIns="0" tIns="0" rIns="0" bIns="0" rtlCol="0" anchor="t"/>
+          <a:lstStyle/>
+          <a:p>
+            <a:pPr algn="l" indent="0" marL="0">
+              <a:lnSpc>
+                <a:spcPts val="2160"/>
+              </a:lnSpc>
+              <a:spcBef>
+                <a:spcPts val="600"/>
+              </a:spcBef>
+              <a:spcAft>
+                <a:spcPts val="800"/>
+              </a:spcAft>
+              <a:buNone/>
+            </a:pPr>
+            <a:r>
+              <a:rPr lang="en-US" sz="1800" b="1" dirty="0">
+                <a:solidFill>
+                  <a:srgbClr val="FE4447"/>
+                </a:solidFill>
+                <a:latin typeface="Georgia" pitchFamily="34" charset="0"/>
+                <a:ea typeface="Georgia" pitchFamily="34" charset="-122"/>
+                <a:cs typeface="Georgia" pitchFamily="34" charset="-120"/>
+              </a:rPr>
+              <a:t>Differentiation</a:t>
+            </a:r>
+            <a:endParaRPr lang="en-US" sz="1800" dirty="0"/>
+          </a:p>
+        </p:txBody>
+      </p:sp>
+      <p:sp>
+        <p:nvSpPr>
+          <p:cNvPr id="4" name="Text 2"/>
+          <p:cNvSpPr/>
+          <p:nvPr/>
+        </p:nvSpPr>
+        <p:spPr>
+          <a:xfrm>
+            <a:off x="634901" y="883593"/>
+            <a:ext cx="8102798" cy="937022"/>
+          </a:xfrm>
+          <a:prstGeom prst="rect">
+            <a:avLst/>
+          </a:prstGeom>
+          <a:noFill/>
+          <a:ln/>
+        </p:spPr>
+        <p:txBody>
+          <a:bodyPr wrap="square" lIns="0" tIns="0" rIns="0" bIns="0" rtlCol="0" anchor="t"/>
+          <a:lstStyle/>
+          <a:p>
+            <a:pPr algn="l" marL="342900" indent="-342900">
+              <a:lnSpc>
+                <a:spcPts val="1620"/>
+              </a:lnSpc>
+              <a:spcAft>
+                <a:spcPts val="300"/>
+              </a:spcAft>
+              <a:buSzPct val="100000"/>
+              <a:buChar char="•"/>
+            </a:pPr>
+            <a:r>
+              <a:rPr lang="en-US" sz="1200" b="1" dirty="0">
+                <a:solidFill>
+                  <a:srgbClr val="1C2833"/>
+                </a:solidFill>
+                <a:latin typeface="Arial" pitchFamily="34" charset="0"/>
+                <a:ea typeface="Arial" pitchFamily="34" charset="-122"/>
+                <a:cs typeface="Arial" pitchFamily="34" charset="-120"/>
+              </a:rPr>
+              <a:t>One tier up:</a:t>
+            </a:r>
+            <a:pPr algn="l" indent="0" marL="0">
+              <a:lnSpc>
+                <a:spcPts val="1620"/>
+              </a:lnSpc>
+              <a:spcAft>
+                <a:spcPts val="300"/>
+              </a:spcAft>
+              <a:buNone/>
+            </a:pPr>
+            <a:r>
+              <a:rPr lang="en-US" sz="1200" dirty="0">
+                <a:solidFill>
+                  <a:srgbClr val="1C2833"/>
+                </a:solidFill>
+                <a:latin typeface="Arial" pitchFamily="34" charset="0"/>
+                <a:ea typeface="Arial" pitchFamily="34" charset="-122"/>
+                <a:cs typeface="Arial" pitchFamily="34" charset="-120"/>
+              </a:rPr>
+              <a:t> After the protocol, write a 50-word paragraph in your journal about what changed in your </a:t>
+            </a:r>
+            <a:pPr algn="l" indent="0" marL="0">
+              <a:lnSpc>
+                <a:spcPts val="1620"/>
+              </a:lnSpc>
+              <a:spcAft>
+                <a:spcPts val="300"/>
+              </a:spcAft>
+              <a:buNone/>
+            </a:pPr>
+            <a:r>
+              <a:rPr lang="en-US" sz="1200" i="1" dirty="0">
+                <a:solidFill>
+                  <a:srgbClr val="1C2833"/>
+                </a:solidFill>
+                <a:latin typeface="Arial" pitchFamily="34" charset="0"/>
+                <a:ea typeface="Arial" pitchFamily="34" charset="-122"/>
+                <a:cs typeface="Arial" pitchFamily="34" charset="-120"/>
+              </a:rPr>
+              <a:t>thinking</a:t>
+            </a:r>
+            <a:pPr algn="l" indent="0" marL="0">
+              <a:lnSpc>
+                <a:spcPts val="1620"/>
+              </a:lnSpc>
+              <a:spcAft>
+                <a:spcPts val="300"/>
+              </a:spcAft>
+              <a:buNone/>
+            </a:pPr>
+            <a:r>
+              <a:rPr lang="en-US" sz="1200" dirty="0">
+                <a:solidFill>
+                  <a:srgbClr val="1C2833"/>
+                </a:solidFill>
+                <a:latin typeface="Arial" pitchFamily="34" charset="0"/>
+                <a:ea typeface="Arial" pitchFamily="34" charset="-122"/>
+                <a:cs typeface="Arial" pitchFamily="34" charset="-120"/>
+              </a:rPr>
+              <a:t>, not just your plan. Did the critique surface an assumption you didn't know you had?</a:t>
+            </a:r>
+            <a:endParaRPr lang="en-US" sz="1200" dirty="0"/>
+          </a:p>
+          <a:p>
+            <a:pPr algn="l" marL="342900" indent="-342900">
+              <a:lnSpc>
+                <a:spcPts val="1620"/>
+              </a:lnSpc>
+              <a:spcAft>
+                <a:spcPts val="300"/>
+              </a:spcAft>
+              <a:buSzPct val="100000"/>
+              <a:buChar char="•"/>
+            </a:pPr>
+            <a:r>
+              <a:rPr lang="en-US" sz="1200" b="1" dirty="0">
+                <a:solidFill>
+                  <a:srgbClr val="1C2833"/>
+                </a:solidFill>
+                <a:latin typeface="Arial" pitchFamily="34" charset="0"/>
+                <a:ea typeface="Arial" pitchFamily="34" charset="-122"/>
+                <a:cs typeface="Arial" pitchFamily="34" charset="-120"/>
+              </a:rPr>
+              <a:t>One tier down:</a:t>
+            </a:r>
+            <a:pPr algn="l" indent="0" marL="0">
+              <a:lnSpc>
+                <a:spcPts val="1620"/>
+              </a:lnSpc>
+              <a:spcAft>
+                <a:spcPts val="300"/>
+              </a:spcAft>
+              <a:buNone/>
+            </a:pPr>
+            <a:r>
+              <a:rPr lang="en-US" sz="1200" dirty="0">
+                <a:solidFill>
+                  <a:srgbClr val="1C2833"/>
+                </a:solidFill>
+                <a:latin typeface="Arial" pitchFamily="34" charset="0"/>
+                <a:ea typeface="Arial" pitchFamily="34" charset="-122"/>
+                <a:cs typeface="Arial" pitchFamily="34" charset="-120"/>
+              </a:rPr>
+              <a:t> If giving "three notices and three wonders" feels like too much, give two of each. Quality of one specific observation beats quantity.</a:t>
+            </a:r>
+            <a:endParaRPr lang="en-US" sz="1200" dirty="0"/>
+          </a:p>
+        </p:txBody>
+      </p:sp>
+      <p:sp>
+        <p:nvSpPr>
+          <p:cNvPr id="5" name="Text 3"/>
+          <p:cNvSpPr/>
+          <p:nvPr/>
+        </p:nvSpPr>
+        <p:spPr>
+          <a:xfrm>
+            <a:off x="406301" y="4434929"/>
+            <a:ext cx="8498026" cy="213271"/>
+          </a:xfrm>
+          <a:prstGeom prst="rect">
+            <a:avLst/>
+          </a:prstGeom>
+          <a:noFill/>
+          <a:ln/>
+        </p:spPr>
+        <p:txBody>
+          <a:bodyPr wrap="square" lIns="0" tIns="0" rIns="0" bIns="0" rtlCol="0" anchor="t"/>
+          <a:lstStyle/>
+          <a:p>
+            <a:pPr algn="l" indent="0" marL="0">
+              <a:lnSpc>
+                <a:spcPts val="1680"/>
+              </a:lnSpc>
+              <a:spcBef>
+                <a:spcPts val="300"/>
+              </a:spcBef>
+              <a:spcAft>
+                <a:spcPts val="300"/>
+              </a:spcAft>
+              <a:buNone/>
+            </a:pPr>
+            <a:r>
+              <a:rPr lang="en-US" sz="1200" dirty="0">
+                <a:solidFill>
+                  <a:srgbClr val="1C2833"/>
+                </a:solidFill>
+                <a:latin typeface="Arial" pitchFamily="34" charset="0"/>
+                <a:ea typeface="Arial" pitchFamily="34" charset="-122"/>
+                <a:cs typeface="Arial" pitchFamily="34" charset="-120"/>
+              </a:rPr>
+              <a:t>Middle ·  · IKS Curriculum</a:t>
+            </a:r>
+            <a:endParaRPr lang="en-US" sz="1200" dirty="0"/>
+          </a:p>
+        </p:txBody>
+      </p:sp>
+    </p:spTree>
+  </p:cSld>
+  <p:clrMapOvr>
+    <a:masterClrMapping/>
+  </p:clrMapOvr>
+</p:sld>
+</file>
+
+<file path=ppt/slides/slide16.xml><?xml version="1.0" encoding="utf-8"?>
+<p:sld xmlns:a="http://schemas.openxmlformats.org/drawingml/2006/main" xmlns:r="http://schemas.openxmlformats.org/officeDocument/2006/relationships" xmlns:p="http://schemas.openxmlformats.org/presentationml/2006/main">
+  <p:cSld name="Slide 16">
+    <p:bg>
+      <p:bgPr>
+        <a:solidFill>
+          <a:srgbClr val="FFFFFF"/>
+        </a:solidFill>
+      </p:bgPr>
+    </p:bg>
+    <p:spTree>
+      <p:nvGrpSpPr>
+        <p:cNvPr id="1" name=""/>
+        <p:cNvGrpSpPr/>
+        <p:nvPr/>
+      </p:nvGrpSpPr>
+      <p:grpSpPr>
+        <a:xfrm>
+          <a:off x="0" y="0"/>
+          <a:ext cx="0" cy="0"/>
+          <a:chOff x="0" y="0"/>
+          <a:chExt cx="0" cy="0"/>
+        </a:xfrm>
+      </p:grpSpPr>
+      <p:sp>
+        <p:nvSpPr>
+          <p:cNvPr id="2" name="Text 0"/>
+          <p:cNvSpPr/>
+          <p:nvPr/>
+        </p:nvSpPr>
+        <p:spPr>
+          <a:xfrm>
+            <a:off x="0" y="0"/>
+            <a:ext cx="9144000" cy="101501"/>
+          </a:xfrm>
+          <a:prstGeom prst="rect">
+            <a:avLst/>
+          </a:prstGeom>
+          <a:solidFill>
+            <a:srgbClr val="277884"/>
+          </a:solidFill>
+          <a:ln/>
+        </p:spPr>
+        <p:txBody>
+          <a:bodyPr wrap="square" rtlCol="0" anchor="ctr"/>
+          <a:lstStyle/>
+          <a:p>
+            <a:pPr indent="0" marL="0">
+              <a:buNone/>
+            </a:pPr>
+            <a:endParaRPr lang="en-US" dirty="0"/>
+          </a:p>
+        </p:txBody>
+      </p:sp>
+      <p:sp>
+        <p:nvSpPr>
+          <p:cNvPr id="3" name="Text 1"/>
+          <p:cNvSpPr/>
+          <p:nvPr/>
+        </p:nvSpPr>
+        <p:spPr>
+          <a:xfrm>
+            <a:off x="406301" y="457051"/>
+            <a:ext cx="8498026" cy="274290"/>
+          </a:xfrm>
+          <a:prstGeom prst="rect">
+            <a:avLst/>
+          </a:prstGeom>
+          <a:noFill/>
+          <a:ln/>
+        </p:spPr>
+        <p:txBody>
+          <a:bodyPr wrap="square" lIns="0" tIns="0" rIns="0" bIns="0" rtlCol="0" anchor="t"/>
+          <a:lstStyle/>
+          <a:p>
+            <a:pPr algn="l" indent="0" marL="0">
+              <a:lnSpc>
+                <a:spcPts val="2160"/>
+              </a:lnSpc>
+              <a:spcBef>
+                <a:spcPts val="600"/>
+              </a:spcBef>
+              <a:spcAft>
+                <a:spcPts val="800"/>
+              </a:spcAft>
+              <a:buNone/>
+            </a:pPr>
+            <a:r>
+              <a:rPr lang="en-US" sz="1800" b="1" dirty="0">
+                <a:solidFill>
+                  <a:srgbClr val="FE4447"/>
+                </a:solidFill>
+                <a:latin typeface="Georgia" pitchFamily="34" charset="0"/>
+                <a:ea typeface="Georgia" pitchFamily="34" charset="-122"/>
+                <a:cs typeface="Georgia" pitchFamily="34" charset="-120"/>
+              </a:rPr>
+              <a:t>Teacher notes</a:t>
+            </a:r>
+            <a:endParaRPr lang="en-US" sz="1800" dirty="0"/>
+          </a:p>
+        </p:txBody>
+      </p:sp>
+      <p:sp>
+        <p:nvSpPr>
+          <p:cNvPr id="4" name="Text 2"/>
+          <p:cNvSpPr/>
+          <p:nvPr/>
+        </p:nvSpPr>
+        <p:spPr>
+          <a:xfrm>
+            <a:off x="634901" y="883593"/>
+            <a:ext cx="8102798" cy="1386483"/>
+          </a:xfrm>
+          <a:prstGeom prst="rect">
+            <a:avLst/>
+          </a:prstGeom>
+          <a:noFill/>
+          <a:ln/>
+        </p:spPr>
+        <p:txBody>
+          <a:bodyPr wrap="square" lIns="0" tIns="0" rIns="0" bIns="0" rtlCol="0" anchor="t"/>
+          <a:lstStyle/>
+          <a:p>
+            <a:pPr algn="l" marL="342900" indent="-342900">
+              <a:lnSpc>
+                <a:spcPts val="1620"/>
+              </a:lnSpc>
+              <a:spcAft>
+                <a:spcPts val="300"/>
+              </a:spcAft>
+              <a:buSzPct val="100000"/>
+              <a:buChar char="•"/>
+            </a:pPr>
+            <a:r>
+              <a:rPr lang="en-US" sz="1200" dirty="0">
+                <a:solidFill>
+                  <a:srgbClr val="1C2833"/>
+                </a:solidFill>
+                <a:latin typeface="Arial" pitchFamily="34" charset="0"/>
+                <a:ea typeface="Arial" pitchFamily="34" charset="-122"/>
+                <a:cs typeface="Arial" pitchFamily="34" charset="-120"/>
+              </a:rPr>
+              <a:t>This is a formative checkpoint disguised as an activity. By the end of today every student should be visibly ready to build. If not, that student gets a 10-minute one-on-one tomorrow before class.</a:t>
+            </a:r>
+            <a:endParaRPr lang="en-US" sz="1200" dirty="0"/>
+          </a:p>
+          <a:p>
+            <a:pPr algn="l" marL="342900" indent="-342900">
+              <a:lnSpc>
+                <a:spcPts val="1620"/>
+              </a:lnSpc>
+              <a:spcAft>
+                <a:spcPts val="300"/>
+              </a:spcAft>
+              <a:buSzPct val="100000"/>
+              <a:buChar char="•"/>
+            </a:pPr>
+            <a:r>
+              <a:rPr lang="en-US" sz="1200" dirty="0">
+                <a:solidFill>
+                  <a:srgbClr val="1C2833"/>
+                </a:solidFill>
+                <a:latin typeface="Arial" pitchFamily="34" charset="0"/>
+                <a:ea typeface="Arial" pitchFamily="34" charset="-122"/>
+                <a:cs typeface="Arial" pitchFamily="34" charset="-120"/>
+              </a:rPr>
+              <a:t>Listen at the doorway — you'll hear which pairs are doing the work and which are skating. Drop in on the skaters silently and ask one clarifying question.</a:t>
+            </a:r>
+            <a:endParaRPr lang="en-US" sz="1200" dirty="0"/>
+          </a:p>
+          <a:p>
+            <a:pPr algn="l" marL="342900" indent="-342900">
+              <a:lnSpc>
+                <a:spcPts val="1620"/>
+              </a:lnSpc>
+              <a:spcAft>
+                <a:spcPts val="300"/>
+              </a:spcAft>
+              <a:buSzPct val="100000"/>
+              <a:buChar char="•"/>
+            </a:pPr>
+            <a:r>
+              <a:rPr lang="en-US" sz="1200" dirty="0">
+                <a:solidFill>
+                  <a:srgbClr val="1C2833"/>
+                </a:solidFill>
+                <a:latin typeface="Arial" pitchFamily="34" charset="0"/>
+                <a:ea typeface="Arial" pitchFamily="34" charset="-122"/>
+                <a:cs typeface="Arial" pitchFamily="34" charset="-120"/>
+              </a:rPr>
+              <a:t>A critique that descends into mutual gushing is worthless. If you hear "your sketch is really nice" three times in a row, intervene and re-direct to specifics.</a:t>
+            </a:r>
+            <a:endParaRPr lang="en-US" sz="1200" dirty="0"/>
+          </a:p>
+        </p:txBody>
+      </p:sp>
+      <p:sp>
+        <p:nvSpPr>
+          <p:cNvPr id="5" name="Text 3"/>
+          <p:cNvSpPr/>
+          <p:nvPr/>
+        </p:nvSpPr>
+        <p:spPr>
+          <a:xfrm>
+            <a:off x="406301" y="4434929"/>
+            <a:ext cx="8498026" cy="213271"/>
+          </a:xfrm>
+          <a:prstGeom prst="rect">
+            <a:avLst/>
+          </a:prstGeom>
+          <a:noFill/>
+          <a:ln/>
+        </p:spPr>
+        <p:txBody>
+          <a:bodyPr wrap="square" lIns="0" tIns="0" rIns="0" bIns="0" rtlCol="0" anchor="t"/>
+          <a:lstStyle/>
+          <a:p>
+            <a:pPr algn="l" indent="0" marL="0">
+              <a:lnSpc>
+                <a:spcPts val="1680"/>
+              </a:lnSpc>
+              <a:spcBef>
+                <a:spcPts val="300"/>
+              </a:spcBef>
+              <a:spcAft>
+                <a:spcPts val="300"/>
+              </a:spcAft>
+              <a:buNone/>
+            </a:pPr>
+            <a:r>
+              <a:rPr lang="en-US" sz="1200" dirty="0">
+                <a:solidFill>
+                  <a:srgbClr val="1C2833"/>
+                </a:solidFill>
+                <a:latin typeface="Arial" pitchFamily="34" charset="0"/>
+                <a:ea typeface="Arial" pitchFamily="34" charset="-122"/>
+                <a:cs typeface="Arial" pitchFamily="34" charset="-120"/>
+              </a:rPr>
+              <a:t>Middle ·  · IKS Curriculum</a:t>
+            </a:r>
+            <a:endParaRPr lang="en-US" sz="1200" dirty="0"/>
+          </a:p>
+        </p:txBody>
+      </p:sp>
+    </p:spTree>
+  </p:cSld>
+  <p:clrMapOvr>
+    <a:masterClrMapping/>
+  </p:clrMapOvr>
+</p:sld>
+</file>
+
+<file path=ppt/slides/slide17.xml><?xml version="1.0" encoding="utf-8"?>
+<p:sld xmlns:a="http://schemas.openxmlformats.org/drawingml/2006/main" xmlns:r="http://schemas.openxmlformats.org/officeDocument/2006/relationships" xmlns:p="http://schemas.openxmlformats.org/presentationml/2006/main">
+  <p:cSld name="Slide 17">
+    <p:bg>
+      <p:bgPr>
+        <a:solidFill>
+          <a:srgbClr val="FFFFFF"/>
+        </a:solidFill>
+      </p:bgPr>
+    </p:bg>
+    <p:spTree>
+      <p:nvGrpSpPr>
+        <p:cNvPr id="1" name=""/>
+        <p:cNvGrpSpPr/>
+        <p:nvPr/>
+      </p:nvGrpSpPr>
+      <p:grpSpPr>
+        <a:xfrm>
+          <a:off x="0" y="0"/>
+          <a:ext cx="0" cy="0"/>
+          <a:chOff x="0" y="0"/>
+          <a:chExt cx="0" cy="0"/>
+        </a:xfrm>
+      </p:grpSpPr>
+      <p:sp>
+        <p:nvSpPr>
+          <p:cNvPr id="2" name="Text 0"/>
+          <p:cNvSpPr/>
+          <p:nvPr/>
+        </p:nvSpPr>
+        <p:spPr>
+          <a:xfrm>
+            <a:off x="0" y="0"/>
+            <a:ext cx="9144000" cy="101501"/>
+          </a:xfrm>
+          <a:prstGeom prst="rect">
+            <a:avLst/>
+          </a:prstGeom>
+          <a:solidFill>
+            <a:srgbClr val="277884"/>
+          </a:solidFill>
+          <a:ln/>
+        </p:spPr>
+        <p:txBody>
+          <a:bodyPr wrap="square" rtlCol="0" anchor="ctr"/>
+          <a:lstStyle/>
+          <a:p>
+            <a:pPr indent="0" marL="0">
+              <a:buNone/>
+            </a:pPr>
+            <a:endParaRPr lang="en-US" dirty="0"/>
+          </a:p>
+        </p:txBody>
+      </p:sp>
+      <p:sp>
+        <p:nvSpPr>
+          <p:cNvPr id="3" name="Text 1"/>
+          <p:cNvSpPr/>
+          <p:nvPr/>
+        </p:nvSpPr>
+        <p:spPr>
+          <a:xfrm>
+            <a:off x="406301" y="457051"/>
+            <a:ext cx="8498026" cy="274290"/>
+          </a:xfrm>
+          <a:prstGeom prst="rect">
+            <a:avLst/>
+          </a:prstGeom>
+          <a:noFill/>
+          <a:ln/>
+        </p:spPr>
+        <p:txBody>
+          <a:bodyPr wrap="square" lIns="0" tIns="0" rIns="0" bIns="0" rtlCol="0" anchor="t"/>
+          <a:lstStyle/>
+          <a:p>
+            <a:pPr algn="l" indent="0" marL="0">
+              <a:lnSpc>
+                <a:spcPts val="2160"/>
+              </a:lnSpc>
+              <a:spcBef>
+                <a:spcPts val="600"/>
+              </a:spcBef>
+              <a:spcAft>
+                <a:spcPts val="800"/>
+              </a:spcAft>
+              <a:buNone/>
+            </a:pPr>
+            <a:r>
+              <a:rPr lang="en-US" sz="1800" b="1" dirty="0">
+                <a:solidFill>
+                  <a:srgbClr val="FE4447"/>
+                </a:solidFill>
+                <a:latin typeface="Georgia" pitchFamily="34" charset="0"/>
+                <a:ea typeface="Georgia" pitchFamily="34" charset="-122"/>
+                <a:cs typeface="Georgia" pitchFamily="34" charset="-120"/>
+              </a:rPr>
+              <a:t>Teacher notes (cont.)</a:t>
+            </a:r>
+            <a:endParaRPr lang="en-US" sz="1800" dirty="0"/>
+          </a:p>
+        </p:txBody>
+      </p:sp>
+      <p:sp>
+        <p:nvSpPr>
+          <p:cNvPr id="4" name="Text 2"/>
+          <p:cNvSpPr/>
+          <p:nvPr/>
+        </p:nvSpPr>
+        <p:spPr>
+          <a:xfrm>
+            <a:off x="634901" y="883593"/>
+            <a:ext cx="8102798" cy="506611"/>
+          </a:xfrm>
+          <a:prstGeom prst="rect">
+            <a:avLst/>
+          </a:prstGeom>
+          <a:noFill/>
+          <a:ln/>
+        </p:spPr>
+        <p:txBody>
+          <a:bodyPr wrap="square" lIns="0" tIns="0" rIns="0" bIns="0" rtlCol="0" anchor="t"/>
+          <a:lstStyle/>
+          <a:p>
+            <a:pPr algn="l" marL="342900" indent="-342900">
+              <a:lnSpc>
+                <a:spcPts val="1620"/>
+              </a:lnSpc>
+              <a:spcAft>
+                <a:spcPts val="300"/>
+              </a:spcAft>
+              <a:buSzPct val="100000"/>
+              <a:buChar char="•"/>
+            </a:pPr>
+            <a:r>
+              <a:rPr lang="en-US" sz="1200" dirty="0">
+                <a:solidFill>
+                  <a:srgbClr val="1C2833"/>
+                </a:solidFill>
+                <a:latin typeface="Arial" pitchFamily="34" charset="0"/>
+                <a:ea typeface="Arial" pitchFamily="34" charset="-122"/>
+                <a:cs typeface="Arial" pitchFamily="34" charset="-120"/>
+              </a:rPr>
+              <a:t>After today, mark every student's plan + sources + sketch on the Day 5 formative quiz checklist (</a:t>
+            </a:r>
+            <a:pPr algn="l" indent="0" marL="0">
+              <a:lnSpc>
+                <a:spcPts val="1620"/>
+              </a:lnSpc>
+              <a:spcAft>
+                <a:spcPts val="300"/>
+              </a:spcAft>
+              <a:buNone/>
+            </a:pPr>
+            <a:r>
+              <a:rPr lang="en-US" sz="1200" dirty="0">
+                <a:solidFill>
+                  <a:srgbClr val="1C2833"/>
+                </a:solidFill>
+                <a:latin typeface="Arial" pitchFamily="34" charset="0"/>
+                <a:ea typeface="Arial" pitchFamily="34" charset="-122"/>
+                <a:cs typeface="Arial" pitchFamily="34" charset="-120"/>
+              </a:rPr>
+              <a:t>quizzes/formative.md</a:t>
+            </a:r>
+            <a:pPr algn="l" indent="0" marL="0">
+              <a:lnSpc>
+                <a:spcPts val="1620"/>
+              </a:lnSpc>
+              <a:spcAft>
+                <a:spcPts val="300"/>
+              </a:spcAft>
+              <a:buNone/>
+            </a:pPr>
+            <a:r>
+              <a:rPr lang="en-US" sz="1200" dirty="0">
+                <a:solidFill>
+                  <a:srgbClr val="1C2833"/>
+                </a:solidFill>
+                <a:latin typeface="Arial" pitchFamily="34" charset="0"/>
+                <a:ea typeface="Arial" pitchFamily="34" charset="-122"/>
+                <a:cs typeface="Arial" pitchFamily="34" charset="-120"/>
+              </a:rPr>
+              <a:t> Part A). This is your gate to allowing them into the build phase.</a:t>
+            </a:r>
+            <a:endParaRPr lang="en-US" sz="1200" dirty="0"/>
+          </a:p>
+        </p:txBody>
+      </p:sp>
+      <p:sp>
+        <p:nvSpPr>
+          <p:cNvPr id="5" name="Text 3"/>
+          <p:cNvSpPr/>
+          <p:nvPr/>
+        </p:nvSpPr>
+        <p:spPr>
+          <a:xfrm>
+            <a:off x="406301" y="4434929"/>
+            <a:ext cx="8498026" cy="213271"/>
+          </a:xfrm>
+          <a:prstGeom prst="rect">
+            <a:avLst/>
+          </a:prstGeom>
+          <a:noFill/>
+          <a:ln/>
+        </p:spPr>
+        <p:txBody>
+          <a:bodyPr wrap="square" lIns="0" tIns="0" rIns="0" bIns="0" rtlCol="0" anchor="t"/>
+          <a:lstStyle/>
+          <a:p>
+            <a:pPr algn="l" indent="0" marL="0">
+              <a:lnSpc>
+                <a:spcPts val="1680"/>
+              </a:lnSpc>
+              <a:spcBef>
+                <a:spcPts val="300"/>
+              </a:spcBef>
+              <a:spcAft>
+                <a:spcPts val="300"/>
+              </a:spcAft>
+              <a:buNone/>
+            </a:pPr>
+            <a:r>
+              <a:rPr lang="en-US" sz="1200" dirty="0">
+                <a:solidFill>
+                  <a:srgbClr val="1C2833"/>
+                </a:solidFill>
+                <a:latin typeface="Arial" pitchFamily="34" charset="0"/>
+                <a:ea typeface="Arial" pitchFamily="34" charset="-122"/>
+                <a:cs typeface="Arial" pitchFamily="34" charset="-120"/>
+              </a:rPr>
+              <a:t>Middle ·  · IKS Curriculum</a:t>
+            </a:r>
+            <a:endParaRPr lang="en-US" sz="1200" dirty="0"/>
+          </a:p>
+        </p:txBody>
+      </p:sp>
+    </p:spTree>
+  </p:cSld>
+  <p:clrMapOvr>
+    <a:masterClrMapping/>
+  </p:clrMapOvr>
+</p:sld>
+</file>
+
+<file path=ppt/slides/slide18.xml><?xml version="1.0" encoding="utf-8"?>
+<p:sld xmlns:a="http://schemas.openxmlformats.org/drawingml/2006/main" xmlns:r="http://schemas.openxmlformats.org/officeDocument/2006/relationships" xmlns:p="http://schemas.openxmlformats.org/presentationml/2006/main">
+  <p:cSld name="Slide 18">
+    <p:bg>
+      <p:bgPr>
+        <a:solidFill>
+          <a:srgbClr val="FFFFFF"/>
+        </a:solidFill>
+      </p:bgPr>
+    </p:bg>
+    <p:spTree>
+      <p:nvGrpSpPr>
+        <p:cNvPr id="1" name=""/>
+        <p:cNvGrpSpPr/>
+        <p:nvPr/>
+      </p:nvGrpSpPr>
+      <p:grpSpPr>
+        <a:xfrm>
+          <a:off x="0" y="0"/>
+          <a:ext cx="0" cy="0"/>
+          <a:chOff x="0" y="0"/>
+          <a:chExt cx="0" cy="0"/>
+        </a:xfrm>
+      </p:grpSpPr>
+      <p:sp>
+        <p:nvSpPr>
+          <p:cNvPr id="2" name="Text 0"/>
+          <p:cNvSpPr/>
+          <p:nvPr/>
+        </p:nvSpPr>
+        <p:spPr>
+          <a:xfrm>
+            <a:off x="0" y="0"/>
+            <a:ext cx="9144000" cy="101501"/>
+          </a:xfrm>
+          <a:prstGeom prst="rect">
+            <a:avLst/>
+          </a:prstGeom>
+          <a:solidFill>
+            <a:srgbClr val="277884"/>
+          </a:solidFill>
+          <a:ln/>
+        </p:spPr>
+        <p:txBody>
+          <a:bodyPr wrap="square" rtlCol="0" anchor="ctr"/>
+          <a:lstStyle/>
+          <a:p>
+            <a:pPr indent="0" marL="0">
+              <a:buNone/>
+            </a:pPr>
+            <a:endParaRPr lang="en-US" dirty="0"/>
+          </a:p>
+        </p:txBody>
+      </p:sp>
+      <p:sp>
+        <p:nvSpPr>
+          <p:cNvPr id="3" name="Text 1"/>
+          <p:cNvSpPr/>
+          <p:nvPr/>
+        </p:nvSpPr>
+        <p:spPr>
+          <a:xfrm>
+            <a:off x="406301" y="457051"/>
+            <a:ext cx="8498026" cy="274290"/>
+          </a:xfrm>
+          <a:prstGeom prst="rect">
+            <a:avLst/>
+          </a:prstGeom>
+          <a:noFill/>
+          <a:ln/>
+        </p:spPr>
+        <p:txBody>
+          <a:bodyPr wrap="square" lIns="0" tIns="0" rIns="0" bIns="0" rtlCol="0" anchor="t"/>
+          <a:lstStyle/>
+          <a:p>
+            <a:pPr algn="l" indent="0" marL="0">
+              <a:lnSpc>
+                <a:spcPts val="2160"/>
+              </a:lnSpc>
+              <a:spcBef>
+                <a:spcPts val="600"/>
+              </a:spcBef>
+              <a:spcAft>
+                <a:spcPts val="800"/>
+              </a:spcAft>
+              <a:buNone/>
+            </a:pPr>
+            <a:r>
+              <a:rPr lang="en-US" sz="1800" b="1" dirty="0">
+                <a:solidFill>
+                  <a:srgbClr val="FE4447"/>
+                </a:solidFill>
+                <a:latin typeface="Georgia" pitchFamily="34" charset="0"/>
+                <a:ea typeface="Georgia" pitchFamily="34" charset="-122"/>
+                <a:cs typeface="Georgia" pitchFamily="34" charset="-120"/>
+              </a:rPr>
+              <a:t>Citation(s) used in this lesson</a:t>
+            </a:r>
+            <a:endParaRPr lang="en-US" sz="1800" dirty="0"/>
+          </a:p>
+        </p:txBody>
+      </p:sp>
+      <p:sp>
+        <p:nvSpPr>
+          <p:cNvPr id="4" name="Text 2"/>
+          <p:cNvSpPr/>
+          <p:nvPr/>
+        </p:nvSpPr>
+        <p:spPr>
+          <a:xfrm>
+            <a:off x="634901" y="883593"/>
+            <a:ext cx="8102798" cy="487561"/>
+          </a:xfrm>
+          <a:prstGeom prst="rect">
+            <a:avLst/>
+          </a:prstGeom>
+          <a:noFill/>
+          <a:ln/>
+        </p:spPr>
+        <p:txBody>
+          <a:bodyPr wrap="square" lIns="0" tIns="0" rIns="0" bIns="0" rtlCol="0" anchor="t"/>
+          <a:lstStyle/>
+          <a:p>
+            <a:pPr algn="l" marL="342900" indent="-342900">
+              <a:lnSpc>
+                <a:spcPts val="1620"/>
+              </a:lnSpc>
+              <a:spcAft>
+                <a:spcPts val="300"/>
+              </a:spcAft>
+              <a:buSzPct val="100000"/>
+              <a:buChar char="•"/>
+            </a:pPr>
+            <a:r>
+              <a:rPr lang="en-US" sz="1200" dirty="0">
+                <a:solidFill>
+                  <a:srgbClr val="1C2833"/>
+                </a:solidFill>
+                <a:latin typeface="Arial" pitchFamily="34" charset="0"/>
+                <a:ea typeface="Arial" pitchFamily="34" charset="-122"/>
+                <a:cs typeface="Arial" pitchFamily="34" charset="-120"/>
+              </a:rPr>
+              <a:t>No new scripture citation today; the term </a:t>
+            </a:r>
+            <a:pPr algn="l" indent="0" marL="0">
+              <a:lnSpc>
+                <a:spcPts val="1620"/>
+              </a:lnSpc>
+              <a:spcAft>
+                <a:spcPts val="300"/>
+              </a:spcAft>
+              <a:buNone/>
+            </a:pPr>
+            <a:r>
+              <a:rPr lang="en-US" sz="1200" i="1" dirty="0">
+                <a:solidFill>
+                  <a:srgbClr val="1C2833"/>
+                </a:solidFill>
+                <a:latin typeface="Arial" pitchFamily="34" charset="0"/>
+                <a:ea typeface="Arial" pitchFamily="34" charset="-122"/>
+                <a:cs typeface="Arial" pitchFamily="34" charset="-120"/>
+              </a:rPr>
               <a:t>vicāra</a:t>
             </a:r>
             <a:pPr algn="l" indent="0" marL="0">
               <a:lnSpc>
-                <a:spcPts val="1680"/>
-              </a:lnSpc>
-              <a:spcBef>
-                <a:spcPts val="300"/>
-              </a:spcBef>
+                <a:spcPts val="1620"/>
+              </a:lnSpc>
+              <a:spcAft>
+                <a:spcPts val="300"/>
+              </a:spcAft>
+              <a:buNone/>
+            </a:pPr>
+            <a:r>
+              <a:rPr lang="en-US" sz="1200" dirty="0">
+                <a:solidFill>
+                  <a:srgbClr val="1C2833"/>
+                </a:solidFill>
+                <a:latin typeface="Arial" pitchFamily="34" charset="0"/>
+                <a:ea typeface="Arial" pitchFamily="34" charset="-122"/>
+                <a:cs typeface="Arial" pitchFamily="34" charset="-120"/>
+              </a:rPr>
+              <a:t> (inquiry, reflection) from Day 1 returns implicitly — critique is collective </a:t>
+            </a:r>
+            <a:pPr algn="l" indent="0" marL="0">
+              <a:lnSpc>
+                <a:spcPts val="1620"/>
+              </a:lnSpc>
+              <a:spcAft>
+                <a:spcPts val="300"/>
+              </a:spcAft>
+              <a:buNone/>
+            </a:pPr>
+            <a:r>
+              <a:rPr lang="en-US" sz="1200" i="1" dirty="0">
+                <a:solidFill>
+                  <a:srgbClr val="1C2833"/>
+                </a:solidFill>
+                <a:latin typeface="Arial" pitchFamily="34" charset="0"/>
+                <a:ea typeface="Arial" pitchFamily="34" charset="-122"/>
+                <a:cs typeface="Arial" pitchFamily="34" charset="-120"/>
+              </a:rPr>
+              <a:t>vicāra</a:t>
+            </a:r>
+            <a:pPr algn="l" indent="0" marL="0">
+              <a:lnSpc>
+                <a:spcPts val="1620"/>
+              </a:lnSpc>
               <a:spcAft>
                 <a:spcPts val="300"/>
               </a:spcAft>
@@ -3198,7 +6815,7 @@
                 <a:ea typeface="Georgia" pitchFamily="34" charset="-122"/>
                 <a:cs typeface="Georgia" pitchFamily="34" charset="-120"/>
               </a:rPr>
-              <a:t>Materials</a:t>
+              <a:t>Learning objective</a:t>
             </a:r>
             <a:endParaRPr lang="en-US" sz="1800" dirty="0"/>
           </a:p>
@@ -3246,53 +6863,7 @@
                 <a:ea typeface="Arial" pitchFamily="34" charset="-122"/>
                 <a:cs typeface="Arial" pitchFamily="34" charset="-120"/>
               </a:rPr>
-              <a:t>– Each student brings: their plan, citation slips, and sketch – Printed </a:t>
-            </a:r>
-            <a:pPr algn="l" indent="0" marL="0">
-              <a:lnSpc>
-                <a:spcPts val="1680"/>
-              </a:lnSpc>
-              <a:spcBef>
-                <a:spcPts val="300"/>
-              </a:spcBef>
-              <a:spcAft>
-                <a:spcPts val="300"/>
-              </a:spcAft>
-              <a:buNone/>
-            </a:pPr>
-            <a:r>
-              <a:rPr lang="en-US" sz="1200" b="1" dirty="0">
-                <a:solidFill>
-                  <a:srgbClr val="1C2833"/>
-                </a:solidFill>
-                <a:latin typeface="Arial" pitchFamily="34" charset="0"/>
-                <a:ea typeface="Arial" pitchFamily="34" charset="-122"/>
-                <a:cs typeface="Arial" pitchFamily="34" charset="-120"/>
-              </a:rPr>
-              <a:t>Critique Protocol Sheet</a:t>
-            </a:r>
-            <a:pPr algn="l" indent="0" marL="0">
-              <a:lnSpc>
-                <a:spcPts val="1680"/>
-              </a:lnSpc>
-              <a:spcBef>
-                <a:spcPts val="300"/>
-              </a:spcBef>
-              <a:spcAft>
-                <a:spcPts val="300"/>
-              </a:spcAft>
-              <a:buNone/>
-            </a:pPr>
-            <a:r>
-              <a:rPr lang="en-US" sz="1200" dirty="0">
-                <a:solidFill>
-                  <a:srgbClr val="1C2833"/>
-                </a:solidFill>
-                <a:latin typeface="Arial" pitchFamily="34" charset="0"/>
-                <a:ea typeface="Arial" pitchFamily="34" charset="-122"/>
-                <a:cs typeface="Arial" pitchFamily="34" charset="-120"/>
-              </a:rPr>
-              <a:t> (see template below), 2 per student – Notebook / project journal – Sticky notes</a:t>
+              <a:t>By the end of this lesson, students will have given and received structured peer feedback on their project plan, sources, and first sketch — and will leave with a written list of at least three changes they'll make over Days 6–7.</a:t>
             </a:r>
             <a:endParaRPr lang="en-US" sz="1200" dirty="0"/>
           </a:p>
@@ -3450,7 +7021,7 @@
                 <a:ea typeface="Georgia" pitchFamily="34" charset="-122"/>
                 <a:cs typeface="Georgia" pitchFamily="34" charset="-120"/>
               </a:rPr>
-              <a:t>Lesson flow</a:t>
+              <a:t>Materials</a:t>
             </a:r>
             <a:endParaRPr lang="en-US" sz="1800" dirty="0"/>
           </a:p>
@@ -3459,6 +7030,164 @@
       <p:sp>
         <p:nvSpPr>
           <p:cNvPr id="4" name="Text 2"/>
+          <p:cNvSpPr/>
+          <p:nvPr/>
+        </p:nvSpPr>
+        <p:spPr>
+          <a:xfrm>
+            <a:off x="634901" y="883593"/>
+            <a:ext cx="8102798" cy="1013222"/>
+          </a:xfrm>
+          <a:prstGeom prst="rect">
+            <a:avLst/>
+          </a:prstGeom>
+          <a:noFill/>
+          <a:ln/>
+        </p:spPr>
+        <p:txBody>
+          <a:bodyPr wrap="square" lIns="0" tIns="0" rIns="0" bIns="0" rtlCol="0" anchor="t"/>
+          <a:lstStyle/>
+          <a:p>
+            <a:pPr algn="l" marL="342900" indent="-342900">
+              <a:lnSpc>
+                <a:spcPts val="1620"/>
+              </a:lnSpc>
+              <a:spcAft>
+                <a:spcPts val="300"/>
+              </a:spcAft>
+              <a:buSzPct val="100000"/>
+              <a:buChar char="•"/>
+            </a:pPr>
+            <a:r>
+              <a:rPr lang="en-US" sz="1200" dirty="0">
+                <a:solidFill>
+                  <a:srgbClr val="1C2833"/>
+                </a:solidFill>
+                <a:latin typeface="Arial" pitchFamily="34" charset="0"/>
+                <a:ea typeface="Arial" pitchFamily="34" charset="-122"/>
+                <a:cs typeface="Arial" pitchFamily="34" charset="-120"/>
+              </a:rPr>
+              <a:t>Each student brings: their plan, citation slips, and sketch</a:t>
+            </a:r>
+            <a:endParaRPr lang="en-US" sz="1200" dirty="0"/>
+          </a:p>
+          <a:p>
+            <a:pPr algn="l" marL="342900" indent="-342900">
+              <a:lnSpc>
+                <a:spcPts val="1620"/>
+              </a:lnSpc>
+              <a:spcAft>
+                <a:spcPts val="300"/>
+              </a:spcAft>
+              <a:buSzPct val="100000"/>
+              <a:buChar char="•"/>
+            </a:pPr>
+            <a:r>
+              <a:rPr lang="en-US" sz="1200" dirty="0">
+                <a:solidFill>
+                  <a:srgbClr val="1C2833"/>
+                </a:solidFill>
+                <a:latin typeface="Arial" pitchFamily="34" charset="0"/>
+                <a:ea typeface="Arial" pitchFamily="34" charset="-122"/>
+                <a:cs typeface="Arial" pitchFamily="34" charset="-120"/>
+              </a:rPr>
+              <a:t>Printed </a:t>
+            </a:r>
+            <a:pPr algn="l" indent="0" marL="0">
+              <a:lnSpc>
+                <a:spcPts val="1620"/>
+              </a:lnSpc>
+              <a:spcAft>
+                <a:spcPts val="300"/>
+              </a:spcAft>
+              <a:buNone/>
+            </a:pPr>
+            <a:r>
+              <a:rPr lang="en-US" sz="1200" b="1" dirty="0">
+                <a:solidFill>
+                  <a:srgbClr val="1C2833"/>
+                </a:solidFill>
+                <a:latin typeface="Arial" pitchFamily="34" charset="0"/>
+                <a:ea typeface="Arial" pitchFamily="34" charset="-122"/>
+                <a:cs typeface="Arial" pitchFamily="34" charset="-120"/>
+              </a:rPr>
+              <a:t>Critique Protocol Sheet</a:t>
+            </a:r>
+            <a:pPr algn="l" indent="0" marL="0">
+              <a:lnSpc>
+                <a:spcPts val="1620"/>
+              </a:lnSpc>
+              <a:spcAft>
+                <a:spcPts val="300"/>
+              </a:spcAft>
+              <a:buNone/>
+            </a:pPr>
+            <a:r>
+              <a:rPr lang="en-US" sz="1200" dirty="0">
+                <a:solidFill>
+                  <a:srgbClr val="1C2833"/>
+                </a:solidFill>
+                <a:latin typeface="Arial" pitchFamily="34" charset="0"/>
+                <a:ea typeface="Arial" pitchFamily="34" charset="-122"/>
+                <a:cs typeface="Arial" pitchFamily="34" charset="-120"/>
+              </a:rPr>
+              <a:t> (see template below), 2 per student</a:t>
+            </a:r>
+            <a:endParaRPr lang="en-US" sz="1200" dirty="0"/>
+          </a:p>
+          <a:p>
+            <a:pPr algn="l" marL="342900" indent="-342900">
+              <a:lnSpc>
+                <a:spcPts val="1620"/>
+              </a:lnSpc>
+              <a:spcAft>
+                <a:spcPts val="300"/>
+              </a:spcAft>
+              <a:buSzPct val="100000"/>
+              <a:buChar char="•"/>
+            </a:pPr>
+            <a:r>
+              <a:rPr lang="en-US" sz="1200" dirty="0">
+                <a:solidFill>
+                  <a:srgbClr val="1C2833"/>
+                </a:solidFill>
+                <a:latin typeface="Arial" pitchFamily="34" charset="0"/>
+                <a:ea typeface="Arial" pitchFamily="34" charset="-122"/>
+                <a:cs typeface="Arial" pitchFamily="34" charset="-120"/>
+              </a:rPr>
+              <a:t>Notebook / project journal</a:t>
+            </a:r>
+            <a:endParaRPr lang="en-US" sz="1200" dirty="0"/>
+          </a:p>
+          <a:p>
+            <a:pPr algn="l" marL="342900" indent="-342900">
+              <a:lnSpc>
+                <a:spcPts val="1620"/>
+              </a:lnSpc>
+              <a:spcAft>
+                <a:spcPts val="300"/>
+              </a:spcAft>
+              <a:buSzPct val="100000"/>
+              <a:buChar char="•"/>
+            </a:pPr>
+            <a:r>
+              <a:rPr lang="en-US" sz="1200" dirty="0">
+                <a:solidFill>
+                  <a:srgbClr val="1C2833"/>
+                </a:solidFill>
+                <a:latin typeface="Arial" pitchFamily="34" charset="0"/>
+                <a:ea typeface="Arial" pitchFamily="34" charset="-122"/>
+                <a:cs typeface="Arial" pitchFamily="34" charset="-120"/>
+              </a:rPr>
+              <a:t>Sticky notes</a:t>
+            </a:r>
+            <a:endParaRPr lang="en-US" sz="1200" dirty="0"/>
+          </a:p>
+        </p:txBody>
+      </p:sp>
+      <p:sp>
+        <p:nvSpPr>
+          <p:cNvPr id="5" name="Text 3"/>
           <p:cNvSpPr/>
           <p:nvPr/>
         </p:nvSpPr>
@@ -3608,7 +7337,7 @@
                 <a:ea typeface="Georgia" pitchFamily="34" charset="-122"/>
                 <a:cs typeface="Georgia" pitchFamily="34" charset="-120"/>
               </a:rPr>
-              <a:t>Warm-up (5 min)</a:t>
+              <a:t>Lesson flow</a:t>
             </a:r>
             <a:endParaRPr lang="en-US" sz="1800" dirty="0"/>
           </a:p>
@@ -3617,123 +7346,6 @@
       <p:sp>
         <p:nvSpPr>
           <p:cNvPr id="4" name="Text 2"/>
-          <p:cNvSpPr/>
-          <p:nvPr/>
-        </p:nvSpPr>
-        <p:spPr>
-          <a:xfrm>
-            <a:off x="406301" y="870942"/>
-            <a:ext cx="8498026" cy="426541"/>
-          </a:xfrm>
-          <a:prstGeom prst="rect">
-            <a:avLst/>
-          </a:prstGeom>
-          <a:noFill/>
-          <a:ln/>
-        </p:spPr>
-        <p:txBody>
-          <a:bodyPr wrap="square" lIns="0" tIns="0" rIns="0" bIns="0" rtlCol="0" anchor="t"/>
-          <a:lstStyle/>
-          <a:p>
-            <a:pPr algn="l" indent="0" marL="0">
-              <a:lnSpc>
-                <a:spcPts val="1680"/>
-              </a:lnSpc>
-              <a:spcBef>
-                <a:spcPts val="300"/>
-              </a:spcBef>
-              <a:spcAft>
-                <a:spcPts val="300"/>
-              </a:spcAft>
-              <a:buNone/>
-            </a:pPr>
-            <a:r>
-              <a:rPr lang="en-US" sz="1200" dirty="0">
-                <a:solidFill>
-                  <a:srgbClr val="1C2833"/>
-                </a:solidFill>
-                <a:latin typeface="Arial" pitchFamily="34" charset="0"/>
-                <a:ea typeface="Arial" pitchFamily="34" charset="-122"/>
-                <a:cs typeface="Arial" pitchFamily="34" charset="-120"/>
-              </a:rPr>
-              <a:t>– Daily prompt: </a:t>
-            </a:r>
-            <a:pPr algn="l" indent="0" marL="0">
-              <a:lnSpc>
-                <a:spcPts val="1680"/>
-              </a:lnSpc>
-              <a:spcBef>
-                <a:spcPts val="300"/>
-              </a:spcBef>
-              <a:spcAft>
-                <a:spcPts val="300"/>
-              </a:spcAft>
-              <a:buNone/>
-            </a:pPr>
-            <a:r>
-              <a:rPr lang="en-US" sz="1200" i="1" dirty="0">
-                <a:solidFill>
-                  <a:srgbClr val="1C2833"/>
-                </a:solidFill>
-                <a:latin typeface="Arial" pitchFamily="34" charset="0"/>
-                <a:ea typeface="Arial" pitchFamily="34" charset="-122"/>
-                <a:cs typeface="Arial" pitchFamily="34" charset="-120"/>
-              </a:rPr>
-              <a:t>"Yesterday's pair-share comment from your partner — what did they say? Did you agree?"</a:t>
-            </a:r>
-            <a:pPr algn="l" indent="0" marL="0">
-              <a:lnSpc>
-                <a:spcPts val="1680"/>
-              </a:lnSpc>
-              <a:spcBef>
-                <a:spcPts val="300"/>
-              </a:spcBef>
-              <a:spcAft>
-                <a:spcPts val="300"/>
-              </a:spcAft>
-              <a:buNone/>
-            </a:pPr>
-            <a:r>
-              <a:rPr lang="en-US" sz="1200" dirty="0">
-                <a:solidFill>
-                  <a:srgbClr val="1C2833"/>
-                </a:solidFill>
-                <a:latin typeface="Arial" pitchFamily="34" charset="0"/>
-                <a:ea typeface="Arial" pitchFamily="34" charset="-122"/>
-                <a:cs typeface="Arial" pitchFamily="34" charset="-120"/>
-              </a:rPr>
-              <a:t> — 3 students share. – The reframe: </a:t>
-            </a:r>
-            <a:pPr algn="l" indent="0" marL="0">
-              <a:lnSpc>
-                <a:spcPts val="1680"/>
-              </a:lnSpc>
-              <a:spcBef>
-                <a:spcPts val="300"/>
-              </a:spcBef>
-              <a:spcAft>
-                <a:spcPts val="300"/>
-              </a:spcAft>
-              <a:buNone/>
-            </a:pPr>
-            <a:r>
-              <a:rPr lang="en-US" sz="1200" i="1" dirty="0">
-                <a:solidFill>
-                  <a:srgbClr val="1C2833"/>
-                </a:solidFill>
-                <a:latin typeface="Arial" pitchFamily="34" charset="0"/>
-                <a:ea typeface="Arial" pitchFamily="34" charset="-122"/>
-                <a:cs typeface="Arial" pitchFamily="34" charset="-120"/>
-              </a:rPr>
-              <a:t>"Critique is a gift, not an attack. The right response is 'thank you' and a question. Not defence."</a:t>
-            </a:r>
-            <a:endParaRPr lang="en-US" sz="1200" dirty="0"/>
-          </a:p>
-        </p:txBody>
-      </p:sp>
-      <p:sp>
-        <p:nvSpPr>
-          <p:cNvPr id="5" name="Text 3"/>
           <p:cNvSpPr/>
           <p:nvPr/>
         </p:nvSpPr>
@@ -3883,7 +7495,7 @@
                 <a:ea typeface="Georgia" pitchFamily="34" charset="-122"/>
                 <a:cs typeface="Georgia" pitchFamily="34" charset="-120"/>
               </a:rPr>
-              <a:t>Activity (25 min) — Run the protocol</a:t>
+              <a:t>Warm-up (5 min)</a:t>
             </a:r>
             <a:endParaRPr lang="en-US" sz="1800" dirty="0"/>
           </a:p>
@@ -3897,8 +7509,8 @@
         </p:nvSpPr>
         <p:spPr>
           <a:xfrm>
-            <a:off x="406301" y="870942"/>
-            <a:ext cx="8498026" cy="649337"/>
+            <a:off x="634901" y="883593"/>
+            <a:ext cx="8102798" cy="731341"/>
           </a:xfrm>
           <a:prstGeom prst="rect">
             <a:avLst/>
@@ -3910,17 +7522,15 @@
           <a:bodyPr wrap="square" lIns="0" tIns="0" rIns="0" bIns="0" rtlCol="0" anchor="t"/>
           <a:lstStyle/>
           <a:p>
-            <a:pPr algn="l" indent="0" marL="0">
-              <a:lnSpc>
-                <a:spcPts val="1680"/>
-              </a:lnSpc>
-              <a:spcBef>
-                <a:spcPts val="300"/>
-              </a:spcBef>
-              <a:spcAft>
-                <a:spcPts val="300"/>
-              </a:spcAft>
-              <a:buNone/>
+            <a:pPr algn="l" marL="342900" indent="-342900">
+              <a:lnSpc>
+                <a:spcPts val="1620"/>
+              </a:lnSpc>
+              <a:spcAft>
+                <a:spcPts val="300"/>
+              </a:spcAft>
+              <a:buSzPct val="100000"/>
+              <a:buChar char="•"/>
             </a:pPr>
             <a:r>
               <a:rPr lang="en-US" sz="1200" dirty="0">
@@ -3931,22 +7541,19 @@
                 <a:ea typeface="Arial" pitchFamily="34" charset="-122"/>
                 <a:cs typeface="Arial" pitchFamily="34" charset="-120"/>
               </a:rPr>
-              <a:t>See </a:t>
-            </a:r>
-            <a:pPr algn="l" indent="0" marL="0">
-              <a:lnSpc>
-                <a:spcPts val="1680"/>
-              </a:lnSpc>
-              <a:spcBef>
-                <a:spcPts val="300"/>
-              </a:spcBef>
-              <a:spcAft>
-                <a:spcPts val="300"/>
-              </a:spcAft>
-              <a:buNone/>
-            </a:pPr>
-            <a:r>
-              <a:rPr lang="en-US" sz="1200" dirty="0">
+              <a:t>Daily prompt: </a:t>
+            </a:r>
+            <a:pPr algn="l" indent="0" marL="0">
+              <a:lnSpc>
+                <a:spcPts val="1620"/>
+              </a:lnSpc>
+              <a:spcAft>
+                <a:spcPts val="300"/>
+              </a:spcAft>
+              <a:buNone/>
+            </a:pPr>
+            <a:r>
+              <a:rPr lang="en-US" sz="1200" i="1" dirty="0">
                 <a:solidFill>
                   <a:srgbClr val="1C2833"/>
                 </a:solidFill>
@@ -3954,15 +7561,12 @@
                 <a:ea typeface="Arial" pitchFamily="34" charset="-122"/>
                 <a:cs typeface="Arial" pitchFamily="34" charset="-120"/>
               </a:rPr>
-              <a:t>activities/activity-02-paired-critique.md</a:t>
-            </a:r>
-            <a:pPr algn="l" indent="0" marL="0">
-              <a:lnSpc>
-                <a:spcPts val="1680"/>
-              </a:lnSpc>
-              <a:spcBef>
-                <a:spcPts val="300"/>
-              </a:spcBef>
+              <a:t>"Yesterday's pair-share comment from your partner — what did they say? Did you agree?"</a:t>
+            </a:r>
+            <a:pPr algn="l" indent="0" marL="0">
+              <a:lnSpc>
+                <a:spcPts val="1620"/>
+              </a:lnSpc>
               <a:spcAft>
                 <a:spcPts val="300"/>
               </a:spcAft>
@@ -3977,44 +7581,20 @@
                 <a:ea typeface="Arial" pitchFamily="34" charset="-122"/>
                 <a:cs typeface="Arial" pitchFamily="34" charset="-120"/>
               </a:rPr>
-              <a:t> for the full activity and forms. Pairs are pre-assigned (teacher decides last night based on project-type variety — pair a herb-deck student with a sustainability-audit student, not two herb-deck students).</a:t>
+              <a:t> — 3 students share.</a:t>
             </a:r>
             <a:endParaRPr lang="en-US" sz="1200" dirty="0"/>
           </a:p>
-        </p:txBody>
-      </p:sp>
-      <p:sp>
-        <p:nvSpPr>
-          <p:cNvPr id="5" name="Text 3"/>
-          <p:cNvSpPr/>
-          <p:nvPr/>
-        </p:nvSpPr>
-        <p:spPr>
-          <a:xfrm>
-            <a:off x="406301" y="1596479"/>
-            <a:ext cx="8498026" cy="426541"/>
-          </a:xfrm>
-          <a:prstGeom prst="rect">
-            <a:avLst/>
-          </a:prstGeom>
-          <a:noFill/>
-          <a:ln/>
-        </p:spPr>
-        <p:txBody>
-          <a:bodyPr wrap="square" lIns="0" tIns="0" rIns="0" bIns="0" rtlCol="0" anchor="t"/>
-          <a:lstStyle/>
-          <a:p>
-            <a:pPr algn="l" indent="0" marL="0">
-              <a:lnSpc>
-                <a:spcPts val="1680"/>
-              </a:lnSpc>
-              <a:spcBef>
-                <a:spcPts val="300"/>
-              </a:spcBef>
-              <a:spcAft>
-                <a:spcPts val="300"/>
-              </a:spcAft>
-              <a:buNone/>
+          <a:p>
+            <a:pPr algn="l" marL="342900" indent="-342900">
+              <a:lnSpc>
+                <a:spcPts val="1620"/>
+              </a:lnSpc>
+              <a:spcAft>
+                <a:spcPts val="300"/>
+              </a:spcAft>
+              <a:buSzPct val="100000"/>
+              <a:buChar char="•"/>
             </a:pPr>
             <a:r>
               <a:rPr lang="en-US" sz="1200" dirty="0">
@@ -4025,15 +7605,12 @@
                 <a:ea typeface="Arial" pitchFamily="34" charset="-122"/>
                 <a:cs typeface="Arial" pitchFamily="34" charset="-120"/>
               </a:rPr>
-              <a:t>After both directions, the pair takes 3 minutes for a quick joint reflection: </a:t>
-            </a:r>
-            <a:pPr algn="l" indent="0" marL="0">
-              <a:lnSpc>
-                <a:spcPts val="1680"/>
-              </a:lnSpc>
-              <a:spcBef>
-                <a:spcPts val="300"/>
-              </a:spcBef>
+              <a:t>The reframe: </a:t>
+            </a:r>
+            <a:pPr algn="l" indent="0" marL="0">
+              <a:lnSpc>
+                <a:spcPts val="1620"/>
+              </a:lnSpc>
               <a:spcAft>
                 <a:spcPts val="300"/>
               </a:spcAft>
@@ -4048,7 +7625,7 @@
                 <a:ea typeface="Arial" pitchFamily="34" charset="-122"/>
                 <a:cs typeface="Arial" pitchFamily="34" charset="-120"/>
               </a:rPr>
-              <a:t>"What's one thing both our projects could use more of?"</a:t>
+              <a:t>"Critique is a gift, not an attack. The right response is 'thank you' and a question. Not defence."</a:t>
             </a:r>
             <a:endParaRPr lang="en-US" sz="1200" dirty="0"/>
           </a:p>
@@ -4056,7 +7633,7 @@
       </p:sp>
       <p:sp>
         <p:nvSpPr>
-          <p:cNvPr id="6" name="Text 4"/>
+          <p:cNvPr id="5" name="Text 3"/>
           <p:cNvSpPr/>
           <p:nvPr/>
         </p:nvSpPr>
@@ -4206,7 +7783,7 @@
                 <a:ea typeface="Georgia" pitchFamily="34" charset="-122"/>
                 <a:cs typeface="Georgia" pitchFamily="34" charset="-120"/>
               </a:rPr>
-              <a:t>Wrap-up (5 min)</a:t>
+              <a:t>Core (10 min)</a:t>
             </a:r>
             <a:endParaRPr lang="en-US" sz="1800" dirty="0"/>
           </a:p>
@@ -4252,7 +7829,7 @@
                 <a:ea typeface="Arial" pitchFamily="34" charset="-122"/>
                 <a:cs typeface="Arial" pitchFamily="34" charset="-120"/>
               </a:rPr>
-              <a:t>Pin the critique sheet</a:t>
+              <a:t>Three critique rules</a:t>
             </a:r>
             <a:pPr algn="l" indent="0" marL="0">
               <a:lnSpc>
@@ -4272,7 +7849,7 @@
                 <a:ea typeface="Arial" pitchFamily="34" charset="-122"/>
                 <a:cs typeface="Arial" pitchFamily="34" charset="-120"/>
               </a:rPr>
-              <a:t> into the project journal — it's part of the documentation evidence.</a:t>
+              <a:t> (3 min). Write on the board:</a:t>
             </a:r>
             <a:endParaRPr lang="en-US" sz="1200" dirty="0"/>
           </a:p>
@@ -4286,8 +7863,8 @@
         </p:nvSpPr>
         <p:spPr>
           <a:xfrm>
-            <a:off x="406301" y="1254323"/>
-            <a:ext cx="8498026" cy="426541"/>
+            <a:off x="634901" y="1266974"/>
+            <a:ext cx="8102798" cy="975122"/>
           </a:xfrm>
           <a:prstGeom prst="rect">
             <a:avLst/>
@@ -4299,20 +7876,18 @@
           <a:bodyPr wrap="square" lIns="0" tIns="0" rIns="0" bIns="0" rtlCol="0" anchor="t"/>
           <a:lstStyle/>
           <a:p>
-            <a:pPr algn="l" indent="0" marL="0">
-              <a:lnSpc>
-                <a:spcPts val="1680"/>
-              </a:lnSpc>
-              <a:spcBef>
-                <a:spcPts val="300"/>
-              </a:spcBef>
-              <a:spcAft>
-                <a:spcPts val="300"/>
-              </a:spcAft>
-              <a:buNone/>
-            </a:pPr>
-            <a:r>
-              <a:rPr lang="en-US" sz="1200" dirty="0">
+            <a:pPr algn="l" marL="342900" indent="-342900">
+              <a:lnSpc>
+                <a:spcPts val="1620"/>
+              </a:lnSpc>
+              <a:spcAft>
+                <a:spcPts val="300"/>
+              </a:spcAft>
+              <a:buSzPct val="100000"/>
+              <a:buChar char="•"/>
+            </a:pPr>
+            <a:r>
+              <a:rPr lang="en-US" sz="1200" b="1" dirty="0">
                 <a:solidFill>
                   <a:srgbClr val="1C2833"/>
                 </a:solidFill>
@@ -4320,22 +7895,19 @@
                 <a:ea typeface="Arial" pitchFamily="34" charset="-122"/>
                 <a:cs typeface="Arial" pitchFamily="34" charset="-120"/>
               </a:rPr>
-              <a:t>– Each student writes a three-item </a:t>
-            </a:r>
-            <a:pPr algn="l" indent="0" marL="0">
-              <a:lnSpc>
-                <a:spcPts val="1680"/>
-              </a:lnSpc>
-              <a:spcBef>
-                <a:spcPts val="300"/>
-              </a:spcBef>
-              <a:spcAft>
-                <a:spcPts val="300"/>
-              </a:spcAft>
-              <a:buNone/>
-            </a:pPr>
-            <a:r>
-              <a:rPr lang="en-US" sz="1200" b="1" dirty="0">
+              <a:t>Be kind.</a:t>
+            </a:r>
+            <a:pPr algn="l" indent="0" marL="0">
+              <a:lnSpc>
+                <a:spcPts val="1620"/>
+              </a:lnSpc>
+              <a:spcAft>
+                <a:spcPts val="300"/>
+              </a:spcAft>
+              <a:buNone/>
+            </a:pPr>
+            <a:r>
+              <a:rPr lang="en-US" sz="1200" dirty="0">
                 <a:solidFill>
                   <a:srgbClr val="1C2833"/>
                 </a:solidFill>
@@ -4343,22 +7915,23 @@
                 <a:ea typeface="Arial" pitchFamily="34" charset="-122"/>
                 <a:cs typeface="Arial" pitchFamily="34" charset="-120"/>
               </a:rPr>
-              <a:t>change list</a:t>
-            </a:r>
-            <a:pPr algn="l" indent="0" marL="0">
-              <a:lnSpc>
-                <a:spcPts val="1680"/>
-              </a:lnSpc>
-              <a:spcBef>
-                <a:spcPts val="300"/>
-              </a:spcBef>
-              <a:spcAft>
-                <a:spcPts val="300"/>
-              </a:spcAft>
-              <a:buNone/>
-            </a:pPr>
-            <a:r>
-              <a:rPr lang="en-US" sz="1200" dirty="0">
+              <a:t> The other person worked hard. Open with what you noticed and admired.</a:t>
+            </a:r>
+            <a:endParaRPr lang="en-US" sz="1200" dirty="0"/>
+          </a:p>
+          <a:p>
+            <a:pPr algn="l" marL="342900" indent="-342900">
+              <a:lnSpc>
+                <a:spcPts val="1620"/>
+              </a:lnSpc>
+              <a:spcAft>
+                <a:spcPts val="300"/>
+              </a:spcAft>
+              <a:buSzPct val="100000"/>
+              <a:buChar char="•"/>
+            </a:pPr>
+            <a:r>
+              <a:rPr lang="en-US" sz="1200" b="1" dirty="0">
                 <a:solidFill>
                   <a:srgbClr val="1C2833"/>
                 </a:solidFill>
@@ -4366,22 +7939,19 @@
                 <a:ea typeface="Arial" pitchFamily="34" charset="-122"/>
                 <a:cs typeface="Arial" pitchFamily="34" charset="-120"/>
               </a:rPr>
-              <a:t> in the journal: &gt; "Based on today's critique I will: &gt; 1. ___ &gt; 2. ___ &gt; 3. ___" – Preview: </a:t>
-            </a:r>
-            <a:pPr algn="l" indent="0" marL="0">
-              <a:lnSpc>
-                <a:spcPts val="1680"/>
-              </a:lnSpc>
-              <a:spcBef>
-                <a:spcPts val="300"/>
-              </a:spcBef>
-              <a:spcAft>
-                <a:spcPts val="300"/>
-              </a:spcAft>
-              <a:buNone/>
-            </a:pPr>
-            <a:r>
-              <a:rPr lang="en-US" sz="1200" i="1" dirty="0">
+              <a:t>Be specific.</a:t>
+            </a:r>
+            <a:pPr algn="l" indent="0" marL="0">
+              <a:lnSpc>
+                <a:spcPts val="1620"/>
+              </a:lnSpc>
+              <a:spcAft>
+                <a:spcPts val="300"/>
+              </a:spcAft>
+              <a:buNone/>
+            </a:pPr>
+            <a:r>
+              <a:rPr lang="en-US" sz="1200" dirty="0">
                 <a:solidFill>
                   <a:srgbClr val="1C2833"/>
                 </a:solidFill>
@@ -4389,7 +7959,51 @@
                 <a:ea typeface="Arial" pitchFamily="34" charset="-122"/>
                 <a:cs typeface="Arial" pitchFamily="34" charset="-120"/>
               </a:rPr>
-              <a:t>"Days 6 and 7 are quiet build sessions. I'll be walking the room, not teaching. Bring all your materials tomorrow."</a:t>
+              <a:t> "I like it" is useless. "The colour key on your mandala helps me see the elements without reading text" is useful.</a:t>
+            </a:r>
+            <a:endParaRPr lang="en-US" sz="1200" dirty="0"/>
+          </a:p>
+          <a:p>
+            <a:pPr algn="l" marL="342900" indent="-342900">
+              <a:lnSpc>
+                <a:spcPts val="1620"/>
+              </a:lnSpc>
+              <a:spcAft>
+                <a:spcPts val="300"/>
+              </a:spcAft>
+              <a:buSzPct val="100000"/>
+              <a:buChar char="•"/>
+            </a:pPr>
+            <a:r>
+              <a:rPr lang="en-US" sz="1200" b="1" dirty="0">
+                <a:solidFill>
+                  <a:srgbClr val="1C2833"/>
+                </a:solidFill>
+                <a:latin typeface="Arial" pitchFamily="34" charset="0"/>
+                <a:ea typeface="Arial" pitchFamily="34" charset="-122"/>
+                <a:cs typeface="Arial" pitchFamily="34" charset="-120"/>
+              </a:rPr>
+              <a:t>Be helpful.</a:t>
+            </a:r>
+            <a:pPr algn="l" indent="0" marL="0">
+              <a:lnSpc>
+                <a:spcPts val="1620"/>
+              </a:lnSpc>
+              <a:spcAft>
+                <a:spcPts val="300"/>
+              </a:spcAft>
+              <a:buNone/>
+            </a:pPr>
+            <a:r>
+              <a:rPr lang="en-US" sz="1200" dirty="0">
+                <a:solidFill>
+                  <a:srgbClr val="1C2833"/>
+                </a:solidFill>
+                <a:latin typeface="Arial" pitchFamily="34" charset="0"/>
+                <a:ea typeface="Arial" pitchFamily="34" charset="-122"/>
+                <a:cs typeface="Arial" pitchFamily="34" charset="-120"/>
+              </a:rPr>
+              <a:t> Don't just list problems — propose a fix.</a:t>
             </a:r>
             <a:endParaRPr lang="en-US" sz="1200" dirty="0"/>
           </a:p>
@@ -4547,7 +8161,7 @@
                 <a:ea typeface="Georgia" pitchFamily="34" charset="-122"/>
                 <a:cs typeface="Georgia" pitchFamily="34" charset="-120"/>
               </a:rPr>
-              <a:t>Student-facing content</a:t>
+              <a:t>Core (10 min) (cont.)</a:t>
             </a:r>
             <a:endParaRPr lang="en-US" sz="1800" dirty="0"/>
           </a:p>
@@ -4561,384 +8175,67 @@
         </p:nvSpPr>
         <p:spPr>
           <a:xfrm>
-            <a:off x="406301" y="883593"/>
-            <a:ext cx="8331398" cy="2112169"/>
-          </a:xfrm>
-          <a:prstGeom prst="rect">
-            <a:avLst/>
-          </a:prstGeom>
-          <a:solidFill>
-            <a:srgbClr val="F4F8F9"/>
-          </a:solidFill>
-          <a:ln/>
-        </p:spPr>
-        <p:txBody>
-          <a:bodyPr wrap="square" rtlCol="0" anchor="ctr"/>
-          <a:lstStyle/>
-          <a:p>
-            <a:pPr indent="0" marL="0">
-              <a:buNone/>
-            </a:pPr>
-            <a:endParaRPr lang="en-US" dirty="0"/>
-          </a:p>
-        </p:txBody>
-      </p:sp>
-      <p:sp>
-        <p:nvSpPr>
-          <p:cNvPr id="5" name="Shape 3"/>
-          <p:cNvSpPr/>
-          <p:nvPr/>
-        </p:nvSpPr>
-        <p:spPr>
-          <a:xfrm>
-            <a:off x="434876" y="883593"/>
-            <a:ext cx="0" cy="2112169"/>
-          </a:xfrm>
-          <a:prstGeom prst="line">
+            <a:off x="634901" y="883593"/>
+            <a:ext cx="8102798" cy="487561"/>
+          </a:xfrm>
+          <a:prstGeom prst="rect">
             <a:avLst/>
           </a:prstGeom>
           <a:noFill/>
-          <a:ln w="57150">
-            <a:solidFill>
-              <a:srgbClr val="FE4447"/>
-            </a:solidFill>
-            <a:prstDash val="solid"/>
-          </a:ln>
-        </p:spPr>
-      </p:sp>
-      <p:sp>
-        <p:nvSpPr>
-          <p:cNvPr id="6" name="Text 4"/>
-          <p:cNvSpPr/>
-          <p:nvPr/>
-        </p:nvSpPr>
-        <p:spPr>
-          <a:xfrm>
-            <a:off x="692051" y="1074093"/>
-            <a:ext cx="7973389" cy="230981"/>
-          </a:xfrm>
-          <a:prstGeom prst="rect">
-            <a:avLst/>
-          </a:prstGeom>
-          <a:noFill/>
           <a:ln/>
         </p:spPr>
         <p:txBody>
           <a:bodyPr wrap="square" lIns="0" tIns="0" rIns="0" bIns="0" rtlCol="0" anchor="t"/>
           <a:lstStyle/>
           <a:p>
-            <a:pPr algn="l" indent="0" marL="0">
-              <a:lnSpc>
-                <a:spcPts val="1820"/>
-              </a:lnSpc>
-              <a:spcBef>
-                <a:spcPts val="300"/>
-              </a:spcBef>
-              <a:spcAft>
-                <a:spcPts val="300"/>
-              </a:spcAft>
-              <a:buNone/>
-            </a:pPr>
-            <a:r>
-              <a:rPr lang="en-US" sz="1300" b="1" i="1" dirty="0">
-                <a:solidFill>
-                  <a:srgbClr val="1C2833"/>
-                </a:solidFill>
-                <a:latin typeface="Georgia" pitchFamily="34" charset="0"/>
-                <a:ea typeface="Georgia" pitchFamily="34" charset="-122"/>
-                <a:cs typeface="Georgia" pitchFamily="34" charset="-120"/>
-              </a:rPr>
-              <a:t>Critique is a gift, not an attack.</a:t>
-            </a:r>
-            <a:endParaRPr lang="en-US" sz="1300" dirty="0"/>
-          </a:p>
-        </p:txBody>
-      </p:sp>
-      <p:sp>
-        <p:nvSpPr>
-          <p:cNvPr id="7" name="Text 5"/>
-          <p:cNvSpPr/>
-          <p:nvPr/>
-        </p:nvSpPr>
-        <p:spPr>
-          <a:xfrm>
-            <a:off x="692051" y="1343174"/>
-            <a:ext cx="7973389" cy="692944"/>
-          </a:xfrm>
-          <a:prstGeom prst="rect">
-            <a:avLst/>
-          </a:prstGeom>
-          <a:noFill/>
-          <a:ln/>
-        </p:spPr>
-        <p:txBody>
-          <a:bodyPr wrap="square" lIns="0" tIns="0" rIns="0" bIns="0" rtlCol="0" anchor="t"/>
-          <a:lstStyle/>
-          <a:p>
-            <a:pPr algn="l" indent="0" marL="0">
-              <a:lnSpc>
-                <a:spcPts val="1820"/>
-              </a:lnSpc>
-              <a:spcBef>
-                <a:spcPts val="300"/>
-              </a:spcBef>
-              <a:spcAft>
-                <a:spcPts val="300"/>
-              </a:spcAft>
-              <a:buNone/>
-            </a:pPr>
-            <a:r>
-              <a:rPr lang="en-US" sz="1300" dirty="0">
-                <a:solidFill>
-                  <a:srgbClr val="1C2833"/>
-                </a:solidFill>
-                <a:latin typeface="Georgia" pitchFamily="34" charset="0"/>
-                <a:ea typeface="Georgia" pitchFamily="34" charset="-122"/>
-                <a:cs typeface="Georgia" pitchFamily="34" charset="-120"/>
-              </a:rPr>
-              <a:t>Three rules: - </a:t>
-            </a:r>
-            <a:pPr algn="l" indent="0" marL="0">
-              <a:lnSpc>
-                <a:spcPts val="1820"/>
-              </a:lnSpc>
-              <a:spcBef>
-                <a:spcPts val="300"/>
-              </a:spcBef>
-              <a:spcAft>
-                <a:spcPts val="300"/>
-              </a:spcAft>
-              <a:buNone/>
-            </a:pPr>
-            <a:r>
-              <a:rPr lang="en-US" sz="1300" b="1" i="1" dirty="0">
-                <a:solidFill>
-                  <a:srgbClr val="1C2833"/>
-                </a:solidFill>
-                <a:latin typeface="Georgia" pitchFamily="34" charset="0"/>
-                <a:ea typeface="Georgia" pitchFamily="34" charset="-122"/>
-                <a:cs typeface="Georgia" pitchFamily="34" charset="-120"/>
-              </a:rPr>
-              <a:t>Be kind.</a:t>
-            </a:r>
-            <a:pPr algn="l" indent="0" marL="0">
-              <a:lnSpc>
-                <a:spcPts val="1820"/>
-              </a:lnSpc>
-              <a:spcBef>
-                <a:spcPts val="300"/>
-              </a:spcBef>
-              <a:spcAft>
-                <a:spcPts val="300"/>
-              </a:spcAft>
-              <a:buNone/>
-            </a:pPr>
-            <a:r>
-              <a:rPr lang="en-US" sz="1300" dirty="0">
-                <a:solidFill>
-                  <a:srgbClr val="1C2833"/>
-                </a:solidFill>
-                <a:latin typeface="Georgia" pitchFamily="34" charset="0"/>
-                <a:ea typeface="Georgia" pitchFamily="34" charset="-122"/>
-                <a:cs typeface="Georgia" pitchFamily="34" charset="-120"/>
-              </a:rPr>
-              <a:t> Open with what you noticed and admired. - </a:t>
-            </a:r>
-            <a:pPr algn="l" indent="0" marL="0">
-              <a:lnSpc>
-                <a:spcPts val="1820"/>
-              </a:lnSpc>
-              <a:spcBef>
-                <a:spcPts val="300"/>
-              </a:spcBef>
-              <a:spcAft>
-                <a:spcPts val="300"/>
-              </a:spcAft>
-              <a:buNone/>
-            </a:pPr>
-            <a:r>
-              <a:rPr lang="en-US" sz="1300" b="1" i="1" dirty="0">
-                <a:solidFill>
-                  <a:srgbClr val="1C2833"/>
-                </a:solidFill>
-                <a:latin typeface="Georgia" pitchFamily="34" charset="0"/>
-                <a:ea typeface="Georgia" pitchFamily="34" charset="-122"/>
-                <a:cs typeface="Georgia" pitchFamily="34" charset="-120"/>
-              </a:rPr>
-              <a:t>Be specific.</a:t>
-            </a:r>
-            <a:pPr algn="l" indent="0" marL="0">
-              <a:lnSpc>
-                <a:spcPts val="1820"/>
-              </a:lnSpc>
-              <a:spcBef>
-                <a:spcPts val="300"/>
-              </a:spcBef>
-              <a:spcAft>
-                <a:spcPts val="300"/>
-              </a:spcAft>
-              <a:buNone/>
-            </a:pPr>
-            <a:r>
-              <a:rPr lang="en-US" sz="1300" dirty="0">
-                <a:solidFill>
-                  <a:srgbClr val="1C2833"/>
-                </a:solidFill>
-                <a:latin typeface="Georgia" pitchFamily="34" charset="0"/>
-                <a:ea typeface="Georgia" pitchFamily="34" charset="-122"/>
-                <a:cs typeface="Georgia" pitchFamily="34" charset="-120"/>
-              </a:rPr>
-              <a:t> "I like it" is useless. "The colour key helps me see the elements without reading text" is useful. - </a:t>
-            </a:r>
-            <a:pPr algn="l" indent="0" marL="0">
-              <a:lnSpc>
-                <a:spcPts val="1820"/>
-              </a:lnSpc>
-              <a:spcBef>
-                <a:spcPts val="300"/>
-              </a:spcBef>
-              <a:spcAft>
-                <a:spcPts val="300"/>
-              </a:spcAft>
-              <a:buNone/>
-            </a:pPr>
-            <a:r>
-              <a:rPr lang="en-US" sz="1300" b="1" i="1" dirty="0">
-                <a:solidFill>
-                  <a:srgbClr val="1C2833"/>
-                </a:solidFill>
-                <a:latin typeface="Georgia" pitchFamily="34" charset="0"/>
-                <a:ea typeface="Georgia" pitchFamily="34" charset="-122"/>
-                <a:cs typeface="Georgia" pitchFamily="34" charset="-120"/>
-              </a:rPr>
-              <a:t>Be helpful.</a:t>
-            </a:r>
-            <a:pPr algn="l" indent="0" marL="0">
-              <a:lnSpc>
-                <a:spcPts val="1820"/>
-              </a:lnSpc>
-              <a:spcBef>
-                <a:spcPts val="300"/>
-              </a:spcBef>
-              <a:spcAft>
-                <a:spcPts val="300"/>
-              </a:spcAft>
-              <a:buNone/>
-            </a:pPr>
-            <a:r>
-              <a:rPr lang="en-US" sz="1300" dirty="0">
-                <a:solidFill>
-                  <a:srgbClr val="1C2833"/>
-                </a:solidFill>
-                <a:latin typeface="Georgia" pitchFamily="34" charset="0"/>
-                <a:ea typeface="Georgia" pitchFamily="34" charset="-122"/>
-                <a:cs typeface="Georgia" pitchFamily="34" charset="-120"/>
-              </a:rPr>
-              <a:t> Propose a fix, not just a problem.</a:t>
-            </a:r>
-            <a:endParaRPr lang="en-US" sz="1300" dirty="0"/>
-          </a:p>
-        </p:txBody>
-      </p:sp>
-      <p:sp>
-        <p:nvSpPr>
-          <p:cNvPr id="8" name="Text 6"/>
-          <p:cNvSpPr/>
-          <p:nvPr/>
-        </p:nvSpPr>
-        <p:spPr>
-          <a:xfrm>
-            <a:off x="692051" y="2074218"/>
-            <a:ext cx="7973389" cy="461963"/>
-          </a:xfrm>
-          <a:prstGeom prst="rect">
-            <a:avLst/>
-          </a:prstGeom>
-          <a:noFill/>
-          <a:ln/>
-        </p:spPr>
-        <p:txBody>
-          <a:bodyPr wrap="square" lIns="0" tIns="0" rIns="0" bIns="0" rtlCol="0" anchor="t"/>
-          <a:lstStyle/>
-          <a:p>
-            <a:pPr algn="l" indent="0" marL="0">
-              <a:lnSpc>
-                <a:spcPts val="1820"/>
-              </a:lnSpc>
-              <a:spcBef>
-                <a:spcPts val="300"/>
-              </a:spcBef>
-              <a:spcAft>
-                <a:spcPts val="300"/>
-              </a:spcAft>
-              <a:buNone/>
-            </a:pPr>
-            <a:r>
-              <a:rPr lang="en-US" sz="1300" i="1" dirty="0">
-                <a:solidFill>
-                  <a:srgbClr val="1C2833"/>
-                </a:solidFill>
-                <a:latin typeface="Georgia" pitchFamily="34" charset="0"/>
-                <a:ea typeface="Georgia" pitchFamily="34" charset="-122"/>
-                <a:cs typeface="Georgia" pitchFamily="34" charset="-120"/>
-              </a:rPr>
-              <a:t>The protocol: 1. Presenter shares (3 min). 2. Critic asks clarifying questions (2 min). 3. Critic gives "I notice / I wonder" (4 min) — three of each. 4. Presenter responds (3 min) — keep, change, think about.</a:t>
-            </a:r>
-            <a:endParaRPr lang="en-US" sz="1300" dirty="0"/>
-          </a:p>
-        </p:txBody>
-      </p:sp>
-      <p:sp>
-        <p:nvSpPr>
-          <p:cNvPr id="9" name="Text 7"/>
-          <p:cNvSpPr/>
-          <p:nvPr/>
-        </p:nvSpPr>
-        <p:spPr>
-          <a:xfrm>
-            <a:off x="692051" y="2574280"/>
-            <a:ext cx="7973389" cy="230981"/>
-          </a:xfrm>
-          <a:prstGeom prst="rect">
-            <a:avLst/>
-          </a:prstGeom>
-          <a:noFill/>
-          <a:ln/>
-        </p:spPr>
-        <p:txBody>
-          <a:bodyPr wrap="square" lIns="0" tIns="0" rIns="0" bIns="0" rtlCol="0" anchor="t"/>
-          <a:lstStyle/>
-          <a:p>
-            <a:pPr algn="l" indent="0" marL="0">
-              <a:lnSpc>
-                <a:spcPts val="1820"/>
-              </a:lnSpc>
-              <a:spcBef>
-                <a:spcPts val="300"/>
-              </a:spcBef>
-              <a:spcAft>
-                <a:spcPts val="300"/>
-              </a:spcAft>
-              <a:buNone/>
-            </a:pPr>
-            <a:r>
-              <a:rPr lang="en-US" sz="1300" i="1" dirty="0">
-                <a:solidFill>
-                  <a:srgbClr val="1C2833"/>
-                </a:solidFill>
-                <a:latin typeface="Georgia" pitchFamily="34" charset="0"/>
-                <a:ea typeface="Georgia" pitchFamily="34" charset="-122"/>
-                <a:cs typeface="Georgia" pitchFamily="34" charset="-120"/>
-              </a:rPr>
-              <a:t>Then switch.</a:t>
-            </a:r>
-            <a:endParaRPr lang="en-US" sz="1300" dirty="0"/>
-          </a:p>
-        </p:txBody>
-      </p:sp>
-      <p:sp>
-        <p:nvSpPr>
-          <p:cNvPr id="10" name="Text 8"/>
+            <a:pPr algn="l" marL="342900" indent="-342900">
+              <a:lnSpc>
+                <a:spcPts val="1620"/>
+              </a:lnSpc>
+              <a:spcAft>
+                <a:spcPts val="300"/>
+              </a:spcAft>
+              <a:buSzPct val="100000"/>
+              <a:buChar char="•"/>
+            </a:pPr>
+            <a:r>
+              <a:rPr lang="en-US" sz="1200" b="1" dirty="0">
+                <a:solidFill>
+                  <a:srgbClr val="1C2833"/>
+                </a:solidFill>
+                <a:latin typeface="Arial" pitchFamily="34" charset="0"/>
+                <a:ea typeface="Arial" pitchFamily="34" charset="-122"/>
+                <a:cs typeface="Arial" pitchFamily="34" charset="-120"/>
+              </a:rPr>
+              <a:t>The protocol</a:t>
+            </a:r>
+            <a:pPr algn="l" indent="0" marL="0">
+              <a:lnSpc>
+                <a:spcPts val="1620"/>
+              </a:lnSpc>
+              <a:spcAft>
+                <a:spcPts val="300"/>
+              </a:spcAft>
+              <a:buNone/>
+            </a:pPr>
+            <a:r>
+              <a:rPr lang="en-US" sz="1200" dirty="0">
+                <a:solidFill>
+                  <a:srgbClr val="1C2833"/>
+                </a:solidFill>
+                <a:latin typeface="Arial" pitchFamily="34" charset="0"/>
+                <a:ea typeface="Arial" pitchFamily="34" charset="-122"/>
+                <a:cs typeface="Arial" pitchFamily="34" charset="-120"/>
+              </a:rPr>
+              <a:t> (4 min). Pairs use this exact structure, ~15 minutes per direction (so each student presents once and listens once):</a:t>
+            </a:r>
+            <a:endParaRPr lang="en-US" sz="1200" dirty="0"/>
+          </a:p>
+        </p:txBody>
+      </p:sp>
+      <p:sp>
+        <p:nvSpPr>
+          <p:cNvPr id="5" name="Text 3"/>
           <p:cNvSpPr/>
           <p:nvPr/>
         </p:nvSpPr>
@@ -5088,7 +8385,7 @@
                 <a:ea typeface="Georgia" pitchFamily="34" charset="-122"/>
                 <a:cs typeface="Georgia" pitchFamily="34" charset="-120"/>
               </a:rPr>
-              <a:t>Critique Protocol Sheet (template)</a:t>
+              <a:t>Core (10 min) (cont.)</a:t>
             </a:r>
             <a:endParaRPr lang="en-US" sz="1800" dirty="0"/>
           </a:p>
@@ -5102,816 +8399,229 @@
         </p:nvSpPr>
         <p:spPr>
           <a:xfrm>
-            <a:off x="406301" y="883593"/>
-            <a:ext cx="8331398" cy="4443710"/>
-          </a:xfrm>
-          <a:prstGeom prst="rect">
-            <a:avLst/>
-          </a:prstGeom>
-          <a:solidFill>
-            <a:srgbClr val="F4F8F9"/>
-          </a:solidFill>
-          <a:ln/>
-        </p:spPr>
-        <p:txBody>
-          <a:bodyPr wrap="square" rtlCol="0" anchor="ctr"/>
-          <a:lstStyle/>
-          <a:p>
-            <a:pPr indent="0" marL="0">
-              <a:buNone/>
-            </a:pPr>
-            <a:endParaRPr lang="en-US" dirty="0"/>
-          </a:p>
-        </p:txBody>
-      </p:sp>
-      <p:sp>
-        <p:nvSpPr>
-          <p:cNvPr id="5" name="Shape 3"/>
-          <p:cNvSpPr/>
-          <p:nvPr/>
-        </p:nvSpPr>
-        <p:spPr>
-          <a:xfrm>
-            <a:off x="430113" y="883593"/>
-            <a:ext cx="0" cy="4443710"/>
-          </a:xfrm>
-          <a:prstGeom prst="line">
+            <a:off x="634901" y="883593"/>
+            <a:ext cx="8102798" cy="1257002"/>
+          </a:xfrm>
+          <a:prstGeom prst="rect">
             <a:avLst/>
           </a:prstGeom>
           <a:noFill/>
-          <a:ln w="47625">
-            <a:solidFill>
-              <a:srgbClr val="277884"/>
-            </a:solidFill>
-            <a:prstDash val="solid"/>
-          </a:ln>
-        </p:spPr>
-      </p:sp>
-      <p:sp>
-        <p:nvSpPr>
-          <p:cNvPr id="6" name="Text 4"/>
-          <p:cNvSpPr/>
-          <p:nvPr/>
-        </p:nvSpPr>
-        <p:spPr>
-          <a:xfrm>
-            <a:off x="631627" y="1010543"/>
-            <a:ext cx="8086939" cy="174575"/>
-          </a:xfrm>
-          <a:prstGeom prst="rect">
-            <a:avLst/>
-          </a:prstGeom>
-          <a:noFill/>
           <a:ln/>
         </p:spPr>
         <p:txBody>
           <a:bodyPr wrap="square" lIns="0" tIns="0" rIns="0" bIns="0" rtlCol="0" anchor="t"/>
           <a:lstStyle/>
           <a:p>
-            <a:pPr algn="l" indent="0" marL="0">
-              <a:lnSpc>
-                <a:spcPts val="1375"/>
-              </a:lnSpc>
-              <a:buNone/>
-            </a:pPr>
-            <a:r>
-              <a:rPr lang="en-US" sz="1100" dirty="0">
-                <a:solidFill>
-                  <a:srgbClr val="1C2833"/>
-                </a:solidFill>
-                <a:latin typeface="Courier New" pitchFamily="34" charset="0"/>
-                <a:ea typeface="Courier New" pitchFamily="34" charset="-122"/>
-                <a:cs typeface="Courier New" pitchFamily="34" charset="-120"/>
-              </a:rPr>
-              <a:t>PROTOCOL SHEET — Mid-project critique</a:t>
-            </a:r>
-            <a:endParaRPr lang="en-US" sz="1100" dirty="0"/>
-          </a:p>
-        </p:txBody>
-      </p:sp>
-      <p:sp>
-        <p:nvSpPr>
-          <p:cNvPr id="7" name="Text 5"/>
-          <p:cNvSpPr/>
-          <p:nvPr/>
-        </p:nvSpPr>
-        <p:spPr>
-          <a:xfrm>
-            <a:off x="631627" y="1359694"/>
-            <a:ext cx="8086939" cy="174575"/>
-          </a:xfrm>
-          <a:prstGeom prst="rect">
-            <a:avLst/>
-          </a:prstGeom>
-          <a:noFill/>
-          <a:ln/>
-        </p:spPr>
-        <p:txBody>
-          <a:bodyPr wrap="square" lIns="0" tIns="0" rIns="0" bIns="0" rtlCol="0" anchor="t"/>
-          <a:lstStyle/>
-          <a:p>
-            <a:pPr algn="l" indent="0" marL="0">
-              <a:lnSpc>
-                <a:spcPts val="1375"/>
-              </a:lnSpc>
-              <a:buNone/>
-            </a:pPr>
-            <a:r>
-              <a:rPr lang="en-US" sz="1100" dirty="0">
-                <a:solidFill>
-                  <a:srgbClr val="1C2833"/>
-                </a:solidFill>
-                <a:latin typeface="Courier New" pitchFamily="34" charset="0"/>
-                <a:ea typeface="Courier New" pitchFamily="34" charset="-122"/>
-                <a:cs typeface="Courier New" pitchFamily="34" charset="-120"/>
-              </a:rPr>
-              <a:t>Presenter: ___________________  Critic: ___________________</a:t>
-            </a:r>
-            <a:endParaRPr lang="en-US" sz="1100" dirty="0"/>
-          </a:p>
-        </p:txBody>
-      </p:sp>
-      <p:sp>
-        <p:nvSpPr>
-          <p:cNvPr id="8" name="Text 6"/>
-          <p:cNvSpPr/>
-          <p:nvPr/>
-        </p:nvSpPr>
-        <p:spPr>
-          <a:xfrm>
-            <a:off x="631627" y="1708845"/>
-            <a:ext cx="8086939" cy="174575"/>
-          </a:xfrm>
-          <a:prstGeom prst="rect">
-            <a:avLst/>
-          </a:prstGeom>
-          <a:noFill/>
-          <a:ln/>
-        </p:spPr>
-        <p:txBody>
-          <a:bodyPr wrap="square" lIns="0" tIns="0" rIns="0" bIns="0" rtlCol="0" anchor="t"/>
-          <a:lstStyle/>
-          <a:p>
-            <a:pPr algn="l" indent="0" marL="0">
-              <a:lnSpc>
-                <a:spcPts val="1375"/>
-              </a:lnSpc>
-              <a:buNone/>
-            </a:pPr>
-            <a:r>
-              <a:rPr lang="en-US" sz="1100" dirty="0">
-                <a:solidFill>
-                  <a:srgbClr val="1C2833"/>
-                </a:solidFill>
-                <a:latin typeface="Courier New" pitchFamily="34" charset="0"/>
-                <a:ea typeface="Courier New" pitchFamily="34" charset="-122"/>
-                <a:cs typeface="Courier New" pitchFamily="34" charset="-120"/>
-              </a:rPr>
-              <a:t>PROJECT: ____________________________________________</a:t>
-            </a:r>
-            <a:endParaRPr lang="en-US" sz="1100" dirty="0"/>
-          </a:p>
-        </p:txBody>
-      </p:sp>
-      <p:sp>
-        <p:nvSpPr>
-          <p:cNvPr id="9" name="Text 7"/>
-          <p:cNvSpPr/>
-          <p:nvPr/>
-        </p:nvSpPr>
-        <p:spPr>
-          <a:xfrm>
-            <a:off x="631627" y="2057995"/>
-            <a:ext cx="8086939" cy="174575"/>
-          </a:xfrm>
-          <a:prstGeom prst="rect">
-            <a:avLst/>
-          </a:prstGeom>
-          <a:noFill/>
-          <a:ln/>
-        </p:spPr>
-        <p:txBody>
-          <a:bodyPr wrap="square" lIns="0" tIns="0" rIns="0" bIns="0" rtlCol="0" anchor="t"/>
-          <a:lstStyle/>
-          <a:p>
-            <a:pPr algn="l" indent="0" marL="0">
-              <a:lnSpc>
-                <a:spcPts val="1375"/>
-              </a:lnSpc>
-              <a:buNone/>
-            </a:pPr>
-            <a:r>
-              <a:rPr lang="en-US" sz="1100" dirty="0">
-                <a:solidFill>
-                  <a:srgbClr val="1C2833"/>
-                </a:solidFill>
-                <a:latin typeface="Courier New" pitchFamily="34" charset="0"/>
-                <a:ea typeface="Courier New" pitchFamily="34" charset="-122"/>
-                <a:cs typeface="Courier New" pitchFamily="34" charset="-120"/>
-              </a:rPr>
-              <a:t>CLARIFYING QUESTIONS (critic notes here):</a:t>
-            </a:r>
-            <a:endParaRPr lang="en-US" sz="1100" dirty="0"/>
-          </a:p>
-        </p:txBody>
-      </p:sp>
-      <p:sp>
-        <p:nvSpPr>
-          <p:cNvPr id="10" name="Text 8"/>
-          <p:cNvSpPr/>
-          <p:nvPr/>
-        </p:nvSpPr>
-        <p:spPr>
-          <a:xfrm>
-            <a:off x="631627" y="2232571"/>
-            <a:ext cx="8086939" cy="174575"/>
-          </a:xfrm>
-          <a:prstGeom prst="rect">
-            <a:avLst/>
-          </a:prstGeom>
-          <a:noFill/>
-          <a:ln/>
-        </p:spPr>
-        <p:txBody>
-          <a:bodyPr wrap="square" lIns="0" tIns="0" rIns="0" bIns="0" rtlCol="0" anchor="t"/>
-          <a:lstStyle/>
-          <a:p>
-            <a:pPr algn="l" indent="0" marL="0">
-              <a:lnSpc>
-                <a:spcPts val="1375"/>
-              </a:lnSpc>
-              <a:buNone/>
-            </a:pPr>
-            <a:r>
-              <a:rPr lang="en-US" sz="1100" dirty="0">
-                <a:solidFill>
-                  <a:srgbClr val="1C2833"/>
-                </a:solidFill>
-                <a:latin typeface="Courier New" pitchFamily="34" charset="0"/>
-                <a:ea typeface="Courier New" pitchFamily="34" charset="-122"/>
-                <a:cs typeface="Courier New" pitchFamily="34" charset="-120"/>
-              </a:rPr>
-              <a:t>1. ________________________________________________</a:t>
-            </a:r>
-            <a:endParaRPr lang="en-US" sz="1100" dirty="0"/>
-          </a:p>
-        </p:txBody>
-      </p:sp>
-      <p:sp>
-        <p:nvSpPr>
-          <p:cNvPr id="11" name="Text 9"/>
-          <p:cNvSpPr/>
-          <p:nvPr/>
-        </p:nvSpPr>
-        <p:spPr>
-          <a:xfrm>
-            <a:off x="631627" y="2407146"/>
-            <a:ext cx="8086939" cy="174575"/>
-          </a:xfrm>
-          <a:prstGeom prst="rect">
-            <a:avLst/>
-          </a:prstGeom>
-          <a:noFill/>
-          <a:ln/>
-        </p:spPr>
-        <p:txBody>
-          <a:bodyPr wrap="square" lIns="0" tIns="0" rIns="0" bIns="0" rtlCol="0" anchor="t"/>
-          <a:lstStyle/>
-          <a:p>
-            <a:pPr algn="l" indent="0" marL="0">
-              <a:lnSpc>
-                <a:spcPts val="1375"/>
-              </a:lnSpc>
-              <a:buNone/>
-            </a:pPr>
-            <a:r>
-              <a:rPr lang="en-US" sz="1100" dirty="0">
-                <a:solidFill>
-                  <a:srgbClr val="1C2833"/>
-                </a:solidFill>
-                <a:latin typeface="Courier New" pitchFamily="34" charset="0"/>
-                <a:ea typeface="Courier New" pitchFamily="34" charset="-122"/>
-                <a:cs typeface="Courier New" pitchFamily="34" charset="-120"/>
-              </a:rPr>
-              <a:t>2. ________________________________________________</a:t>
-            </a:r>
-            <a:endParaRPr lang="en-US" sz="1100" dirty="0"/>
-          </a:p>
-        </p:txBody>
-      </p:sp>
-      <p:sp>
-        <p:nvSpPr>
-          <p:cNvPr id="12" name="Text 10"/>
-          <p:cNvSpPr/>
-          <p:nvPr/>
-        </p:nvSpPr>
-        <p:spPr>
-          <a:xfrm>
-            <a:off x="631627" y="2756297"/>
-            <a:ext cx="8086939" cy="174575"/>
-          </a:xfrm>
-          <a:prstGeom prst="rect">
-            <a:avLst/>
-          </a:prstGeom>
-          <a:noFill/>
-          <a:ln/>
-        </p:spPr>
-        <p:txBody>
-          <a:bodyPr wrap="square" lIns="0" tIns="0" rIns="0" bIns="0" rtlCol="0" anchor="t"/>
-          <a:lstStyle/>
-          <a:p>
-            <a:pPr algn="l" indent="0" marL="0">
-              <a:lnSpc>
-                <a:spcPts val="1375"/>
-              </a:lnSpc>
-              <a:buNone/>
-            </a:pPr>
-            <a:r>
-              <a:rPr lang="en-US" sz="1100" dirty="0">
-                <a:solidFill>
-                  <a:srgbClr val="1C2833"/>
-                </a:solidFill>
-                <a:latin typeface="Courier New" pitchFamily="34" charset="0"/>
-                <a:ea typeface="Courier New" pitchFamily="34" charset="-122"/>
-                <a:cs typeface="Courier New" pitchFamily="34" charset="-120"/>
-              </a:rPr>
-              <a:t>"I notice…" (3 specific observations):</a:t>
-            </a:r>
-            <a:endParaRPr lang="en-US" sz="1100" dirty="0"/>
-          </a:p>
-        </p:txBody>
-      </p:sp>
-      <p:sp>
-        <p:nvSpPr>
-          <p:cNvPr id="13" name="Text 11"/>
-          <p:cNvSpPr/>
-          <p:nvPr/>
-        </p:nvSpPr>
-        <p:spPr>
-          <a:xfrm>
-            <a:off x="631627" y="2930872"/>
-            <a:ext cx="8086939" cy="174575"/>
-          </a:xfrm>
-          <a:prstGeom prst="rect">
-            <a:avLst/>
-          </a:prstGeom>
-          <a:noFill/>
-          <a:ln/>
-        </p:spPr>
-        <p:txBody>
-          <a:bodyPr wrap="square" lIns="0" tIns="0" rIns="0" bIns="0" rtlCol="0" anchor="t"/>
-          <a:lstStyle/>
-          <a:p>
-            <a:pPr algn="l" indent="0" marL="0">
-              <a:lnSpc>
-                <a:spcPts val="1375"/>
-              </a:lnSpc>
-              <a:buNone/>
-            </a:pPr>
-            <a:r>
-              <a:rPr lang="en-US" sz="1100" dirty="0">
-                <a:solidFill>
-                  <a:srgbClr val="1C2833"/>
-                </a:solidFill>
-                <a:latin typeface="Courier New" pitchFamily="34" charset="0"/>
-                <a:ea typeface="Courier New" pitchFamily="34" charset="-122"/>
-                <a:cs typeface="Courier New" pitchFamily="34" charset="-120"/>
-              </a:rPr>
-              <a:t>1. ________________________________________________</a:t>
-            </a:r>
-            <a:endParaRPr lang="en-US" sz="1100" dirty="0"/>
-          </a:p>
-        </p:txBody>
-      </p:sp>
-      <p:sp>
-        <p:nvSpPr>
-          <p:cNvPr id="14" name="Text 12"/>
-          <p:cNvSpPr/>
-          <p:nvPr/>
-        </p:nvSpPr>
-        <p:spPr>
-          <a:xfrm>
-            <a:off x="631627" y="3105448"/>
-            <a:ext cx="8086939" cy="174575"/>
-          </a:xfrm>
-          <a:prstGeom prst="rect">
-            <a:avLst/>
-          </a:prstGeom>
-          <a:noFill/>
-          <a:ln/>
-        </p:spPr>
-        <p:txBody>
-          <a:bodyPr wrap="square" lIns="0" tIns="0" rIns="0" bIns="0" rtlCol="0" anchor="t"/>
-          <a:lstStyle/>
-          <a:p>
-            <a:pPr algn="l" indent="0" marL="0">
-              <a:lnSpc>
-                <a:spcPts val="1375"/>
-              </a:lnSpc>
-              <a:buNone/>
-            </a:pPr>
-            <a:r>
-              <a:rPr lang="en-US" sz="1100" dirty="0">
-                <a:solidFill>
-                  <a:srgbClr val="1C2833"/>
-                </a:solidFill>
-                <a:latin typeface="Courier New" pitchFamily="34" charset="0"/>
-                <a:ea typeface="Courier New" pitchFamily="34" charset="-122"/>
-                <a:cs typeface="Courier New" pitchFamily="34" charset="-120"/>
-              </a:rPr>
-              <a:t>2. ________________________________________________</a:t>
-            </a:r>
-            <a:endParaRPr lang="en-US" sz="1100" dirty="0"/>
-          </a:p>
-        </p:txBody>
-      </p:sp>
-      <p:sp>
-        <p:nvSpPr>
-          <p:cNvPr id="15" name="Text 13"/>
-          <p:cNvSpPr/>
-          <p:nvPr/>
-        </p:nvSpPr>
-        <p:spPr>
-          <a:xfrm>
-            <a:off x="631627" y="3280023"/>
-            <a:ext cx="8086939" cy="174575"/>
-          </a:xfrm>
-          <a:prstGeom prst="rect">
-            <a:avLst/>
-          </a:prstGeom>
-          <a:noFill/>
-          <a:ln/>
-        </p:spPr>
-        <p:txBody>
-          <a:bodyPr wrap="square" lIns="0" tIns="0" rIns="0" bIns="0" rtlCol="0" anchor="t"/>
-          <a:lstStyle/>
-          <a:p>
-            <a:pPr algn="l" indent="0" marL="0">
-              <a:lnSpc>
-                <a:spcPts val="1375"/>
-              </a:lnSpc>
-              <a:buNone/>
-            </a:pPr>
-            <a:r>
-              <a:rPr lang="en-US" sz="1100" dirty="0">
-                <a:solidFill>
-                  <a:srgbClr val="1C2833"/>
-                </a:solidFill>
-                <a:latin typeface="Courier New" pitchFamily="34" charset="0"/>
-                <a:ea typeface="Courier New" pitchFamily="34" charset="-122"/>
-                <a:cs typeface="Courier New" pitchFamily="34" charset="-120"/>
-              </a:rPr>
-              <a:t>3. ________________________________________________</a:t>
-            </a:r>
-            <a:endParaRPr lang="en-US" sz="1100" dirty="0"/>
-          </a:p>
-        </p:txBody>
-      </p:sp>
-      <p:sp>
-        <p:nvSpPr>
-          <p:cNvPr id="16" name="Text 14"/>
-          <p:cNvSpPr/>
-          <p:nvPr/>
-        </p:nvSpPr>
-        <p:spPr>
-          <a:xfrm>
-            <a:off x="631627" y="3629174"/>
-            <a:ext cx="8086939" cy="174575"/>
-          </a:xfrm>
-          <a:prstGeom prst="rect">
-            <a:avLst/>
-          </a:prstGeom>
-          <a:noFill/>
-          <a:ln/>
-        </p:spPr>
-        <p:txBody>
-          <a:bodyPr wrap="square" lIns="0" tIns="0" rIns="0" bIns="0" rtlCol="0" anchor="t"/>
-          <a:lstStyle/>
-          <a:p>
-            <a:pPr algn="l" indent="0" marL="0">
-              <a:lnSpc>
-                <a:spcPts val="1375"/>
-              </a:lnSpc>
-              <a:buNone/>
-            </a:pPr>
-            <a:r>
-              <a:rPr lang="en-US" sz="1100" dirty="0">
-                <a:solidFill>
-                  <a:srgbClr val="1C2833"/>
-                </a:solidFill>
-                <a:latin typeface="Courier New" pitchFamily="34" charset="0"/>
-                <a:ea typeface="Courier New" pitchFamily="34" charset="-122"/>
-                <a:cs typeface="Courier New" pitchFamily="34" charset="-120"/>
-              </a:rPr>
-              <a:t>"I wonder…" (3 specific suggestions):</a:t>
-            </a:r>
-            <a:endParaRPr lang="en-US" sz="1100" dirty="0"/>
-          </a:p>
-        </p:txBody>
-      </p:sp>
-      <p:sp>
-        <p:nvSpPr>
-          <p:cNvPr id="17" name="Text 15"/>
-          <p:cNvSpPr/>
-          <p:nvPr/>
-        </p:nvSpPr>
-        <p:spPr>
-          <a:xfrm>
-            <a:off x="631627" y="3803749"/>
-            <a:ext cx="8086939" cy="174575"/>
-          </a:xfrm>
-          <a:prstGeom prst="rect">
-            <a:avLst/>
-          </a:prstGeom>
-          <a:noFill/>
-          <a:ln/>
-        </p:spPr>
-        <p:txBody>
-          <a:bodyPr wrap="square" lIns="0" tIns="0" rIns="0" bIns="0" rtlCol="0" anchor="t"/>
-          <a:lstStyle/>
-          <a:p>
-            <a:pPr algn="l" indent="0" marL="0">
-              <a:lnSpc>
-                <a:spcPts val="1375"/>
-              </a:lnSpc>
-              <a:buNone/>
-            </a:pPr>
-            <a:r>
-              <a:rPr lang="en-US" sz="1100" dirty="0">
-                <a:solidFill>
-                  <a:srgbClr val="1C2833"/>
-                </a:solidFill>
-                <a:latin typeface="Courier New" pitchFamily="34" charset="0"/>
-                <a:ea typeface="Courier New" pitchFamily="34" charset="-122"/>
-                <a:cs typeface="Courier New" pitchFamily="34" charset="-120"/>
-              </a:rPr>
-              <a:t>1. ________________________________________________</a:t>
-            </a:r>
-            <a:endParaRPr lang="en-US" sz="1100" dirty="0"/>
-          </a:p>
-        </p:txBody>
-      </p:sp>
-      <p:sp>
-        <p:nvSpPr>
-          <p:cNvPr id="18" name="Text 16"/>
-          <p:cNvSpPr/>
-          <p:nvPr/>
-        </p:nvSpPr>
-        <p:spPr>
-          <a:xfrm>
-            <a:off x="631627" y="3978325"/>
-            <a:ext cx="8086939" cy="174575"/>
-          </a:xfrm>
-          <a:prstGeom prst="rect">
-            <a:avLst/>
-          </a:prstGeom>
-          <a:noFill/>
-          <a:ln/>
-        </p:spPr>
-        <p:txBody>
-          <a:bodyPr wrap="square" lIns="0" tIns="0" rIns="0" bIns="0" rtlCol="0" anchor="t"/>
-          <a:lstStyle/>
-          <a:p>
-            <a:pPr algn="l" indent="0" marL="0">
-              <a:lnSpc>
-                <a:spcPts val="1375"/>
-              </a:lnSpc>
-              <a:buNone/>
-            </a:pPr>
-            <a:r>
-              <a:rPr lang="en-US" sz="1100" dirty="0">
-                <a:solidFill>
-                  <a:srgbClr val="1C2833"/>
-                </a:solidFill>
-                <a:latin typeface="Courier New" pitchFamily="34" charset="0"/>
-                <a:ea typeface="Courier New" pitchFamily="34" charset="-122"/>
-                <a:cs typeface="Courier New" pitchFamily="34" charset="-120"/>
-              </a:rPr>
-              <a:t>2. ________________________________________________</a:t>
-            </a:r>
-            <a:endParaRPr lang="en-US" sz="1100" dirty="0"/>
-          </a:p>
-        </p:txBody>
-      </p:sp>
-      <p:sp>
-        <p:nvSpPr>
-          <p:cNvPr id="19" name="Text 17"/>
-          <p:cNvSpPr/>
-          <p:nvPr/>
-        </p:nvSpPr>
-        <p:spPr>
-          <a:xfrm>
-            <a:off x="631627" y="4152900"/>
-            <a:ext cx="8086939" cy="174575"/>
-          </a:xfrm>
-          <a:prstGeom prst="rect">
-            <a:avLst/>
-          </a:prstGeom>
-          <a:noFill/>
-          <a:ln/>
-        </p:spPr>
-        <p:txBody>
-          <a:bodyPr wrap="square" lIns="0" tIns="0" rIns="0" bIns="0" rtlCol="0" anchor="t"/>
-          <a:lstStyle/>
-          <a:p>
-            <a:pPr algn="l" indent="0" marL="0">
-              <a:lnSpc>
-                <a:spcPts val="1375"/>
-              </a:lnSpc>
-              <a:buNone/>
-            </a:pPr>
-            <a:r>
-              <a:rPr lang="en-US" sz="1100" dirty="0">
-                <a:solidFill>
-                  <a:srgbClr val="1C2833"/>
-                </a:solidFill>
-                <a:latin typeface="Courier New" pitchFamily="34" charset="0"/>
-                <a:ea typeface="Courier New" pitchFamily="34" charset="-122"/>
-                <a:cs typeface="Courier New" pitchFamily="34" charset="-120"/>
-              </a:rPr>
-              <a:t>3. ________________________________________________</a:t>
-            </a:r>
-            <a:endParaRPr lang="en-US" sz="1100" dirty="0"/>
-          </a:p>
-        </p:txBody>
-      </p:sp>
-      <p:sp>
-        <p:nvSpPr>
-          <p:cNvPr id="20" name="Text 18"/>
-          <p:cNvSpPr/>
-          <p:nvPr/>
-        </p:nvSpPr>
-        <p:spPr>
-          <a:xfrm>
-            <a:off x="631627" y="4502051"/>
-            <a:ext cx="8086939" cy="174575"/>
-          </a:xfrm>
-          <a:prstGeom prst="rect">
-            <a:avLst/>
-          </a:prstGeom>
-          <a:noFill/>
-          <a:ln/>
-        </p:spPr>
-        <p:txBody>
-          <a:bodyPr wrap="square" lIns="0" tIns="0" rIns="0" bIns="0" rtlCol="0" anchor="t"/>
-          <a:lstStyle/>
-          <a:p>
-            <a:pPr algn="l" indent="0" marL="0">
-              <a:lnSpc>
-                <a:spcPts val="1375"/>
-              </a:lnSpc>
-              <a:buNone/>
-            </a:pPr>
-            <a:r>
-              <a:rPr lang="en-US" sz="1100" dirty="0">
-                <a:solidFill>
-                  <a:srgbClr val="1C2833"/>
-                </a:solidFill>
-                <a:latin typeface="Courier New" pitchFamily="34" charset="0"/>
-                <a:ea typeface="Courier New" pitchFamily="34" charset="-122"/>
-                <a:cs typeface="Courier New" pitchFamily="34" charset="-120"/>
-              </a:rPr>
-              <a:t>PRESENTER'S RESPONSE:</a:t>
-            </a:r>
-            <a:endParaRPr lang="en-US" sz="1100" dirty="0"/>
-          </a:p>
-        </p:txBody>
-      </p:sp>
-      <p:sp>
-        <p:nvSpPr>
-          <p:cNvPr id="21" name="Text 19"/>
-          <p:cNvSpPr/>
-          <p:nvPr/>
-        </p:nvSpPr>
-        <p:spPr>
-          <a:xfrm>
-            <a:off x="631627" y="4676626"/>
-            <a:ext cx="8086939" cy="174575"/>
-          </a:xfrm>
-          <a:prstGeom prst="rect">
-            <a:avLst/>
-          </a:prstGeom>
-          <a:noFill/>
-          <a:ln/>
-        </p:spPr>
-        <p:txBody>
-          <a:bodyPr wrap="square" lIns="0" tIns="0" rIns="0" bIns="0" rtlCol="0" anchor="t"/>
-          <a:lstStyle/>
-          <a:p>
-            <a:pPr algn="l" indent="0" marL="0">
-              <a:lnSpc>
-                <a:spcPts val="1375"/>
-              </a:lnSpc>
-              <a:buNone/>
-            </a:pPr>
-            <a:r>
-              <a:rPr lang="en-US" sz="1100" dirty="0">
-                <a:solidFill>
-                  <a:srgbClr val="1C2833"/>
-                </a:solidFill>
-                <a:latin typeface="Courier New" pitchFamily="34" charset="0"/>
-                <a:ea typeface="Courier New" pitchFamily="34" charset="-122"/>
-                <a:cs typeface="Courier New" pitchFamily="34" charset="-120"/>
-              </a:rPr>
-              <a:t>– I'll keep: __________________________________________</a:t>
-            </a:r>
-            <a:endParaRPr lang="en-US" sz="1100" dirty="0"/>
-          </a:p>
-        </p:txBody>
-      </p:sp>
-      <p:sp>
-        <p:nvSpPr>
-          <p:cNvPr id="22" name="Text 20"/>
-          <p:cNvSpPr/>
-          <p:nvPr/>
-        </p:nvSpPr>
-        <p:spPr>
-          <a:xfrm>
-            <a:off x="631627" y="4851202"/>
-            <a:ext cx="8086939" cy="174575"/>
-          </a:xfrm>
-          <a:prstGeom prst="rect">
-            <a:avLst/>
-          </a:prstGeom>
-          <a:noFill/>
-          <a:ln/>
-        </p:spPr>
-        <p:txBody>
-          <a:bodyPr wrap="square" lIns="0" tIns="0" rIns="0" bIns="0" rtlCol="0" anchor="t"/>
-          <a:lstStyle/>
-          <a:p>
-            <a:pPr algn="l" indent="0" marL="0">
-              <a:lnSpc>
-                <a:spcPts val="1375"/>
-              </a:lnSpc>
-              <a:buNone/>
-            </a:pPr>
-            <a:r>
-              <a:rPr lang="en-US" sz="1100" dirty="0">
-                <a:solidFill>
-                  <a:srgbClr val="1C2833"/>
-                </a:solidFill>
-                <a:latin typeface="Courier New" pitchFamily="34" charset="0"/>
-                <a:ea typeface="Courier New" pitchFamily="34" charset="-122"/>
-                <a:cs typeface="Courier New" pitchFamily="34" charset="-120"/>
-              </a:rPr>
-              <a:t>– I'll change: ________________________________________</a:t>
-            </a:r>
-            <a:endParaRPr lang="en-US" sz="1100" dirty="0"/>
-          </a:p>
-        </p:txBody>
-      </p:sp>
-      <p:sp>
-        <p:nvSpPr>
-          <p:cNvPr id="23" name="Text 21"/>
-          <p:cNvSpPr/>
-          <p:nvPr/>
-        </p:nvSpPr>
-        <p:spPr>
-          <a:xfrm>
-            <a:off x="631627" y="5025777"/>
-            <a:ext cx="8086939" cy="174575"/>
-          </a:xfrm>
-          <a:prstGeom prst="rect">
-            <a:avLst/>
-          </a:prstGeom>
-          <a:noFill/>
-          <a:ln/>
-        </p:spPr>
-        <p:txBody>
-          <a:bodyPr wrap="square" lIns="0" tIns="0" rIns="0" bIns="0" rtlCol="0" anchor="t"/>
-          <a:lstStyle/>
-          <a:p>
-            <a:pPr algn="l" indent="0" marL="0">
-              <a:lnSpc>
-                <a:spcPts val="1375"/>
-              </a:lnSpc>
-              <a:buNone/>
-            </a:pPr>
-            <a:r>
-              <a:rPr lang="en-US" sz="1100" dirty="0">
-                <a:solidFill>
-                  <a:srgbClr val="1C2833"/>
-                </a:solidFill>
-                <a:latin typeface="Courier New" pitchFamily="34" charset="0"/>
-                <a:ea typeface="Courier New" pitchFamily="34" charset="-122"/>
-                <a:cs typeface="Courier New" pitchFamily="34" charset="-120"/>
-              </a:rPr>
-              <a:t>– I'll think about: ___________________________________</a:t>
-            </a:r>
-            <a:endParaRPr lang="en-US" sz="1100" dirty="0"/>
-          </a:p>
-        </p:txBody>
-      </p:sp>
-      <p:sp>
-        <p:nvSpPr>
-          <p:cNvPr id="24" name="Text 22"/>
-          <p:cNvSpPr/>
-          <p:nvPr/>
-        </p:nvSpPr>
-        <p:spPr>
-          <a:xfrm>
-            <a:off x="406301" y="5492353"/>
+            <a:pPr algn="l" marL="342900" indent="-342900">
+              <a:lnSpc>
+                <a:spcPts val="1620"/>
+              </a:lnSpc>
+              <a:spcAft>
+                <a:spcPts val="300"/>
+              </a:spcAft>
+              <a:buSzPct val="100000"/>
+              <a:buChar char="•"/>
+            </a:pPr>
+            <a:r>
+              <a:rPr lang="en-US" sz="1200" b="1" dirty="0">
+                <a:solidFill>
+                  <a:srgbClr val="1C2833"/>
+                </a:solidFill>
+                <a:latin typeface="Arial" pitchFamily="34" charset="0"/>
+                <a:ea typeface="Arial" pitchFamily="34" charset="-122"/>
+                <a:cs typeface="Arial" pitchFamily="34" charset="-120"/>
+              </a:rPr>
+              <a:t>Presenter shares (3 min)</a:t>
+            </a:r>
+            <a:pPr algn="l" indent="0" marL="0">
+              <a:lnSpc>
+                <a:spcPts val="1620"/>
+              </a:lnSpc>
+              <a:spcAft>
+                <a:spcPts val="300"/>
+              </a:spcAft>
+              <a:buNone/>
+            </a:pPr>
+            <a:r>
+              <a:rPr lang="en-US" sz="1200" dirty="0">
+                <a:solidFill>
+                  <a:srgbClr val="1C2833"/>
+                </a:solidFill>
+                <a:latin typeface="Arial" pitchFamily="34" charset="0"/>
+                <a:ea typeface="Arial" pitchFamily="34" charset="-122"/>
+                <a:cs typeface="Arial" pitchFamily="34" charset="-120"/>
+              </a:rPr>
+              <a:t> — walks through the plan, sources, sketch. No defending yet.</a:t>
+            </a:r>
+            <a:endParaRPr lang="en-US" sz="1200" dirty="0"/>
+          </a:p>
+          <a:p>
+            <a:pPr algn="l" marL="342900" indent="-342900">
+              <a:lnSpc>
+                <a:spcPts val="1620"/>
+              </a:lnSpc>
+              <a:spcAft>
+                <a:spcPts val="300"/>
+              </a:spcAft>
+              <a:buSzPct val="100000"/>
+              <a:buChar char="•"/>
+            </a:pPr>
+            <a:r>
+              <a:rPr lang="en-US" sz="1200" b="1" dirty="0">
+                <a:solidFill>
+                  <a:srgbClr val="1C2833"/>
+                </a:solidFill>
+                <a:latin typeface="Arial" pitchFamily="34" charset="0"/>
+                <a:ea typeface="Arial" pitchFamily="34" charset="-122"/>
+                <a:cs typeface="Arial" pitchFamily="34" charset="-120"/>
+              </a:rPr>
+              <a:t>Critic asks clarifying questions (2 min)</a:t>
+            </a:r>
+            <a:pPr algn="l" indent="0" marL="0">
+              <a:lnSpc>
+                <a:spcPts val="1620"/>
+              </a:lnSpc>
+              <a:spcAft>
+                <a:spcPts val="300"/>
+              </a:spcAft>
+              <a:buNone/>
+            </a:pPr>
+            <a:r>
+              <a:rPr lang="en-US" sz="1200" dirty="0">
+                <a:solidFill>
+                  <a:srgbClr val="1C2833"/>
+                </a:solidFill>
+                <a:latin typeface="Arial" pitchFamily="34" charset="0"/>
+                <a:ea typeface="Arial" pitchFamily="34" charset="-122"/>
+                <a:cs typeface="Arial" pitchFamily="34" charset="-120"/>
+              </a:rPr>
+              <a:t> — only questions, no judgement yet.</a:t>
+            </a:r>
+            <a:endParaRPr lang="en-US" sz="1200" dirty="0"/>
+          </a:p>
+          <a:p>
+            <a:pPr algn="l" marL="342900" indent="-342900">
+              <a:lnSpc>
+                <a:spcPts val="1620"/>
+              </a:lnSpc>
+              <a:spcAft>
+                <a:spcPts val="300"/>
+              </a:spcAft>
+              <a:buSzPct val="100000"/>
+              <a:buChar char="•"/>
+            </a:pPr>
+            <a:r>
+              <a:rPr lang="en-US" sz="1200" b="1" dirty="0">
+                <a:solidFill>
+                  <a:srgbClr val="1C2833"/>
+                </a:solidFill>
+                <a:latin typeface="Arial" pitchFamily="34" charset="0"/>
+                <a:ea typeface="Arial" pitchFamily="34" charset="-122"/>
+                <a:cs typeface="Arial" pitchFamily="34" charset="-120"/>
+              </a:rPr>
+              <a:t>Critic gives "I notice / I wonder" (4 min)</a:t>
+            </a:r>
+            <a:pPr algn="l" indent="0" marL="0">
+              <a:lnSpc>
+                <a:spcPts val="1620"/>
+              </a:lnSpc>
+              <a:spcAft>
+                <a:spcPts val="300"/>
+              </a:spcAft>
+              <a:buNone/>
+            </a:pPr>
+            <a:r>
+              <a:rPr lang="en-US" sz="1200" dirty="0">
+                <a:solidFill>
+                  <a:srgbClr val="1C2833"/>
+                </a:solidFill>
+                <a:latin typeface="Arial" pitchFamily="34" charset="0"/>
+                <a:ea typeface="Arial" pitchFamily="34" charset="-122"/>
+                <a:cs typeface="Arial" pitchFamily="34" charset="-120"/>
+              </a:rPr>
+              <a:t> — three "I notice…" observations, three "I wonder…" suggestions.</a:t>
+            </a:r>
+            <a:endParaRPr lang="en-US" sz="1200" dirty="0"/>
+          </a:p>
+          <a:p>
+            <a:pPr algn="l" marL="342900" indent="-342900">
+              <a:lnSpc>
+                <a:spcPts val="1620"/>
+              </a:lnSpc>
+              <a:spcAft>
+                <a:spcPts val="300"/>
+              </a:spcAft>
+              <a:buSzPct val="100000"/>
+              <a:buChar char="•"/>
+            </a:pPr>
+            <a:r>
+              <a:rPr lang="en-US" sz="1200" b="1" dirty="0">
+                <a:solidFill>
+                  <a:srgbClr val="1C2833"/>
+                </a:solidFill>
+                <a:latin typeface="Arial" pitchFamily="34" charset="0"/>
+                <a:ea typeface="Arial" pitchFamily="34" charset="-122"/>
+                <a:cs typeface="Arial" pitchFamily="34" charset="-120"/>
+              </a:rPr>
+              <a:t>Presenter responds (3 min)</a:t>
+            </a:r>
+            <a:pPr algn="l" indent="0" marL="0">
+              <a:lnSpc>
+                <a:spcPts val="1620"/>
+              </a:lnSpc>
+              <a:spcAft>
+                <a:spcPts val="300"/>
+              </a:spcAft>
+              <a:buNone/>
+            </a:pPr>
+            <a:r>
+              <a:rPr lang="en-US" sz="1200" dirty="0">
+                <a:solidFill>
+                  <a:srgbClr val="1C2833"/>
+                </a:solidFill>
+                <a:latin typeface="Arial" pitchFamily="34" charset="0"/>
+                <a:ea typeface="Arial" pitchFamily="34" charset="-122"/>
+                <a:cs typeface="Arial" pitchFamily="34" charset="-120"/>
+              </a:rPr>
+              <a:t> — what they'll keep, what they'll change, what they'll think about overnight.</a:t>
+            </a:r>
+            <a:endParaRPr lang="en-US" sz="1200" dirty="0"/>
+          </a:p>
+          <a:p>
+            <a:pPr algn="l" marL="342900" indent="-342900">
+              <a:lnSpc>
+                <a:spcPts val="1620"/>
+              </a:lnSpc>
+              <a:spcAft>
+                <a:spcPts val="300"/>
+              </a:spcAft>
+              <a:buSzPct val="100000"/>
+              <a:buChar char="•"/>
+            </a:pPr>
+            <a:r>
+              <a:rPr lang="en-US" sz="1200" b="1" dirty="0">
+                <a:solidFill>
+                  <a:srgbClr val="1C2833"/>
+                </a:solidFill>
+                <a:latin typeface="Arial" pitchFamily="34" charset="0"/>
+                <a:ea typeface="Arial" pitchFamily="34" charset="-122"/>
+                <a:cs typeface="Arial" pitchFamily="34" charset="-120"/>
+              </a:rPr>
+              <a:t>Switch.</a:t>
+            </a:r>
+            <a:endParaRPr lang="en-US" sz="1200" dirty="0"/>
+          </a:p>
+        </p:txBody>
+      </p:sp>
+      <p:sp>
+        <p:nvSpPr>
+          <p:cNvPr id="5" name="Text 3"/>
+          <p:cNvSpPr/>
+          <p:nvPr/>
+        </p:nvSpPr>
+        <p:spPr>
+          <a:xfrm>
+            <a:off x="406301" y="4434929"/>
             <a:ext cx="8498026" cy="213271"/>
           </a:xfrm>
           <a:prstGeom prst="rect">
@@ -6055,7 +8765,7 @@
                 <a:ea typeface="Georgia" pitchFamily="34" charset="-122"/>
                 <a:cs typeface="Georgia" pitchFamily="34" charset="-120"/>
               </a:rPr>
-              <a:t>Homework</a:t>
+              <a:t>Core (10 min) (cont.)</a:t>
             </a:r>
             <a:endParaRPr lang="en-US" sz="1800" dirty="0"/>
           </a:p>
@@ -6069,8 +8779,8 @@
         </p:nvSpPr>
         <p:spPr>
           <a:xfrm>
-            <a:off x="406301" y="870942"/>
-            <a:ext cx="8498026" cy="426541"/>
+            <a:off x="634901" y="883593"/>
+            <a:ext cx="8102798" cy="487561"/>
           </a:xfrm>
           <a:prstGeom prst="rect">
             <a:avLst/>
@@ -6082,20 +8792,18 @@
           <a:bodyPr wrap="square" lIns="0" tIns="0" rIns="0" bIns="0" rtlCol="0" anchor="t"/>
           <a:lstStyle/>
           <a:p>
-            <a:pPr algn="l" indent="0" marL="0">
-              <a:lnSpc>
-                <a:spcPts val="1680"/>
-              </a:lnSpc>
-              <a:spcBef>
-                <a:spcPts val="300"/>
-              </a:spcBef>
-              <a:spcAft>
-                <a:spcPts val="300"/>
-              </a:spcAft>
-              <a:buNone/>
-            </a:pPr>
-            <a:r>
-              <a:rPr lang="en-US" sz="1200" dirty="0">
+            <a:pPr algn="l" marL="342900" indent="-342900">
+              <a:lnSpc>
+                <a:spcPts val="1620"/>
+              </a:lnSpc>
+              <a:spcAft>
+                <a:spcPts val="300"/>
+              </a:spcAft>
+              <a:buSzPct val="100000"/>
+              <a:buChar char="•"/>
+            </a:pPr>
+            <a:r>
+              <a:rPr lang="en-US" sz="1200" b="1" dirty="0">
                 <a:solidFill>
                   <a:srgbClr val="1C2833"/>
                 </a:solidFill>
@@ -6103,7 +8811,27 @@
                 <a:ea typeface="Arial" pitchFamily="34" charset="-122"/>
                 <a:cs typeface="Arial" pitchFamily="34" charset="-120"/>
               </a:rPr>
-              <a:t>– Re-read your critic's notes overnight. – Decide which three changes you'll make. Write them in your journal. – Bring ALL materials to class tomorrow. Build session starts the moment you sit down.</a:t>
+              <a:t>Write down everything.</a:t>
+            </a:r>
+            <a:pPr algn="l" indent="0" marL="0">
+              <a:lnSpc>
+                <a:spcPts val="1620"/>
+              </a:lnSpc>
+              <a:spcAft>
+                <a:spcPts val="300"/>
+              </a:spcAft>
+              <a:buNone/>
+            </a:pPr>
+            <a:r>
+              <a:rPr lang="en-US" sz="1200" dirty="0">
+                <a:solidFill>
+                  <a:srgbClr val="1C2833"/>
+                </a:solidFill>
+                <a:latin typeface="Arial" pitchFamily="34" charset="0"/>
+                <a:ea typeface="Arial" pitchFamily="34" charset="-122"/>
+                <a:cs typeface="Arial" pitchFamily="34" charset="-120"/>
+              </a:rPr>
+              <a:t> Both students' protocols are on paper. By end of class, every student has a written critique sheet to take home.</a:t>
             </a:r>
             <a:endParaRPr lang="en-US" sz="1200" dirty="0"/>
           </a:p>
